--- a/artifacts/greenplum-query-tuning-theory.pptx
+++ b/artifacts/greenplum-query-tuning-theory.pptx
@@ -48,6 +48,15 @@
     <p:sldId id="296" r:id="rId47"/>
     <p:sldId id="297" r:id="rId48"/>
     <p:sldId id="298" r:id="rId49"/>
+    <p:sldId id="299" r:id="rId50"/>
+    <p:sldId id="300" r:id="rId51"/>
+    <p:sldId id="301" r:id="rId52"/>
+    <p:sldId id="302" r:id="rId53"/>
+    <p:sldId id="303" r:id="rId54"/>
+    <p:sldId id="304" r:id="rId55"/>
+    <p:sldId id="305" r:id="rId56"/>
+    <p:sldId id="306" r:id="rId57"/>
+    <p:sldId id="307" r:id="rId58"/>
   </p:sldIdLst>
   <p:sldSz cx="12192000" cy="6858000" type="screen4x3"/>
   <p:notesSz cx="6858000" cy="9144000"/>
@@ -23828,7 +23837,7 @@
               </a:defRPr>
             </a:pPr>
             <a:r>
-              <a:t>TEMP</a:t>
+              <a:t>TEMP TRIO</a:t>
             </a:r>
           </a:p>
         </p:txBody>
@@ -23864,7 +23873,7 @@
               </a:defRPr>
             </a:pPr>
             <a:r>
-              <a:t>TEMP — physical stage с ANALYZE и distribution</a:t>
+              <a:t>Три разных «временных» механизма — не путать</a:t>
             </a:r>
           </a:p>
         </p:txBody>
@@ -23900,7 +23909,7 @@
               </a:defRPr>
             </a:pPr>
             <a:r>
-              <a:t>Фиксируем промежуточный контракт, который optimizer пересчитывает заново.</a:t>
+              <a:t>CTE, TEMP TABLE и spill/workfiles живут в разных слоях стека.</a:t>
             </a:r>
           </a:p>
         </p:txBody>
@@ -23950,7 +23959,7 @@
         <p:spPr>
           <a:xfrm>
             <a:off x="548640" y="2331720"/>
-            <a:ext cx="5303520" cy="1508760"/>
+            <a:ext cx="5303520" cy="1691640"/>
           </a:xfrm>
           <a:prstGeom prst="roundRect">
             <a:avLst>
@@ -24003,7 +24012,7 @@
             <a:avLst/>
           </a:prstGeom>
           <a:solidFill>
-            <a:srgbClr val="10A37F"/>
+            <a:srgbClr val="B7791F"/>
           </a:solidFill>
           <a:ln>
             <a:noFill/>
@@ -24062,7 +24071,7 @@
               </a:defRPr>
             </a:pPr>
             <a:r>
-              <a:t>Зачем</a:t>
+              <a:t>CTE / WITH</a:t>
             </a:r>
           </a:p>
         </p:txBody>
@@ -24076,21 +24085,21 @@
         <p:spPr>
           <a:xfrm>
             <a:off x="749808" y="3108960"/>
-            <a:ext cx="4937760" cy="548640"/>
-          </a:xfrm>
-          <a:prstGeom prst="rect">
-            <a:avLst/>
-          </a:prstGeom>
-          <a:noFill/>
-        </p:spPr>
-        <p:txBody>
-          <a:bodyPr wrap="square">
-            <a:spAutoFit/>
-          </a:bodyPr>
-          <a:lstStyle/>
-          <a:p>
-            <a:pPr algn="l">
-              <a:defRPr sz="1300" b="0">
+            <a:ext cx="4937760" cy="731520"/>
+          </a:xfrm>
+          <a:prstGeom prst="rect">
+            <a:avLst/>
+          </a:prstGeom>
+          <a:noFill/>
+        </p:spPr>
+        <p:txBody>
+          <a:bodyPr wrap="square">
+            <a:spAutoFit/>
+          </a:bodyPr>
+          <a:lstStyle/>
+          <a:p>
+            <a:pPr algn="l">
+              <a:defRPr sz="1100" b="0">
                 <a:solidFill>
                   <a:srgbClr val="6E6E68"/>
                 </a:solidFill>
@@ -24098,7 +24107,7 @@
               </a:defRPr>
             </a:pPr>
             <a:r>
-              <a:t>Новый grain + новый plan.</a:t>
+              <a:t>Логическая подзапросная форма. Optimizer может инлайнить — нет гарантированного physical stage, stats, DISTRIBUTED BY.</a:t>
             </a:r>
           </a:p>
         </p:txBody>
@@ -24112,7 +24121,7 @@
         <p:spPr>
           <a:xfrm>
             <a:off x="6217920" y="2331720"/>
-            <a:ext cx="5303520" cy="1508760"/>
+            <a:ext cx="5303520" cy="1691640"/>
           </a:xfrm>
           <a:prstGeom prst="roundRect">
             <a:avLst>
@@ -24165,7 +24174,7 @@
             <a:avLst/>
           </a:prstGeom>
           <a:solidFill>
-            <a:srgbClr val="2F6FED"/>
+            <a:srgbClr val="10A37F"/>
           </a:solidFill>
           <a:ln>
             <a:noFill/>
@@ -24224,7 +24233,7 @@
               </a:defRPr>
             </a:pPr>
             <a:r>
-              <a:t>ANALYZE</a:t>
+              <a:t>TEMP TABLE</a:t>
             </a:r>
           </a:p>
         </p:txBody>
@@ -24238,21 +24247,21 @@
         <p:spPr>
           <a:xfrm>
             <a:off x="6419088" y="3108960"/>
-            <a:ext cx="4937760" cy="548640"/>
-          </a:xfrm>
-          <a:prstGeom prst="rect">
-            <a:avLst/>
-          </a:prstGeom>
-          <a:noFill/>
-        </p:spPr>
-        <p:txBody>
-          <a:bodyPr wrap="square">
-            <a:spAutoFit/>
-          </a:bodyPr>
-          <a:lstStyle/>
-          <a:p>
-            <a:pPr algn="l">
-              <a:defRPr sz="1300" b="0">
+            <a:ext cx="4937760" cy="731520"/>
+          </a:xfrm>
+          <a:prstGeom prst="rect">
+            <a:avLst/>
+          </a:prstGeom>
+          <a:noFill/>
+        </p:spPr>
+        <p:txBody>
+          <a:bodyPr wrap="square">
+            <a:spAutoFit/>
+          </a:bodyPr>
+          <a:lstStyle/>
+          <a:p>
+            <a:pPr algn="l">
+              <a:defRPr sz="1100" b="0">
                 <a:solidFill>
                   <a:srgbClr val="6E6E68"/>
                 </a:solidFill>
@@ -24260,7 +24269,7 @@
               </a:defRPr>
             </a:pPr>
             <a:r>
-              <a:t>Обязателен после наполнения.</a:t>
+              <a:t>Явная relation в pg_temp_NNN. Catalog + relfilenode t_* на QE. Можно ANALYZE и задать distribution.</a:t>
             </a:r>
           </a:p>
         </p:txBody>
@@ -24274,7 +24283,7 @@
         <p:spPr>
           <a:xfrm>
             <a:off x="548640" y="4160520"/>
-            <a:ext cx="5303520" cy="1508760"/>
+            <a:ext cx="5303520" cy="1691640"/>
           </a:xfrm>
           <a:prstGeom prst="roundRect">
             <a:avLst>
@@ -24327,7 +24336,7 @@
             <a:avLst/>
           </a:prstGeom>
           <a:solidFill>
-            <a:srgbClr val="B7791F"/>
+            <a:srgbClr val="B42318"/>
           </a:solidFill>
           <a:ln>
             <a:noFill/>
@@ -24386,7 +24395,7 @@
               </a:defRPr>
             </a:pPr>
             <a:r>
-              <a:t>Distribution</a:t>
+              <a:t>Spill / workfiles</a:t>
             </a:r>
           </a:p>
         </p:txBody>
@@ -24400,21 +24409,21 @@
         <p:spPr>
           <a:xfrm>
             <a:off x="749808" y="4937760"/>
-            <a:ext cx="4937760" cy="548640"/>
-          </a:xfrm>
-          <a:prstGeom prst="rect">
-            <a:avLst/>
-          </a:prstGeom>
-          <a:noFill/>
-        </p:spPr>
-        <p:txBody>
-          <a:bodyPr wrap="square">
-            <a:spAutoFit/>
-          </a:bodyPr>
-          <a:lstStyle/>
-          <a:p>
-            <a:pPr algn="l">
-              <a:defRPr sz="1300" b="0">
+            <a:ext cx="4937760" cy="731520"/>
+          </a:xfrm>
+          <a:prstGeom prst="rect">
+            <a:avLst/>
+          </a:prstGeom>
+          <a:noFill/>
+        </p:spPr>
+        <p:txBody>
+          <a:bodyPr wrap="square">
+            <a:spAutoFit/>
+          </a:bodyPr>
+          <a:lstStyle/>
+          <a:p>
+            <a:pPr algn="l">
+              <a:defRPr sz="1100" b="0">
                 <a:solidFill>
                   <a:srgbClr val="6E6E68"/>
                 </a:solidFill>
@@ -24422,7 +24431,7 @@
               </a:defRPr>
             </a:pPr>
             <a:r>
-              <a:t>Под следующий join key.</a:t>
+              <a:t>Файлы исполнителей Sort/Hash при нехватке statement_mem. Путь: &lt;datadir&gt;/base/pgsql_tmp/pgsql_tmp_Sort_*. Не relation.</a:t>
             </a:r>
           </a:p>
         </p:txBody>
@@ -24436,7 +24445,7 @@
         <p:spPr>
           <a:xfrm>
             <a:off x="6217920" y="4160520"/>
-            <a:ext cx="5303520" cy="1508760"/>
+            <a:ext cx="5303520" cy="1691640"/>
           </a:xfrm>
           <a:prstGeom prst="roundRect">
             <a:avLst>
@@ -24489,7 +24498,7 @@
             <a:avLst/>
           </a:prstGeom>
           <a:solidFill>
-            <a:srgbClr val="B42318"/>
+            <a:srgbClr val="2F6FED"/>
           </a:solidFill>
           <a:ln>
             <a:noFill/>
@@ -24548,7 +24557,7 @@
               </a:defRPr>
             </a:pPr>
             <a:r>
-              <a:t>Риск</a:t>
+              <a:t>Правило</a:t>
             </a:r>
           </a:p>
         </p:txBody>
@@ -24562,21 +24571,21 @@
         <p:spPr>
           <a:xfrm>
             <a:off x="6419088" y="4937760"/>
-            <a:ext cx="4937760" cy="548640"/>
-          </a:xfrm>
-          <a:prstGeom prst="rect">
-            <a:avLst/>
-          </a:prstGeom>
-          <a:noFill/>
-        </p:spPr>
-        <p:txBody>
-          <a:bodyPr wrap="square">
-            <a:spAutoFit/>
-          </a:bodyPr>
-          <a:lstStyle/>
-          <a:p>
-            <a:pPr algn="l">
-              <a:defRPr sz="1300" b="0">
+            <a:ext cx="4937760" cy="731520"/>
+          </a:xfrm>
+          <a:prstGeom prst="rect">
+            <a:avLst/>
+          </a:prstGeom>
+          <a:noFill/>
+        </p:spPr>
+        <p:txBody>
+          <a:bodyPr wrap="square">
+            <a:spAutoFit/>
+          </a:bodyPr>
+          <a:lstStyle/>
+          <a:p>
+            <a:pPr algn="l">
+              <a:defRPr sz="1100" b="0">
                 <a:solidFill>
                   <a:srgbClr val="6E6E68"/>
                 </a:solidFill>
@@ -24584,7 +24593,7 @@
               </a:defRPr>
             </a:pPr>
             <a:r>
-              <a:t>TEMP без фильтра увеличивает стоимость.</a:t>
+              <a:t>«Не было CREATE TEMP ⇒ не было диска» — ложь. Spill пишется и без TEMP TABLE.</a:t>
             </a:r>
           </a:p>
         </p:txBody>
@@ -24767,7 +24776,7 @@
               </a:defRPr>
             </a:pPr>
             <a:r>
-              <a:t>TEMP INTERNALS</a:t>
+              <a:t>TEMP CREATE</a:t>
             </a:r>
           </a:p>
         </p:txBody>
@@ -24803,7 +24812,7 @@
               </a:defRPr>
             </a:pPr>
             <a:r>
-              <a:t>pg_temp, файлы сегментов, spill ≠ TEMP TABLE</a:t>
+              <a:t>Как создаётся TEMP: SQL-контракт сессии</a:t>
             </a:r>
           </a:p>
         </p:txBody>
@@ -24839,7 +24848,7 @@
               </a:defRPr>
             </a:pPr>
             <a:r>
-              <a:t>Явная TEMP relation и hash/sort spill files — разные механизмы.</a:t>
+              <a:t>Lifecycle = сессия (или ON COMMIT). Другие сессии объект не видят.</a:t>
             </a:r>
           </a:p>
         </p:txBody>
@@ -24888,8 +24897,8 @@
         </p:nvSpPr>
         <p:spPr>
           <a:xfrm>
-            <a:off x="548640" y="2331720"/>
-            <a:ext cx="5303520" cy="1508760"/>
+            <a:off x="640080" y="2331720"/>
+            <a:ext cx="10881360" cy="3657600"/>
           </a:xfrm>
           <a:prstGeom prst="roundRect">
             <a:avLst>
@@ -24929,44 +24938,37 @@
       </p:sp>
       <p:sp>
         <p:nvSpPr>
-          <p:cNvPr id="10" name="Rectangle 9"/>
-          <p:cNvSpPr/>
-          <p:nvPr/>
-        </p:nvSpPr>
-        <p:spPr>
-          <a:xfrm>
-            <a:off x="731520" y="2514600"/>
-            <a:ext cx="411480" cy="45720"/>
-          </a:xfrm>
-          <a:prstGeom prst="rect">
-            <a:avLst/>
-          </a:prstGeom>
-          <a:solidFill>
-            <a:srgbClr val="10A37F"/>
-          </a:solidFill>
-          <a:ln>
-            <a:noFill/>
-          </a:ln>
-        </p:spPr>
-        <p:style>
-          <a:lnRef idx="1">
-            <a:schemeClr val="accent1"/>
-          </a:lnRef>
-          <a:fillRef idx="3">
-            <a:schemeClr val="accent1"/>
-          </a:fillRef>
-          <a:effectRef idx="2">
-            <a:schemeClr val="accent1"/>
-          </a:effectRef>
-          <a:fontRef idx="minor">
-            <a:schemeClr val="lt1"/>
-          </a:fontRef>
-        </p:style>
-        <p:txBody>
-          <a:bodyPr rtlCol="0" anchor="ctr"/>
-          <a:lstStyle/>
-          <a:p>
-            <a:pPr algn="ctr"/>
+          <p:cNvPr id="10" name="TextBox 9"/>
+          <p:cNvSpPr txBox="1"/>
+          <p:nvPr/>
+        </p:nvSpPr>
+        <p:spPr>
+          <a:xfrm>
+            <a:off x="868680" y="2468880"/>
+            <a:ext cx="1828800" cy="274320"/>
+          </a:xfrm>
+          <a:prstGeom prst="rect">
+            <a:avLst/>
+          </a:prstGeom>
+          <a:noFill/>
+        </p:spPr>
+        <p:txBody>
+          <a:bodyPr wrap="square">
+            <a:spAutoFit/>
+          </a:bodyPr>
+          <a:lstStyle/>
+          <a:p>
+            <a:pPr algn="l">
+              <a:defRPr sz="1200" b="1">
+                <a:solidFill>
+                  <a:srgbClr val="10A37F"/>
+                </a:solidFill>
+                <a:latin typeface="Calibri"/>
+              </a:defRPr>
+            </a:pPr>
+            <a:r>
+              <a:t>SQL</a:t>
+            </a:r>
           </a:p>
         </p:txBody>
       </p:sp>
@@ -24978,552 +24980,76 @@
         </p:nvSpPr>
         <p:spPr>
           <a:xfrm>
-            <a:off x="749808" y="2651760"/>
-            <a:ext cx="4937760" cy="411480"/>
-          </a:xfrm>
-          <a:prstGeom prst="rect">
-            <a:avLst/>
-          </a:prstGeom>
-          <a:noFill/>
-        </p:spPr>
-        <p:txBody>
-          <a:bodyPr wrap="square">
-            <a:spAutoFit/>
-          </a:bodyPr>
-          <a:lstStyle/>
-          <a:p>
-            <a:pPr algn="l">
-              <a:defRPr sz="1800" b="1">
+            <a:off x="868680" y="2788920"/>
+            <a:ext cx="10424160" cy="2926080"/>
+          </a:xfrm>
+          <a:prstGeom prst="rect">
+            <a:avLst/>
+          </a:prstGeom>
+          <a:noFill/>
+        </p:spPr>
+        <p:txBody>
+          <a:bodyPr wrap="square">
+            <a:spAutoFit/>
+          </a:bodyPr>
+          <a:lstStyle/>
+          <a:p>
+            <a:pPr algn="l">
+              <a:defRPr sz="1100" b="0">
                 <a:solidFill>
                   <a:srgbClr val="202123"/>
                 </a:solidFill>
-                <a:latin typeface="Calibri"/>
-              </a:defRPr>
-            </a:pPr>
-            <a:r>
-              <a:t>Namespace</a:t>
-            </a:r>
-          </a:p>
-        </p:txBody>
-      </p:sp>
-      <p:sp>
-        <p:nvSpPr>
-          <p:cNvPr id="12" name="TextBox 11"/>
-          <p:cNvSpPr txBox="1"/>
-          <p:nvPr/>
-        </p:nvSpPr>
-        <p:spPr>
-          <a:xfrm>
-            <a:off x="749808" y="3108960"/>
-            <a:ext cx="4937760" cy="548640"/>
-          </a:xfrm>
-          <a:prstGeom prst="rect">
-            <a:avLst/>
-          </a:prstGeom>
-          <a:noFill/>
-        </p:spPr>
-        <p:txBody>
-          <a:bodyPr wrap="square">
-            <a:spAutoFit/>
-          </a:bodyPr>
-          <a:lstStyle/>
-          <a:p>
-            <a:pPr algn="l">
-              <a:defRPr sz="1300" b="0">
-                <a:solidFill>
-                  <a:srgbClr val="6E6E68"/>
-                </a:solidFill>
-                <a:latin typeface="Calibri"/>
-              </a:defRPr>
-            </a:pPr>
-            <a:r>
-              <a:t>pg_temp_NNN session-local.</a:t>
-            </a:r>
-          </a:p>
-        </p:txBody>
-      </p:sp>
-      <p:sp>
-        <p:nvSpPr>
-          <p:cNvPr id="13" name="Rounded Rectangle 12"/>
-          <p:cNvSpPr/>
-          <p:nvPr/>
-        </p:nvSpPr>
-        <p:spPr>
-          <a:xfrm>
-            <a:off x="6217920" y="2331720"/>
-            <a:ext cx="5303520" cy="1508760"/>
-          </a:xfrm>
-          <a:prstGeom prst="roundRect">
-            <a:avLst>
-              <a:gd name="adj" fmla="val 8000"/>
-            </a:avLst>
-          </a:prstGeom>
-          <a:solidFill>
-            <a:srgbClr val="FFFFFF"/>
-          </a:solidFill>
-          <a:ln>
-            <a:solidFill>
-              <a:srgbClr val="D8D7D0"/>
-            </a:solidFill>
-          </a:ln>
-        </p:spPr>
-        <p:style>
-          <a:lnRef idx="1">
-            <a:schemeClr val="accent1"/>
-          </a:lnRef>
-          <a:fillRef idx="3">
-            <a:schemeClr val="accent1"/>
-          </a:fillRef>
-          <a:effectRef idx="2">
-            <a:schemeClr val="accent1"/>
-          </a:effectRef>
-          <a:fontRef idx="minor">
-            <a:schemeClr val="lt1"/>
-          </a:fontRef>
-        </p:style>
-        <p:txBody>
-          <a:bodyPr rtlCol="0" anchor="ctr"/>
-          <a:lstStyle/>
-          <a:p>
-            <a:pPr algn="ctr"/>
-          </a:p>
-        </p:txBody>
-      </p:sp>
-      <p:sp>
-        <p:nvSpPr>
-          <p:cNvPr id="14" name="Rectangle 13"/>
-          <p:cNvSpPr/>
-          <p:nvPr/>
-        </p:nvSpPr>
-        <p:spPr>
-          <a:xfrm>
-            <a:off x="6400800" y="2514600"/>
-            <a:ext cx="411480" cy="45720"/>
-          </a:xfrm>
-          <a:prstGeom prst="rect">
-            <a:avLst/>
-          </a:prstGeom>
-          <a:solidFill>
-            <a:srgbClr val="2F6FED"/>
-          </a:solidFill>
-          <a:ln>
-            <a:noFill/>
-          </a:ln>
-        </p:spPr>
-        <p:style>
-          <a:lnRef idx="1">
-            <a:schemeClr val="accent1"/>
-          </a:lnRef>
-          <a:fillRef idx="3">
-            <a:schemeClr val="accent1"/>
-          </a:fillRef>
-          <a:effectRef idx="2">
-            <a:schemeClr val="accent1"/>
-          </a:effectRef>
-          <a:fontRef idx="minor">
-            <a:schemeClr val="lt1"/>
-          </a:fontRef>
-        </p:style>
-        <p:txBody>
-          <a:bodyPr rtlCol="0" anchor="ctr"/>
-          <a:lstStyle/>
-          <a:p>
-            <a:pPr algn="ctr"/>
-          </a:p>
-        </p:txBody>
-      </p:sp>
-      <p:sp>
-        <p:nvSpPr>
-          <p:cNvPr id="15" name="TextBox 14"/>
-          <p:cNvSpPr txBox="1"/>
-          <p:nvPr/>
-        </p:nvSpPr>
-        <p:spPr>
-          <a:xfrm>
-            <a:off x="6419088" y="2651760"/>
-            <a:ext cx="4937760" cy="411480"/>
-          </a:xfrm>
-          <a:prstGeom prst="rect">
-            <a:avLst/>
-          </a:prstGeom>
-          <a:noFill/>
-        </p:spPr>
-        <p:txBody>
-          <a:bodyPr wrap="square">
-            <a:spAutoFit/>
-          </a:bodyPr>
-          <a:lstStyle/>
-          <a:p>
-            <a:pPr algn="l">
-              <a:defRPr sz="1800" b="1">
-                <a:solidFill>
-                  <a:srgbClr val="202123"/>
-                </a:solidFill>
-                <a:latin typeface="Calibri"/>
-              </a:defRPr>
-            </a:pPr>
-            <a:r>
-              <a:t>Файлы</a:t>
-            </a:r>
-          </a:p>
-        </p:txBody>
-      </p:sp>
-      <p:sp>
-        <p:nvSpPr>
-          <p:cNvPr id="16" name="TextBox 15"/>
-          <p:cNvSpPr txBox="1"/>
-          <p:nvPr/>
-        </p:nvSpPr>
-        <p:spPr>
-          <a:xfrm>
-            <a:off x="6419088" y="3108960"/>
-            <a:ext cx="4937760" cy="548640"/>
-          </a:xfrm>
-          <a:prstGeom prst="rect">
-            <a:avLst/>
-          </a:prstGeom>
-          <a:noFill/>
-        </p:spPr>
-        <p:txBody>
-          <a:bodyPr wrap="square">
-            <a:spAutoFit/>
-          </a:bodyPr>
-          <a:lstStyle/>
-          <a:p>
-            <a:pPr algn="l">
-              <a:defRPr sz="1300" b="0">
-                <a:solidFill>
-                  <a:srgbClr val="6E6E68"/>
-                </a:solidFill>
-                <a:latin typeface="Calibri"/>
-              </a:defRPr>
-            </a:pPr>
-            <a:r>
-              <a:t>Temporary relfilenode на segments.</a:t>
-            </a:r>
-          </a:p>
-        </p:txBody>
-      </p:sp>
-      <p:sp>
-        <p:nvSpPr>
-          <p:cNvPr id="17" name="Rounded Rectangle 16"/>
-          <p:cNvSpPr/>
-          <p:nvPr/>
-        </p:nvSpPr>
-        <p:spPr>
-          <a:xfrm>
-            <a:off x="548640" y="4160520"/>
-            <a:ext cx="5303520" cy="1508760"/>
-          </a:xfrm>
-          <a:prstGeom prst="roundRect">
-            <a:avLst>
-              <a:gd name="adj" fmla="val 8000"/>
-            </a:avLst>
-          </a:prstGeom>
-          <a:solidFill>
-            <a:srgbClr val="FFFFFF"/>
-          </a:solidFill>
-          <a:ln>
-            <a:solidFill>
-              <a:srgbClr val="D8D7D0"/>
-            </a:solidFill>
-          </a:ln>
-        </p:spPr>
-        <p:style>
-          <a:lnRef idx="1">
-            <a:schemeClr val="accent1"/>
-          </a:lnRef>
-          <a:fillRef idx="3">
-            <a:schemeClr val="accent1"/>
-          </a:fillRef>
-          <a:effectRef idx="2">
-            <a:schemeClr val="accent1"/>
-          </a:effectRef>
-          <a:fontRef idx="minor">
-            <a:schemeClr val="lt1"/>
-          </a:fontRef>
-        </p:style>
-        <p:txBody>
-          <a:bodyPr rtlCol="0" anchor="ctr"/>
-          <a:lstStyle/>
-          <a:p>
-            <a:pPr algn="ctr"/>
-          </a:p>
-        </p:txBody>
-      </p:sp>
-      <p:sp>
-        <p:nvSpPr>
-          <p:cNvPr id="18" name="Rectangle 17"/>
-          <p:cNvSpPr/>
-          <p:nvPr/>
-        </p:nvSpPr>
-        <p:spPr>
-          <a:xfrm>
-            <a:off x="731520" y="4343400"/>
-            <a:ext cx="411480" cy="45720"/>
-          </a:xfrm>
-          <a:prstGeom prst="rect">
-            <a:avLst/>
-          </a:prstGeom>
-          <a:solidFill>
-            <a:srgbClr val="B7791F"/>
-          </a:solidFill>
-          <a:ln>
-            <a:noFill/>
-          </a:ln>
-        </p:spPr>
-        <p:style>
-          <a:lnRef idx="1">
-            <a:schemeClr val="accent1"/>
-          </a:lnRef>
-          <a:fillRef idx="3">
-            <a:schemeClr val="accent1"/>
-          </a:fillRef>
-          <a:effectRef idx="2">
-            <a:schemeClr val="accent1"/>
-          </a:effectRef>
-          <a:fontRef idx="minor">
-            <a:schemeClr val="lt1"/>
-          </a:fontRef>
-        </p:style>
-        <p:txBody>
-          <a:bodyPr rtlCol="0" anchor="ctr"/>
-          <a:lstStyle/>
-          <a:p>
-            <a:pPr algn="ctr"/>
-          </a:p>
-        </p:txBody>
-      </p:sp>
-      <p:sp>
-        <p:nvSpPr>
-          <p:cNvPr id="19" name="TextBox 18"/>
-          <p:cNvSpPr txBox="1"/>
-          <p:nvPr/>
-        </p:nvSpPr>
-        <p:spPr>
-          <a:xfrm>
-            <a:off x="749808" y="4480560"/>
-            <a:ext cx="4937760" cy="411480"/>
-          </a:xfrm>
-          <a:prstGeom prst="rect">
-            <a:avLst/>
-          </a:prstGeom>
-          <a:noFill/>
-        </p:spPr>
-        <p:txBody>
-          <a:bodyPr wrap="square">
-            <a:spAutoFit/>
-          </a:bodyPr>
-          <a:lstStyle/>
-          <a:p>
-            <a:pPr algn="l">
-              <a:defRPr sz="1800" b="1">
-                <a:solidFill>
-                  <a:srgbClr val="202123"/>
-                </a:solidFill>
-                <a:latin typeface="Calibri"/>
-              </a:defRPr>
-            </a:pPr>
-            <a:r>
-              <a:t>Spill</a:t>
-            </a:r>
-          </a:p>
-        </p:txBody>
-      </p:sp>
-      <p:sp>
-        <p:nvSpPr>
-          <p:cNvPr id="20" name="TextBox 19"/>
-          <p:cNvSpPr txBox="1"/>
-          <p:nvPr/>
-        </p:nvSpPr>
-        <p:spPr>
-          <a:xfrm>
-            <a:off x="749808" y="4937760"/>
-            <a:ext cx="4937760" cy="548640"/>
-          </a:xfrm>
-          <a:prstGeom prst="rect">
-            <a:avLst/>
-          </a:prstGeom>
-          <a:noFill/>
-        </p:spPr>
-        <p:txBody>
-          <a:bodyPr wrap="square">
-            <a:spAutoFit/>
-          </a:bodyPr>
-          <a:lstStyle/>
-          <a:p>
-            <a:pPr algn="l">
-              <a:defRPr sz="1300" b="0">
-                <a:solidFill>
-                  <a:srgbClr val="6E6E68"/>
-                </a:solidFill>
-                <a:latin typeface="Calibri"/>
-              </a:defRPr>
-            </a:pPr>
-            <a:r>
-              <a:t>work_mem miss → temp files исполнителей.</a:t>
-            </a:r>
-          </a:p>
-        </p:txBody>
-      </p:sp>
-      <p:sp>
-        <p:nvSpPr>
-          <p:cNvPr id="21" name="Rounded Rectangle 20"/>
-          <p:cNvSpPr/>
-          <p:nvPr/>
-        </p:nvSpPr>
-        <p:spPr>
-          <a:xfrm>
-            <a:off x="6217920" y="4160520"/>
-            <a:ext cx="5303520" cy="1508760"/>
-          </a:xfrm>
-          <a:prstGeom prst="roundRect">
-            <a:avLst>
-              <a:gd name="adj" fmla="val 8000"/>
-            </a:avLst>
-          </a:prstGeom>
-          <a:solidFill>
-            <a:srgbClr val="FFFFFF"/>
-          </a:solidFill>
-          <a:ln>
-            <a:solidFill>
-              <a:srgbClr val="D8D7D0"/>
-            </a:solidFill>
-          </a:ln>
-        </p:spPr>
-        <p:style>
-          <a:lnRef idx="1">
-            <a:schemeClr val="accent1"/>
-          </a:lnRef>
-          <a:fillRef idx="3">
-            <a:schemeClr val="accent1"/>
-          </a:fillRef>
-          <a:effectRef idx="2">
-            <a:schemeClr val="accent1"/>
-          </a:effectRef>
-          <a:fontRef idx="minor">
-            <a:schemeClr val="lt1"/>
-          </a:fontRef>
-        </p:style>
-        <p:txBody>
-          <a:bodyPr rtlCol="0" anchor="ctr"/>
-          <a:lstStyle/>
-          <a:p>
-            <a:pPr algn="ctr"/>
-          </a:p>
-        </p:txBody>
-      </p:sp>
-      <p:sp>
-        <p:nvSpPr>
-          <p:cNvPr id="22" name="Rectangle 21"/>
-          <p:cNvSpPr/>
-          <p:nvPr/>
-        </p:nvSpPr>
-        <p:spPr>
-          <a:xfrm>
-            <a:off x="6400800" y="4343400"/>
-            <a:ext cx="411480" cy="45720"/>
-          </a:xfrm>
-          <a:prstGeom prst="rect">
-            <a:avLst/>
-          </a:prstGeom>
-          <a:solidFill>
-            <a:srgbClr val="10A37F"/>
-          </a:solidFill>
-          <a:ln>
-            <a:noFill/>
-          </a:ln>
-        </p:spPr>
-        <p:style>
-          <a:lnRef idx="1">
-            <a:schemeClr val="accent1"/>
-          </a:lnRef>
-          <a:fillRef idx="3">
-            <a:schemeClr val="accent1"/>
-          </a:fillRef>
-          <a:effectRef idx="2">
-            <a:schemeClr val="accent1"/>
-          </a:effectRef>
-          <a:fontRef idx="minor">
-            <a:schemeClr val="lt1"/>
-          </a:fontRef>
-        </p:style>
-        <p:txBody>
-          <a:bodyPr rtlCol="0" anchor="ctr"/>
-          <a:lstStyle/>
-          <a:p>
-            <a:pPr algn="ctr"/>
-          </a:p>
-        </p:txBody>
-      </p:sp>
-      <p:sp>
-        <p:nvSpPr>
-          <p:cNvPr id="23" name="TextBox 22"/>
-          <p:cNvSpPr txBox="1"/>
-          <p:nvPr/>
-        </p:nvSpPr>
-        <p:spPr>
-          <a:xfrm>
-            <a:off x="6419088" y="4480560"/>
-            <a:ext cx="4937760" cy="411480"/>
-          </a:xfrm>
-          <a:prstGeom prst="rect">
-            <a:avLst/>
-          </a:prstGeom>
-          <a:noFill/>
-        </p:spPr>
-        <p:txBody>
-          <a:bodyPr wrap="square">
-            <a:spAutoFit/>
-          </a:bodyPr>
-          <a:lstStyle/>
-          <a:p>
-            <a:pPr algn="l">
-              <a:defRPr sz="1800" b="1">
-                <a:solidFill>
-                  <a:srgbClr val="202123"/>
-                </a:solidFill>
-                <a:latin typeface="Calibri"/>
-              </a:defRPr>
-            </a:pPr>
-            <a:r>
-              <a:t>GPDB</a:t>
-            </a:r>
-          </a:p>
-        </p:txBody>
-      </p:sp>
-      <p:sp>
-        <p:nvSpPr>
-          <p:cNvPr id="24" name="TextBox 23"/>
-          <p:cNvSpPr txBox="1"/>
-          <p:nvPr/>
-        </p:nvSpPr>
-        <p:spPr>
-          <a:xfrm>
-            <a:off x="6419088" y="4937760"/>
-            <a:ext cx="4937760" cy="548640"/>
-          </a:xfrm>
-          <a:prstGeom prst="rect">
-            <a:avLst/>
-          </a:prstGeom>
-          <a:noFill/>
-        </p:spPr>
-        <p:txBody>
-          <a:bodyPr wrap="square">
-            <a:spAutoFit/>
-          </a:bodyPr>
-          <a:lstStyle/>
-          <a:p>
-            <a:pPr algn="l">
-              <a:defRPr sz="1300" b="0">
-                <a:solidFill>
-                  <a:srgbClr val="6E6E68"/>
-                </a:solidFill>
-                <a:latin typeface="Calibri"/>
-              </a:defRPr>
-            </a:pPr>
-            <a:r>
-              <a:t>QD координирует, данные на QE.</a:t>
+                <a:latin typeface="Consolas"/>
+              </a:defRPr>
+            </a:pPr>
+            <a:r>
+              <a:t>CREATE TEMP TABLE tmp_stage AS</a:t>
+            </a:r>
+            <a:br/>
+            <a:r>
+              <a:t>SELECT customer_id, product_id, amount</a:t>
+            </a:r>
+            <a:br/>
+            <a:r>
+              <a:t>FROM lesson03.fact_sales</a:t>
+            </a:r>
+            <a:br/>
+            <a:r>
+              <a:t>WHERE sale_date &gt;= DATE '2026-02-01'</a:t>
+            </a:r>
+            <a:br/>
+            <a:r>
+              <a:t>  AND sale_date &lt;  DATE '2026-03-01'</a:t>
+            </a:r>
+            <a:br/>
+            <a:r>
+              <a:t>DISTRIBUTED BY (customer_id);   -- обязательный контракт в GP</a:t>
+            </a:r>
+            <a:br/>
+            <a:r>
+              <a:t>ANALYZE tmp_stage;               -- иначе следующий plan врёт</a:t>
+            </a:r>
+            <a:br/>
+            <a:br/>
+            <a:r>
+              <a:t>-- Варианты lifecycle:</a:t>
+            </a:r>
+            <a:br/>
+            <a:r>
+              <a:t>-- CREATE TEMP TABLE ... ON COMMIT PRESERVE ROWS;  -- default</a:t>
+            </a:r>
+            <a:br/>
+            <a:r>
+              <a:t>-- CREATE TEMP TABLE ... ON COMMIT DROP;</a:t>
+            </a:r>
+            <a:br/>
+            <a:r>
+              <a:t>-- CREATE TEMP TABLE ... ON COMMIT DELETE ROWS;</a:t>
+            </a:r>
+            <a:br/>
+            <a:br/>
+            <a:r>
+              <a:t>-- Каталог: nspname = pg_temp_&lt;backend&gt;, relpersistence = 't'</a:t>
             </a:r>
           </a:p>
         </p:txBody>
@@ -26141,7 +25667,7 @@
               </a:defRPr>
             </a:pPr>
             <a:r>
-              <a:t>REWRITE</a:t>
+              <a:t>TEMP WHERE</a:t>
             </a:r>
           </a:p>
         </p:txBody>
@@ -26177,7 +25703,7 @@
               </a:defRPr>
             </a:pPr>
             <a:r>
-              <a:t>Паттерн rewrite + проверка optimizer</a:t>
+              <a:t>Где живёт TEMP в Greenplum MPP</a:t>
             </a:r>
           </a:p>
         </p:txBody>
@@ -26213,7 +25739,7 @@
               </a:defRPr>
             </a:pPr>
             <a:r>
-              <a:t>Before/after при фиксированном SET optimizer (GUC сессии).</a:t>
+              <a:t>Не отдельный tempdb: та же БД, временный schema, данные на сегментах.</a:t>
             </a:r>
           </a:p>
         </p:txBody>
@@ -26262,8 +25788,8 @@
         </p:nvSpPr>
         <p:spPr>
           <a:xfrm>
-            <a:off x="640080" y="2331720"/>
-            <a:ext cx="10881360" cy="3657600"/>
+            <a:off x="548640" y="2331720"/>
+            <a:ext cx="5303520" cy="1691640"/>
           </a:xfrm>
           <a:prstGeom prst="roundRect">
             <a:avLst>
@@ -26303,37 +25829,44 @@
       </p:sp>
       <p:sp>
         <p:nvSpPr>
-          <p:cNvPr id="10" name="TextBox 9"/>
-          <p:cNvSpPr txBox="1"/>
-          <p:nvPr/>
-        </p:nvSpPr>
-        <p:spPr>
-          <a:xfrm>
-            <a:off x="868680" y="2468880"/>
-            <a:ext cx="1828800" cy="274320"/>
-          </a:xfrm>
-          <a:prstGeom prst="rect">
-            <a:avLst/>
-          </a:prstGeom>
-          <a:noFill/>
-        </p:spPr>
-        <p:txBody>
-          <a:bodyPr wrap="square">
-            <a:spAutoFit/>
-          </a:bodyPr>
-          <a:lstStyle/>
-          <a:p>
-            <a:pPr algn="l">
-              <a:defRPr sz="1200" b="1">
-                <a:solidFill>
-                  <a:srgbClr val="10A37F"/>
-                </a:solidFill>
-                <a:latin typeface="Calibri"/>
-              </a:defRPr>
-            </a:pPr>
-            <a:r>
-              <a:t>SQL</a:t>
-            </a:r>
+          <p:cNvPr id="10" name="Rectangle 9"/>
+          <p:cNvSpPr/>
+          <p:nvPr/>
+        </p:nvSpPr>
+        <p:spPr>
+          <a:xfrm>
+            <a:off x="731520" y="2514600"/>
+            <a:ext cx="411480" cy="45720"/>
+          </a:xfrm>
+          <a:prstGeom prst="rect">
+            <a:avLst/>
+          </a:prstGeom>
+          <a:solidFill>
+            <a:srgbClr val="10A37F"/>
+          </a:solidFill>
+          <a:ln>
+            <a:noFill/>
+          </a:ln>
+        </p:spPr>
+        <p:style>
+          <a:lnRef idx="1">
+            <a:schemeClr val="accent1"/>
+          </a:lnRef>
+          <a:fillRef idx="3">
+            <a:schemeClr val="accent1"/>
+          </a:fillRef>
+          <a:effectRef idx="2">
+            <a:schemeClr val="accent1"/>
+          </a:effectRef>
+          <a:fontRef idx="minor">
+            <a:schemeClr val="lt1"/>
+          </a:fontRef>
+        </p:style>
+        <p:txBody>
+          <a:bodyPr rtlCol="0" anchor="ctr"/>
+          <a:lstStyle/>
+          <a:p>
+            <a:pPr algn="ctr"/>
           </a:p>
         </p:txBody>
       </p:sp>
@@ -26345,62 +25878,552 @@
         </p:nvSpPr>
         <p:spPr>
           <a:xfrm>
-            <a:off x="868680" y="2788920"/>
-            <a:ext cx="10424160" cy="2926080"/>
-          </a:xfrm>
-          <a:prstGeom prst="rect">
-            <a:avLst/>
-          </a:prstGeom>
-          <a:noFill/>
-        </p:spPr>
-        <p:txBody>
-          <a:bodyPr wrap="square">
-            <a:spAutoFit/>
-          </a:bodyPr>
-          <a:lstStyle/>
-          <a:p>
-            <a:pPr algn="l">
-              <a:defRPr sz="1200" b="0">
+            <a:off x="749808" y="2651760"/>
+            <a:ext cx="4937760" cy="411480"/>
+          </a:xfrm>
+          <a:prstGeom prst="rect">
+            <a:avLst/>
+          </a:prstGeom>
+          <a:noFill/>
+        </p:spPr>
+        <p:txBody>
+          <a:bodyPr wrap="square">
+            <a:spAutoFit/>
+          </a:bodyPr>
+          <a:lstStyle/>
+          <a:p>
+            <a:pPr algn="l">
+              <a:defRPr sz="1800" b="1">
                 <a:solidFill>
                   <a:srgbClr val="202123"/>
                 </a:solidFill>
-                <a:latin typeface="Consolas"/>
-              </a:defRPr>
-            </a:pPr>
-            <a:r>
-              <a:t>SET optimizer = on;  -- зафиксировали GUC</a:t>
-            </a:r>
-            <a:br/>
-            <a:r>
-              <a:t>CREATE TEMP TABLE tmp_sales_feb AS</a:t>
-            </a:r>
-            <a:br/>
-            <a:r>
-              <a:t>SELECT customer_id, product_id, amount</a:t>
-            </a:r>
-            <a:br/>
-            <a:r>
-              <a:t>FROM lesson03.fact_sales</a:t>
-            </a:r>
-            <a:br/>
-            <a:r>
-              <a:t>WHERE sale_date &gt;= DATE '2026-02-01'</a:t>
-            </a:r>
-            <a:br/>
-            <a:r>
-              <a:t>  AND sale_date &lt;  DATE '2026-03-01'</a:t>
-            </a:r>
-            <a:br/>
-            <a:r>
-              <a:t>DISTRIBUTED BY (customer_id);</a:t>
-            </a:r>
-            <a:br/>
-            <a:r>
-              <a:t>ANALYZE tmp_sales_feb;</a:t>
-            </a:r>
-            <a:br/>
-            <a:r>
-              <a:t>EXPLAIN ...</a:t>
+                <a:latin typeface="Calibri"/>
+              </a:defRPr>
+            </a:pPr>
+            <a:r>
+              <a:t>Namespace</a:t>
+            </a:r>
+          </a:p>
+        </p:txBody>
+      </p:sp>
+      <p:sp>
+        <p:nvSpPr>
+          <p:cNvPr id="12" name="TextBox 11"/>
+          <p:cNvSpPr txBox="1"/>
+          <p:nvPr/>
+        </p:nvSpPr>
+        <p:spPr>
+          <a:xfrm>
+            <a:off x="749808" y="3108960"/>
+            <a:ext cx="4937760" cy="731520"/>
+          </a:xfrm>
+          <a:prstGeom prst="rect">
+            <a:avLst/>
+          </a:prstGeom>
+          <a:noFill/>
+        </p:spPr>
+        <p:txBody>
+          <a:bodyPr wrap="square">
+            <a:spAutoFit/>
+          </a:bodyPr>
+          <a:lstStyle/>
+          <a:p>
+            <a:pPr algn="l">
+              <a:defRPr sz="1100" b="0">
+                <a:solidFill>
+                  <a:srgbClr val="6E6E68"/>
+                </a:solidFill>
+                <a:latin typeface="Calibri"/>
+              </a:defRPr>
+            </a:pPr>
+            <a:r>
+              <a:t>pg_temp_NNN (+ pg_toast_temp_NNN). Session-local; после disconnect schema исчезает.</a:t>
+            </a:r>
+          </a:p>
+        </p:txBody>
+      </p:sp>
+      <p:sp>
+        <p:nvSpPr>
+          <p:cNvPr id="13" name="Rounded Rectangle 12"/>
+          <p:cNvSpPr/>
+          <p:nvPr/>
+        </p:nvSpPr>
+        <p:spPr>
+          <a:xfrm>
+            <a:off x="6217920" y="2331720"/>
+            <a:ext cx="5303520" cy="1691640"/>
+          </a:xfrm>
+          <a:prstGeom prst="roundRect">
+            <a:avLst>
+              <a:gd name="adj" fmla="val 8000"/>
+            </a:avLst>
+          </a:prstGeom>
+          <a:solidFill>
+            <a:srgbClr val="FFFFFF"/>
+          </a:solidFill>
+          <a:ln>
+            <a:solidFill>
+              <a:srgbClr val="D8D7D0"/>
+            </a:solidFill>
+          </a:ln>
+        </p:spPr>
+        <p:style>
+          <a:lnRef idx="1">
+            <a:schemeClr val="accent1"/>
+          </a:lnRef>
+          <a:fillRef idx="3">
+            <a:schemeClr val="accent1"/>
+          </a:fillRef>
+          <a:effectRef idx="2">
+            <a:schemeClr val="accent1"/>
+          </a:effectRef>
+          <a:fontRef idx="minor">
+            <a:schemeClr val="lt1"/>
+          </a:fontRef>
+        </p:style>
+        <p:txBody>
+          <a:bodyPr rtlCol="0" anchor="ctr"/>
+          <a:lstStyle/>
+          <a:p>
+            <a:pPr algn="ctr"/>
+          </a:p>
+        </p:txBody>
+      </p:sp>
+      <p:sp>
+        <p:nvSpPr>
+          <p:cNvPr id="14" name="Rectangle 13"/>
+          <p:cNvSpPr/>
+          <p:nvPr/>
+        </p:nvSpPr>
+        <p:spPr>
+          <a:xfrm>
+            <a:off x="6400800" y="2514600"/>
+            <a:ext cx="411480" cy="45720"/>
+          </a:xfrm>
+          <a:prstGeom prst="rect">
+            <a:avLst/>
+          </a:prstGeom>
+          <a:solidFill>
+            <a:srgbClr val="2F6FED"/>
+          </a:solidFill>
+          <a:ln>
+            <a:noFill/>
+          </a:ln>
+        </p:spPr>
+        <p:style>
+          <a:lnRef idx="1">
+            <a:schemeClr val="accent1"/>
+          </a:lnRef>
+          <a:fillRef idx="3">
+            <a:schemeClr val="accent1"/>
+          </a:fillRef>
+          <a:effectRef idx="2">
+            <a:schemeClr val="accent1"/>
+          </a:effectRef>
+          <a:fontRef idx="minor">
+            <a:schemeClr val="lt1"/>
+          </a:fontRef>
+        </p:style>
+        <p:txBody>
+          <a:bodyPr rtlCol="0" anchor="ctr"/>
+          <a:lstStyle/>
+          <a:p>
+            <a:pPr algn="ctr"/>
+          </a:p>
+        </p:txBody>
+      </p:sp>
+      <p:sp>
+        <p:nvSpPr>
+          <p:cNvPr id="15" name="TextBox 14"/>
+          <p:cNvSpPr txBox="1"/>
+          <p:nvPr/>
+        </p:nvSpPr>
+        <p:spPr>
+          <a:xfrm>
+            <a:off x="6419088" y="2651760"/>
+            <a:ext cx="4937760" cy="411480"/>
+          </a:xfrm>
+          <a:prstGeom prst="rect">
+            <a:avLst/>
+          </a:prstGeom>
+          <a:noFill/>
+        </p:spPr>
+        <p:txBody>
+          <a:bodyPr wrap="square">
+            <a:spAutoFit/>
+          </a:bodyPr>
+          <a:lstStyle/>
+          <a:p>
+            <a:pPr algn="l">
+              <a:defRPr sz="1800" b="1">
+                <a:solidFill>
+                  <a:srgbClr val="202123"/>
+                </a:solidFill>
+                <a:latin typeface="Calibri"/>
+              </a:defRPr>
+            </a:pPr>
+            <a:r>
+              <a:t>Catalog</a:t>
+            </a:r>
+          </a:p>
+        </p:txBody>
+      </p:sp>
+      <p:sp>
+        <p:nvSpPr>
+          <p:cNvPr id="16" name="TextBox 15"/>
+          <p:cNvSpPr txBox="1"/>
+          <p:nvPr/>
+        </p:nvSpPr>
+        <p:spPr>
+          <a:xfrm>
+            <a:off x="6419088" y="3108960"/>
+            <a:ext cx="4937760" cy="731520"/>
+          </a:xfrm>
+          <a:prstGeom prst="rect">
+            <a:avLst/>
+          </a:prstGeom>
+          <a:noFill/>
+        </p:spPr>
+        <p:txBody>
+          <a:bodyPr wrap="square">
+            <a:spAutoFit/>
+          </a:bodyPr>
+          <a:lstStyle/>
+          <a:p>
+            <a:pPr algn="l">
+              <a:defRPr sz="1100" b="0">
+                <a:solidFill>
+                  <a:srgbClr val="6E6E68"/>
+                </a:solidFill>
+                <a:latin typeface="Calibri"/>
+              </a:defRPr>
+            </a:pPr>
+            <a:r>
+              <a:t>Обычные pg_class/pg_attribute во временном namespace. relpersistence='t', filepath base/&lt;dboid&gt;/t_&lt;relfilenode&gt;.</a:t>
+            </a:r>
+          </a:p>
+        </p:txBody>
+      </p:sp>
+      <p:sp>
+        <p:nvSpPr>
+          <p:cNvPr id="17" name="Rounded Rectangle 16"/>
+          <p:cNvSpPr/>
+          <p:nvPr/>
+        </p:nvSpPr>
+        <p:spPr>
+          <a:xfrm>
+            <a:off x="548640" y="4160520"/>
+            <a:ext cx="5303520" cy="1691640"/>
+          </a:xfrm>
+          <a:prstGeom prst="roundRect">
+            <a:avLst>
+              <a:gd name="adj" fmla="val 8000"/>
+            </a:avLst>
+          </a:prstGeom>
+          <a:solidFill>
+            <a:srgbClr val="FFFFFF"/>
+          </a:solidFill>
+          <a:ln>
+            <a:solidFill>
+              <a:srgbClr val="D8D7D0"/>
+            </a:solidFill>
+          </a:ln>
+        </p:spPr>
+        <p:style>
+          <a:lnRef idx="1">
+            <a:schemeClr val="accent1"/>
+          </a:lnRef>
+          <a:fillRef idx="3">
+            <a:schemeClr val="accent1"/>
+          </a:fillRef>
+          <a:effectRef idx="2">
+            <a:schemeClr val="accent1"/>
+          </a:effectRef>
+          <a:fontRef idx="minor">
+            <a:schemeClr val="lt1"/>
+          </a:fontRef>
+        </p:style>
+        <p:txBody>
+          <a:bodyPr rtlCol="0" anchor="ctr"/>
+          <a:lstStyle/>
+          <a:p>
+            <a:pPr algn="ctr"/>
+          </a:p>
+        </p:txBody>
+      </p:sp>
+      <p:sp>
+        <p:nvSpPr>
+          <p:cNvPr id="18" name="Rectangle 17"/>
+          <p:cNvSpPr/>
+          <p:nvPr/>
+        </p:nvSpPr>
+        <p:spPr>
+          <a:xfrm>
+            <a:off x="731520" y="4343400"/>
+            <a:ext cx="411480" cy="45720"/>
+          </a:xfrm>
+          <a:prstGeom prst="rect">
+            <a:avLst/>
+          </a:prstGeom>
+          <a:solidFill>
+            <a:srgbClr val="B7791F"/>
+          </a:solidFill>
+          <a:ln>
+            <a:noFill/>
+          </a:ln>
+        </p:spPr>
+        <p:style>
+          <a:lnRef idx="1">
+            <a:schemeClr val="accent1"/>
+          </a:lnRef>
+          <a:fillRef idx="3">
+            <a:schemeClr val="accent1"/>
+          </a:fillRef>
+          <a:effectRef idx="2">
+            <a:schemeClr val="accent1"/>
+          </a:effectRef>
+          <a:fontRef idx="minor">
+            <a:schemeClr val="lt1"/>
+          </a:fontRef>
+        </p:style>
+        <p:txBody>
+          <a:bodyPr rtlCol="0" anchor="ctr"/>
+          <a:lstStyle/>
+          <a:p>
+            <a:pPr algn="ctr"/>
+          </a:p>
+        </p:txBody>
+      </p:sp>
+      <p:sp>
+        <p:nvSpPr>
+          <p:cNvPr id="19" name="TextBox 18"/>
+          <p:cNvSpPr txBox="1"/>
+          <p:nvPr/>
+        </p:nvSpPr>
+        <p:spPr>
+          <a:xfrm>
+            <a:off x="749808" y="4480560"/>
+            <a:ext cx="4937760" cy="411480"/>
+          </a:xfrm>
+          <a:prstGeom prst="rect">
+            <a:avLst/>
+          </a:prstGeom>
+          <a:noFill/>
+        </p:spPr>
+        <p:txBody>
+          <a:bodyPr wrap="square">
+            <a:spAutoFit/>
+          </a:bodyPr>
+          <a:lstStyle/>
+          <a:p>
+            <a:pPr algn="l">
+              <a:defRPr sz="1800" b="1">
+                <a:solidFill>
+                  <a:srgbClr val="202123"/>
+                </a:solidFill>
+                <a:latin typeface="Calibri"/>
+              </a:defRPr>
+            </a:pPr>
+            <a:r>
+              <a:t>QD vs QE</a:t>
+            </a:r>
+          </a:p>
+        </p:txBody>
+      </p:sp>
+      <p:sp>
+        <p:nvSpPr>
+          <p:cNvPr id="20" name="TextBox 19"/>
+          <p:cNvSpPr txBox="1"/>
+          <p:nvPr/>
+        </p:nvSpPr>
+        <p:spPr>
+          <a:xfrm>
+            <a:off x="749808" y="4937760"/>
+            <a:ext cx="4937760" cy="731520"/>
+          </a:xfrm>
+          <a:prstGeom prst="rect">
+            <a:avLst/>
+          </a:prstGeom>
+          <a:noFill/>
+        </p:spPr>
+        <p:txBody>
+          <a:bodyPr wrap="square">
+            <a:spAutoFit/>
+          </a:bodyPr>
+          <a:lstStyle/>
+          <a:p>
+            <a:pPr algn="l">
+              <a:defRPr sz="1100" b="0">
+                <a:solidFill>
+                  <a:srgbClr val="6E6E68"/>
+                </a:solidFill>
+                <a:latin typeface="Calibri"/>
+              </a:defRPr>
+            </a:pPr>
+            <a:r>
+              <a:t>QD координирует DDL/план. Данные TEMP лежат на QE (master часто держит 0-byte placeholder).</a:t>
+            </a:r>
+          </a:p>
+        </p:txBody>
+      </p:sp>
+      <p:sp>
+        <p:nvSpPr>
+          <p:cNvPr id="21" name="Rounded Rectangle 20"/>
+          <p:cNvSpPr/>
+          <p:nvPr/>
+        </p:nvSpPr>
+        <p:spPr>
+          <a:xfrm>
+            <a:off x="6217920" y="4160520"/>
+            <a:ext cx="5303520" cy="1691640"/>
+          </a:xfrm>
+          <a:prstGeom prst="roundRect">
+            <a:avLst>
+              <a:gd name="adj" fmla="val 8000"/>
+            </a:avLst>
+          </a:prstGeom>
+          <a:solidFill>
+            <a:srgbClr val="FFFFFF"/>
+          </a:solidFill>
+          <a:ln>
+            <a:solidFill>
+              <a:srgbClr val="D8D7D0"/>
+            </a:solidFill>
+          </a:ln>
+        </p:spPr>
+        <p:style>
+          <a:lnRef idx="1">
+            <a:schemeClr val="accent1"/>
+          </a:lnRef>
+          <a:fillRef idx="3">
+            <a:schemeClr val="accent1"/>
+          </a:fillRef>
+          <a:effectRef idx="2">
+            <a:schemeClr val="accent1"/>
+          </a:effectRef>
+          <a:fontRef idx="minor">
+            <a:schemeClr val="lt1"/>
+          </a:fontRef>
+        </p:style>
+        <p:txBody>
+          <a:bodyPr rtlCol="0" anchor="ctr"/>
+          <a:lstStyle/>
+          <a:p>
+            <a:pPr algn="ctr"/>
+          </a:p>
+        </p:txBody>
+      </p:sp>
+      <p:sp>
+        <p:nvSpPr>
+          <p:cNvPr id="22" name="Rectangle 21"/>
+          <p:cNvSpPr/>
+          <p:nvPr/>
+        </p:nvSpPr>
+        <p:spPr>
+          <a:xfrm>
+            <a:off x="6400800" y="4343400"/>
+            <a:ext cx="411480" cy="45720"/>
+          </a:xfrm>
+          <a:prstGeom prst="rect">
+            <a:avLst/>
+          </a:prstGeom>
+          <a:solidFill>
+            <a:srgbClr val="B42318"/>
+          </a:solidFill>
+          <a:ln>
+            <a:noFill/>
+          </a:ln>
+        </p:spPr>
+        <p:style>
+          <a:lnRef idx="1">
+            <a:schemeClr val="accent1"/>
+          </a:lnRef>
+          <a:fillRef idx="3">
+            <a:schemeClr val="accent1"/>
+          </a:fillRef>
+          <a:effectRef idx="2">
+            <a:schemeClr val="accent1"/>
+          </a:effectRef>
+          <a:fontRef idx="minor">
+            <a:schemeClr val="lt1"/>
+          </a:fontRef>
+        </p:style>
+        <p:txBody>
+          <a:bodyPr rtlCol="0" anchor="ctr"/>
+          <a:lstStyle/>
+          <a:p>
+            <a:pPr algn="ctr"/>
+          </a:p>
+        </p:txBody>
+      </p:sp>
+      <p:sp>
+        <p:nvSpPr>
+          <p:cNvPr id="23" name="TextBox 22"/>
+          <p:cNvSpPr txBox="1"/>
+          <p:nvPr/>
+        </p:nvSpPr>
+        <p:spPr>
+          <a:xfrm>
+            <a:off x="6419088" y="4480560"/>
+            <a:ext cx="4937760" cy="411480"/>
+          </a:xfrm>
+          <a:prstGeom prst="rect">
+            <a:avLst/>
+          </a:prstGeom>
+          <a:noFill/>
+        </p:spPr>
+        <p:txBody>
+          <a:bodyPr wrap="square">
+            <a:spAutoFit/>
+          </a:bodyPr>
+          <a:lstStyle/>
+          <a:p>
+            <a:pPr algn="l">
+              <a:defRPr sz="1800" b="1">
+                <a:solidFill>
+                  <a:srgbClr val="202123"/>
+                </a:solidFill>
+                <a:latin typeface="Calibri"/>
+              </a:defRPr>
+            </a:pPr>
+            <a:r>
+              <a:t>Distribution</a:t>
+            </a:r>
+          </a:p>
+        </p:txBody>
+      </p:sp>
+      <p:sp>
+        <p:nvSpPr>
+          <p:cNvPr id="24" name="TextBox 23"/>
+          <p:cNvSpPr txBox="1"/>
+          <p:nvPr/>
+        </p:nvSpPr>
+        <p:spPr>
+          <a:xfrm>
+            <a:off x="6419088" y="4937760"/>
+            <a:ext cx="4937760" cy="731520"/>
+          </a:xfrm>
+          <a:prstGeom prst="rect">
+            <a:avLst/>
+          </a:prstGeom>
+          <a:noFill/>
+        </p:spPr>
+        <p:txBody>
+          <a:bodyPr wrap="square">
+            <a:spAutoFit/>
+          </a:bodyPr>
+          <a:lstStyle/>
+          <a:p>
+            <a:pPr algn="l">
+              <a:defRPr sz="1100" b="0">
+                <a:solidFill>
+                  <a:srgbClr val="6E6E68"/>
+                </a:solidFill>
+                <a:latin typeface="Calibri"/>
+              </a:defRPr>
+            </a:pPr>
+            <a:r>
+              <a:t>TEMP — распределённая таблица. Неверный DISTRIBUTED BY ⇒ лишний Redistribute на следующем join.</a:t>
             </a:r>
           </a:p>
         </p:txBody>
@@ -26583,7 +26606,7 @@
               </a:defRPr>
             </a:pPr>
             <a:r>
-              <a:t>SIMPLE PATH</a:t>
+              <a:t>TEMP FS MAP</a:t>
             </a:r>
           </a:p>
         </p:txBody>
@@ -26619,7 +26642,7 @@
               </a:defRPr>
             </a:pPr>
             <a:r>
-              <a:t>60 минут на GP 6.25</a:t>
+              <a:t>Файловая карта: TEMP relation vs spill</a:t>
             </a:r>
           </a:p>
         </p:txBody>
@@ -26655,7 +26678,7 @@
               </a:defRPr>
             </a:pPr>
             <a:r>
-              <a:t>Glossary → case → optimizer → EXPLAIN trees → stats → TEMP → proof.</a:t>
+              <a:t>Снято с greenplum-625: два разных каталога под /data/*/gpsne*/base/.</a:t>
             </a:r>
           </a:p>
         </p:txBody>
@@ -26704,8 +26727,8 @@
         </p:nvSpPr>
         <p:spPr>
           <a:xfrm>
-            <a:off x="502920" y="2606040"/>
-            <a:ext cx="1874519" cy="3017520"/>
+            <a:off x="640080" y="2331720"/>
+            <a:ext cx="10881360" cy="3657600"/>
           </a:xfrm>
           <a:prstGeom prst="roundRect">
             <a:avLst>
@@ -26745,44 +26768,37 @@
       </p:sp>
       <p:sp>
         <p:nvSpPr>
-          <p:cNvPr id="10" name="Rectangle 9"/>
-          <p:cNvSpPr/>
-          <p:nvPr/>
-        </p:nvSpPr>
-        <p:spPr>
-          <a:xfrm>
-            <a:off x="685800" y="2788920"/>
-            <a:ext cx="411480" cy="45720"/>
-          </a:xfrm>
-          <a:prstGeom prst="rect">
-            <a:avLst/>
-          </a:prstGeom>
-          <a:solidFill>
-            <a:srgbClr val="10A37F"/>
-          </a:solidFill>
-          <a:ln>
-            <a:noFill/>
-          </a:ln>
-        </p:spPr>
-        <p:style>
-          <a:lnRef idx="1">
-            <a:schemeClr val="accent1"/>
-          </a:lnRef>
-          <a:fillRef idx="3">
-            <a:schemeClr val="accent1"/>
-          </a:fillRef>
-          <a:effectRef idx="2">
-            <a:schemeClr val="accent1"/>
-          </a:effectRef>
-          <a:fontRef idx="minor">
-            <a:schemeClr val="lt1"/>
-          </a:fontRef>
-        </p:style>
-        <p:txBody>
-          <a:bodyPr rtlCol="0" anchor="ctr"/>
-          <a:lstStyle/>
-          <a:p>
-            <a:pPr algn="ctr"/>
+          <p:cNvPr id="10" name="TextBox 9"/>
+          <p:cNvSpPr txBox="1"/>
+          <p:nvPr/>
+        </p:nvSpPr>
+        <p:spPr>
+          <a:xfrm>
+            <a:off x="868680" y="2468880"/>
+            <a:ext cx="1828800" cy="274320"/>
+          </a:xfrm>
+          <a:prstGeom prst="rect">
+            <a:avLst/>
+          </a:prstGeom>
+          <a:noFill/>
+        </p:spPr>
+        <p:txBody>
+          <a:bodyPr wrap="square">
+            <a:spAutoFit/>
+          </a:bodyPr>
+          <a:lstStyle/>
+          <a:p>
+            <a:pPr algn="l">
+              <a:defRPr sz="1200" b="1">
+                <a:solidFill>
+                  <a:srgbClr val="10A37F"/>
+                </a:solidFill>
+                <a:latin typeface="Calibri"/>
+              </a:defRPr>
+            </a:pPr>
+            <a:r>
+              <a:t>SQL</a:t>
+            </a:r>
           </a:p>
         </p:txBody>
       </p:sp>
@@ -26794,886 +26810,67 @@
         </p:nvSpPr>
         <p:spPr>
           <a:xfrm>
-            <a:off x="704088" y="2926080"/>
-            <a:ext cx="1508759" cy="411480"/>
-          </a:xfrm>
-          <a:prstGeom prst="rect">
-            <a:avLst/>
-          </a:prstGeom>
-          <a:noFill/>
-        </p:spPr>
-        <p:txBody>
-          <a:bodyPr wrap="square">
-            <a:spAutoFit/>
-          </a:bodyPr>
-          <a:lstStyle/>
-          <a:p>
-            <a:pPr algn="l">
-              <a:defRPr sz="1800" b="1">
+            <a:off x="868680" y="2788920"/>
+            <a:ext cx="10424160" cy="2926080"/>
+          </a:xfrm>
+          <a:prstGeom prst="rect">
+            <a:avLst/>
+          </a:prstGeom>
+          <a:noFill/>
+        </p:spPr>
+        <p:txBody>
+          <a:bodyPr wrap="square">
+            <a:spAutoFit/>
+          </a:bodyPr>
+          <a:lstStyle/>
+          <a:p>
+            <a:pPr algn="l">
+              <a:defRPr sz="1100" b="0">
                 <a:solidFill>
                   <a:srgbClr val="202123"/>
                 </a:solidFill>
-                <a:latin typeface="Calibri"/>
-              </a:defRPr>
-            </a:pPr>
-            <a:r>
-              <a:t>Glossary</a:t>
-            </a:r>
-          </a:p>
-        </p:txBody>
-      </p:sp>
-      <p:sp>
-        <p:nvSpPr>
-          <p:cNvPr id="12" name="TextBox 11"/>
-          <p:cNvSpPr txBox="1"/>
-          <p:nvPr/>
-        </p:nvSpPr>
-        <p:spPr>
-          <a:xfrm>
-            <a:off x="704088" y="3383280"/>
-            <a:ext cx="1508759" cy="2057400"/>
-          </a:xfrm>
-          <a:prstGeom prst="rect">
-            <a:avLst/>
-          </a:prstGeom>
-          <a:noFill/>
-        </p:spPr>
-        <p:txBody>
-          <a:bodyPr wrap="square">
-            <a:spAutoFit/>
-          </a:bodyPr>
-          <a:lstStyle/>
-          <a:p>
-            <a:pPr algn="l">
-              <a:defRPr sz="1300" b="0">
-                <a:solidFill>
-                  <a:srgbClr val="6E6E68"/>
-                </a:solidFill>
-                <a:latin typeface="Calibri"/>
-              </a:defRPr>
-            </a:pPr>
-            <a:r>
-              <a:t>GUC/QD/QE</a:t>
-            </a:r>
-          </a:p>
-        </p:txBody>
-      </p:sp>
-      <p:sp>
-        <p:nvSpPr>
-          <p:cNvPr id="13" name="Rectangle 12"/>
-          <p:cNvSpPr/>
-          <p:nvPr/>
-        </p:nvSpPr>
-        <p:spPr>
-          <a:xfrm>
-            <a:off x="2423159" y="3977640"/>
-            <a:ext cx="137160" cy="36576"/>
-          </a:xfrm>
-          <a:prstGeom prst="rect">
-            <a:avLst/>
-          </a:prstGeom>
-          <a:solidFill>
-            <a:srgbClr val="D8D7D0"/>
-          </a:solidFill>
-          <a:ln>
-            <a:noFill/>
-          </a:ln>
-        </p:spPr>
-        <p:style>
-          <a:lnRef idx="1">
-            <a:schemeClr val="accent1"/>
-          </a:lnRef>
-          <a:fillRef idx="3">
-            <a:schemeClr val="accent1"/>
-          </a:fillRef>
-          <a:effectRef idx="2">
-            <a:schemeClr val="accent1"/>
-          </a:effectRef>
-          <a:fontRef idx="minor">
-            <a:schemeClr val="lt1"/>
-          </a:fontRef>
-        </p:style>
-        <p:txBody>
-          <a:bodyPr rtlCol="0" anchor="ctr"/>
-          <a:lstStyle/>
-          <a:p>
-            <a:pPr algn="ctr"/>
-          </a:p>
-        </p:txBody>
-      </p:sp>
-      <p:sp>
-        <p:nvSpPr>
-          <p:cNvPr id="14" name="Rounded Rectangle 13"/>
-          <p:cNvSpPr/>
-          <p:nvPr/>
-        </p:nvSpPr>
-        <p:spPr>
-          <a:xfrm>
-            <a:off x="2606039" y="2606040"/>
-            <a:ext cx="1874519" cy="3017520"/>
-          </a:xfrm>
-          <a:prstGeom prst="roundRect">
-            <a:avLst>
-              <a:gd name="adj" fmla="val 8000"/>
-            </a:avLst>
-          </a:prstGeom>
-          <a:solidFill>
-            <a:srgbClr val="FFFFFF"/>
-          </a:solidFill>
-          <a:ln>
-            <a:solidFill>
-              <a:srgbClr val="D8D7D0"/>
-            </a:solidFill>
-          </a:ln>
-        </p:spPr>
-        <p:style>
-          <a:lnRef idx="1">
-            <a:schemeClr val="accent1"/>
-          </a:lnRef>
-          <a:fillRef idx="3">
-            <a:schemeClr val="accent1"/>
-          </a:fillRef>
-          <a:effectRef idx="2">
-            <a:schemeClr val="accent1"/>
-          </a:effectRef>
-          <a:fontRef idx="minor">
-            <a:schemeClr val="lt1"/>
-          </a:fontRef>
-        </p:style>
-        <p:txBody>
-          <a:bodyPr rtlCol="0" anchor="ctr"/>
-          <a:lstStyle/>
-          <a:p>
-            <a:pPr algn="ctr"/>
-          </a:p>
-        </p:txBody>
-      </p:sp>
-      <p:sp>
-        <p:nvSpPr>
-          <p:cNvPr id="15" name="Rectangle 14"/>
-          <p:cNvSpPr/>
-          <p:nvPr/>
-        </p:nvSpPr>
-        <p:spPr>
-          <a:xfrm>
-            <a:off x="2788919" y="2788920"/>
-            <a:ext cx="411480" cy="45720"/>
-          </a:xfrm>
-          <a:prstGeom prst="rect">
-            <a:avLst/>
-          </a:prstGeom>
-          <a:solidFill>
-            <a:srgbClr val="2F6FED"/>
-          </a:solidFill>
-          <a:ln>
-            <a:noFill/>
-          </a:ln>
-        </p:spPr>
-        <p:style>
-          <a:lnRef idx="1">
-            <a:schemeClr val="accent1"/>
-          </a:lnRef>
-          <a:fillRef idx="3">
-            <a:schemeClr val="accent1"/>
-          </a:fillRef>
-          <a:effectRef idx="2">
-            <a:schemeClr val="accent1"/>
-          </a:effectRef>
-          <a:fontRef idx="minor">
-            <a:schemeClr val="lt1"/>
-          </a:fontRef>
-        </p:style>
-        <p:txBody>
-          <a:bodyPr rtlCol="0" anchor="ctr"/>
-          <a:lstStyle/>
-          <a:p>
-            <a:pPr algn="ctr"/>
-          </a:p>
-        </p:txBody>
-      </p:sp>
-      <p:sp>
-        <p:nvSpPr>
-          <p:cNvPr id="16" name="TextBox 15"/>
-          <p:cNvSpPr txBox="1"/>
-          <p:nvPr/>
-        </p:nvSpPr>
-        <p:spPr>
-          <a:xfrm>
-            <a:off x="2807207" y="2926080"/>
-            <a:ext cx="1508759" cy="411480"/>
-          </a:xfrm>
-          <a:prstGeom prst="rect">
-            <a:avLst/>
-          </a:prstGeom>
-          <a:noFill/>
-        </p:spPr>
-        <p:txBody>
-          <a:bodyPr wrap="square">
-            <a:spAutoFit/>
-          </a:bodyPr>
-          <a:lstStyle/>
-          <a:p>
-            <a:pPr algn="l">
-              <a:defRPr sz="1800" b="1">
-                <a:solidFill>
-                  <a:srgbClr val="202123"/>
-                </a:solidFill>
-                <a:latin typeface="Calibri"/>
-              </a:defRPr>
-            </a:pPr>
-            <a:r>
-              <a:t>ORCA</a:t>
-            </a:r>
-          </a:p>
-        </p:txBody>
-      </p:sp>
-      <p:sp>
-        <p:nvSpPr>
-          <p:cNvPr id="17" name="TextBox 16"/>
-          <p:cNvSpPr txBox="1"/>
-          <p:nvPr/>
-        </p:nvSpPr>
-        <p:spPr>
-          <a:xfrm>
-            <a:off x="2807207" y="3383280"/>
-            <a:ext cx="1508759" cy="2057400"/>
-          </a:xfrm>
-          <a:prstGeom prst="rect">
-            <a:avLst/>
-          </a:prstGeom>
-          <a:noFill/>
-        </p:spPr>
-        <p:txBody>
-          <a:bodyPr wrap="square">
-            <a:spAutoFit/>
-          </a:bodyPr>
-          <a:lstStyle/>
-          <a:p>
-            <a:pPr algn="l">
-              <a:defRPr sz="1300" b="0">
-                <a:solidFill>
-                  <a:srgbClr val="6E6E68"/>
-                </a:solidFill>
-                <a:latin typeface="Calibri"/>
-              </a:defRPr>
-            </a:pPr>
-            <a:r>
-              <a:t>on vs off</a:t>
-            </a:r>
-          </a:p>
-        </p:txBody>
-      </p:sp>
-      <p:sp>
-        <p:nvSpPr>
-          <p:cNvPr id="18" name="Rectangle 17"/>
-          <p:cNvSpPr/>
-          <p:nvPr/>
-        </p:nvSpPr>
-        <p:spPr>
-          <a:xfrm>
-            <a:off x="4526278" y="3977640"/>
-            <a:ext cx="137160" cy="36576"/>
-          </a:xfrm>
-          <a:prstGeom prst="rect">
-            <a:avLst/>
-          </a:prstGeom>
-          <a:solidFill>
-            <a:srgbClr val="D8D7D0"/>
-          </a:solidFill>
-          <a:ln>
-            <a:noFill/>
-          </a:ln>
-        </p:spPr>
-        <p:style>
-          <a:lnRef idx="1">
-            <a:schemeClr val="accent1"/>
-          </a:lnRef>
-          <a:fillRef idx="3">
-            <a:schemeClr val="accent1"/>
-          </a:fillRef>
-          <a:effectRef idx="2">
-            <a:schemeClr val="accent1"/>
-          </a:effectRef>
-          <a:fontRef idx="minor">
-            <a:schemeClr val="lt1"/>
-          </a:fontRef>
-        </p:style>
-        <p:txBody>
-          <a:bodyPr rtlCol="0" anchor="ctr"/>
-          <a:lstStyle/>
-          <a:p>
-            <a:pPr algn="ctr"/>
-          </a:p>
-        </p:txBody>
-      </p:sp>
-      <p:sp>
-        <p:nvSpPr>
-          <p:cNvPr id="19" name="Rounded Rectangle 18"/>
-          <p:cNvSpPr/>
-          <p:nvPr/>
-        </p:nvSpPr>
-        <p:spPr>
-          <a:xfrm>
-            <a:off x="4709158" y="2606040"/>
-            <a:ext cx="1874519" cy="3017520"/>
-          </a:xfrm>
-          <a:prstGeom prst="roundRect">
-            <a:avLst>
-              <a:gd name="adj" fmla="val 8000"/>
-            </a:avLst>
-          </a:prstGeom>
-          <a:solidFill>
-            <a:srgbClr val="FFFFFF"/>
-          </a:solidFill>
-          <a:ln>
-            <a:solidFill>
-              <a:srgbClr val="D8D7D0"/>
-            </a:solidFill>
-          </a:ln>
-        </p:spPr>
-        <p:style>
-          <a:lnRef idx="1">
-            <a:schemeClr val="accent1"/>
-          </a:lnRef>
-          <a:fillRef idx="3">
-            <a:schemeClr val="accent1"/>
-          </a:fillRef>
-          <a:effectRef idx="2">
-            <a:schemeClr val="accent1"/>
-          </a:effectRef>
-          <a:fontRef idx="minor">
-            <a:schemeClr val="lt1"/>
-          </a:fontRef>
-        </p:style>
-        <p:txBody>
-          <a:bodyPr rtlCol="0" anchor="ctr"/>
-          <a:lstStyle/>
-          <a:p>
-            <a:pPr algn="ctr"/>
-          </a:p>
-        </p:txBody>
-      </p:sp>
-      <p:sp>
-        <p:nvSpPr>
-          <p:cNvPr id="20" name="Rectangle 19"/>
-          <p:cNvSpPr/>
-          <p:nvPr/>
-        </p:nvSpPr>
-        <p:spPr>
-          <a:xfrm>
-            <a:off x="4892038" y="2788920"/>
-            <a:ext cx="411480" cy="45720"/>
-          </a:xfrm>
-          <a:prstGeom prst="rect">
-            <a:avLst/>
-          </a:prstGeom>
-          <a:solidFill>
-            <a:srgbClr val="B7791F"/>
-          </a:solidFill>
-          <a:ln>
-            <a:noFill/>
-          </a:ln>
-        </p:spPr>
-        <p:style>
-          <a:lnRef idx="1">
-            <a:schemeClr val="accent1"/>
-          </a:lnRef>
-          <a:fillRef idx="3">
-            <a:schemeClr val="accent1"/>
-          </a:fillRef>
-          <a:effectRef idx="2">
-            <a:schemeClr val="accent1"/>
-          </a:effectRef>
-          <a:fontRef idx="minor">
-            <a:schemeClr val="lt1"/>
-          </a:fontRef>
-        </p:style>
-        <p:txBody>
-          <a:bodyPr rtlCol="0" anchor="ctr"/>
-          <a:lstStyle/>
-          <a:p>
-            <a:pPr algn="ctr"/>
-          </a:p>
-        </p:txBody>
-      </p:sp>
-      <p:sp>
-        <p:nvSpPr>
-          <p:cNvPr id="21" name="TextBox 20"/>
-          <p:cNvSpPr txBox="1"/>
-          <p:nvPr/>
-        </p:nvSpPr>
-        <p:spPr>
-          <a:xfrm>
-            <a:off x="4910326" y="2926080"/>
-            <a:ext cx="1508759" cy="411480"/>
-          </a:xfrm>
-          <a:prstGeom prst="rect">
-            <a:avLst/>
-          </a:prstGeom>
-          <a:noFill/>
-        </p:spPr>
-        <p:txBody>
-          <a:bodyPr wrap="square">
-            <a:spAutoFit/>
-          </a:bodyPr>
-          <a:lstStyle/>
-          <a:p>
-            <a:pPr algn="l">
-              <a:defRPr sz="1800" b="1">
-                <a:solidFill>
-                  <a:srgbClr val="202123"/>
-                </a:solidFill>
-                <a:latin typeface="Calibri"/>
-              </a:defRPr>
-            </a:pPr>
-            <a:r>
-              <a:t>Trees</a:t>
-            </a:r>
-          </a:p>
-        </p:txBody>
-      </p:sp>
-      <p:sp>
-        <p:nvSpPr>
-          <p:cNvPr id="22" name="TextBox 21"/>
-          <p:cNvSpPr txBox="1"/>
-          <p:nvPr/>
-        </p:nvSpPr>
-        <p:spPr>
-          <a:xfrm>
-            <a:off x="4910326" y="3383280"/>
-            <a:ext cx="1508759" cy="2057400"/>
-          </a:xfrm>
-          <a:prstGeom prst="rect">
-            <a:avLst/>
-          </a:prstGeom>
-          <a:noFill/>
-        </p:spPr>
-        <p:txBody>
-          <a:bodyPr wrap="square">
-            <a:spAutoFit/>
-          </a:bodyPr>
-          <a:lstStyle/>
-          <a:p>
-            <a:pPr algn="l">
-              <a:defRPr sz="1300" b="0">
-                <a:solidFill>
-                  <a:srgbClr val="6E6E68"/>
-                </a:solidFill>
-                <a:latin typeface="Calibri"/>
-              </a:defRPr>
-            </a:pPr>
-            <a:r>
-              <a:t>скрины</a:t>
-            </a:r>
-          </a:p>
-        </p:txBody>
-      </p:sp>
-      <p:sp>
-        <p:nvSpPr>
-          <p:cNvPr id="23" name="Rectangle 22"/>
-          <p:cNvSpPr/>
-          <p:nvPr/>
-        </p:nvSpPr>
-        <p:spPr>
-          <a:xfrm>
-            <a:off x="6629397" y="3977640"/>
-            <a:ext cx="137160" cy="36576"/>
-          </a:xfrm>
-          <a:prstGeom prst="rect">
-            <a:avLst/>
-          </a:prstGeom>
-          <a:solidFill>
-            <a:srgbClr val="D8D7D0"/>
-          </a:solidFill>
-          <a:ln>
-            <a:noFill/>
-          </a:ln>
-        </p:spPr>
-        <p:style>
-          <a:lnRef idx="1">
-            <a:schemeClr val="accent1"/>
-          </a:lnRef>
-          <a:fillRef idx="3">
-            <a:schemeClr val="accent1"/>
-          </a:fillRef>
-          <a:effectRef idx="2">
-            <a:schemeClr val="accent1"/>
-          </a:effectRef>
-          <a:fontRef idx="minor">
-            <a:schemeClr val="lt1"/>
-          </a:fontRef>
-        </p:style>
-        <p:txBody>
-          <a:bodyPr rtlCol="0" anchor="ctr"/>
-          <a:lstStyle/>
-          <a:p>
-            <a:pPr algn="ctr"/>
-          </a:p>
-        </p:txBody>
-      </p:sp>
-      <p:sp>
-        <p:nvSpPr>
-          <p:cNvPr id="24" name="Rounded Rectangle 23"/>
-          <p:cNvSpPr/>
-          <p:nvPr/>
-        </p:nvSpPr>
-        <p:spPr>
-          <a:xfrm>
-            <a:off x="6812277" y="2606040"/>
-            <a:ext cx="1874519" cy="3017520"/>
-          </a:xfrm>
-          <a:prstGeom prst="roundRect">
-            <a:avLst>
-              <a:gd name="adj" fmla="val 8000"/>
-            </a:avLst>
-          </a:prstGeom>
-          <a:solidFill>
-            <a:srgbClr val="FFFFFF"/>
-          </a:solidFill>
-          <a:ln>
-            <a:solidFill>
-              <a:srgbClr val="D8D7D0"/>
-            </a:solidFill>
-          </a:ln>
-        </p:spPr>
-        <p:style>
-          <a:lnRef idx="1">
-            <a:schemeClr val="accent1"/>
-          </a:lnRef>
-          <a:fillRef idx="3">
-            <a:schemeClr val="accent1"/>
-          </a:fillRef>
-          <a:effectRef idx="2">
-            <a:schemeClr val="accent1"/>
-          </a:effectRef>
-          <a:fontRef idx="minor">
-            <a:schemeClr val="lt1"/>
-          </a:fontRef>
-        </p:style>
-        <p:txBody>
-          <a:bodyPr rtlCol="0" anchor="ctr"/>
-          <a:lstStyle/>
-          <a:p>
-            <a:pPr algn="ctr"/>
-          </a:p>
-        </p:txBody>
-      </p:sp>
-      <p:sp>
-        <p:nvSpPr>
-          <p:cNvPr id="25" name="Rectangle 24"/>
-          <p:cNvSpPr/>
-          <p:nvPr/>
-        </p:nvSpPr>
-        <p:spPr>
-          <a:xfrm>
-            <a:off x="6995157" y="2788920"/>
-            <a:ext cx="411480" cy="45720"/>
-          </a:xfrm>
-          <a:prstGeom prst="rect">
-            <a:avLst/>
-          </a:prstGeom>
-          <a:solidFill>
-            <a:srgbClr val="10A37F"/>
-          </a:solidFill>
-          <a:ln>
-            <a:noFill/>
-          </a:ln>
-        </p:spPr>
-        <p:style>
-          <a:lnRef idx="1">
-            <a:schemeClr val="accent1"/>
-          </a:lnRef>
-          <a:fillRef idx="3">
-            <a:schemeClr val="accent1"/>
-          </a:fillRef>
-          <a:effectRef idx="2">
-            <a:schemeClr val="accent1"/>
-          </a:effectRef>
-          <a:fontRef idx="minor">
-            <a:schemeClr val="lt1"/>
-          </a:fontRef>
-        </p:style>
-        <p:txBody>
-          <a:bodyPr rtlCol="0" anchor="ctr"/>
-          <a:lstStyle/>
-          <a:p>
-            <a:pPr algn="ctr"/>
-          </a:p>
-        </p:txBody>
-      </p:sp>
-      <p:sp>
-        <p:nvSpPr>
-          <p:cNvPr id="26" name="TextBox 25"/>
-          <p:cNvSpPr txBox="1"/>
-          <p:nvPr/>
-        </p:nvSpPr>
-        <p:spPr>
-          <a:xfrm>
-            <a:off x="7013445" y="2926080"/>
-            <a:ext cx="1508759" cy="411480"/>
-          </a:xfrm>
-          <a:prstGeom prst="rect">
-            <a:avLst/>
-          </a:prstGeom>
-          <a:noFill/>
-        </p:spPr>
-        <p:txBody>
-          <a:bodyPr wrap="square">
-            <a:spAutoFit/>
-          </a:bodyPr>
-          <a:lstStyle/>
-          <a:p>
-            <a:pPr algn="l">
-              <a:defRPr sz="1800" b="1">
-                <a:solidFill>
-                  <a:srgbClr val="202123"/>
-                </a:solidFill>
-                <a:latin typeface="Calibri"/>
-              </a:defRPr>
-            </a:pPr>
-            <a:r>
-              <a:t>TEMP</a:t>
-            </a:r>
-          </a:p>
-        </p:txBody>
-      </p:sp>
-      <p:sp>
-        <p:nvSpPr>
-          <p:cNvPr id="27" name="TextBox 26"/>
-          <p:cNvSpPr txBox="1"/>
-          <p:nvPr/>
-        </p:nvSpPr>
-        <p:spPr>
-          <a:xfrm>
-            <a:off x="7013445" y="3383280"/>
-            <a:ext cx="1508759" cy="2057400"/>
-          </a:xfrm>
-          <a:prstGeom prst="rect">
-            <a:avLst/>
-          </a:prstGeom>
-          <a:noFill/>
-        </p:spPr>
-        <p:txBody>
-          <a:bodyPr wrap="square">
-            <a:spAutoFit/>
-          </a:bodyPr>
-          <a:lstStyle/>
-          <a:p>
-            <a:pPr algn="l">
-              <a:defRPr sz="1300" b="0">
-                <a:solidFill>
-                  <a:srgbClr val="6E6E68"/>
-                </a:solidFill>
-                <a:latin typeface="Calibri"/>
-              </a:defRPr>
-            </a:pPr>
-            <a:r>
-              <a:t>rewrite</a:t>
-            </a:r>
-          </a:p>
-        </p:txBody>
-      </p:sp>
-      <p:sp>
-        <p:nvSpPr>
-          <p:cNvPr id="28" name="Rectangle 27"/>
-          <p:cNvSpPr/>
-          <p:nvPr/>
-        </p:nvSpPr>
-        <p:spPr>
-          <a:xfrm>
-            <a:off x="8732516" y="3977640"/>
-            <a:ext cx="137160" cy="36576"/>
-          </a:xfrm>
-          <a:prstGeom prst="rect">
-            <a:avLst/>
-          </a:prstGeom>
-          <a:solidFill>
-            <a:srgbClr val="D8D7D0"/>
-          </a:solidFill>
-          <a:ln>
-            <a:noFill/>
-          </a:ln>
-        </p:spPr>
-        <p:style>
-          <a:lnRef idx="1">
-            <a:schemeClr val="accent1"/>
-          </a:lnRef>
-          <a:fillRef idx="3">
-            <a:schemeClr val="accent1"/>
-          </a:fillRef>
-          <a:effectRef idx="2">
-            <a:schemeClr val="accent1"/>
-          </a:effectRef>
-          <a:fontRef idx="minor">
-            <a:schemeClr val="lt1"/>
-          </a:fontRef>
-        </p:style>
-        <p:txBody>
-          <a:bodyPr rtlCol="0" anchor="ctr"/>
-          <a:lstStyle/>
-          <a:p>
-            <a:pPr algn="ctr"/>
-          </a:p>
-        </p:txBody>
-      </p:sp>
-      <p:sp>
-        <p:nvSpPr>
-          <p:cNvPr id="29" name="Rounded Rectangle 28"/>
-          <p:cNvSpPr/>
-          <p:nvPr/>
-        </p:nvSpPr>
-        <p:spPr>
-          <a:xfrm>
-            <a:off x="8915396" y="2606040"/>
-            <a:ext cx="1874519" cy="3017520"/>
-          </a:xfrm>
-          <a:prstGeom prst="roundRect">
-            <a:avLst>
-              <a:gd name="adj" fmla="val 8000"/>
-            </a:avLst>
-          </a:prstGeom>
-          <a:solidFill>
-            <a:srgbClr val="FFFFFF"/>
-          </a:solidFill>
-          <a:ln>
-            <a:solidFill>
-              <a:srgbClr val="D8D7D0"/>
-            </a:solidFill>
-          </a:ln>
-        </p:spPr>
-        <p:style>
-          <a:lnRef idx="1">
-            <a:schemeClr val="accent1"/>
-          </a:lnRef>
-          <a:fillRef idx="3">
-            <a:schemeClr val="accent1"/>
-          </a:fillRef>
-          <a:effectRef idx="2">
-            <a:schemeClr val="accent1"/>
-          </a:effectRef>
-          <a:fontRef idx="minor">
-            <a:schemeClr val="lt1"/>
-          </a:fontRef>
-        </p:style>
-        <p:txBody>
-          <a:bodyPr rtlCol="0" anchor="ctr"/>
-          <a:lstStyle/>
-          <a:p>
-            <a:pPr algn="ctr"/>
-          </a:p>
-        </p:txBody>
-      </p:sp>
-      <p:sp>
-        <p:nvSpPr>
-          <p:cNvPr id="30" name="Rectangle 29"/>
-          <p:cNvSpPr/>
-          <p:nvPr/>
-        </p:nvSpPr>
-        <p:spPr>
-          <a:xfrm>
-            <a:off x="9098276" y="2788920"/>
-            <a:ext cx="411480" cy="45720"/>
-          </a:xfrm>
-          <a:prstGeom prst="rect">
-            <a:avLst/>
-          </a:prstGeom>
-          <a:solidFill>
-            <a:srgbClr val="2F6FED"/>
-          </a:solidFill>
-          <a:ln>
-            <a:noFill/>
-          </a:ln>
-        </p:spPr>
-        <p:style>
-          <a:lnRef idx="1">
-            <a:schemeClr val="accent1"/>
-          </a:lnRef>
-          <a:fillRef idx="3">
-            <a:schemeClr val="accent1"/>
-          </a:fillRef>
-          <a:effectRef idx="2">
-            <a:schemeClr val="accent1"/>
-          </a:effectRef>
-          <a:fontRef idx="minor">
-            <a:schemeClr val="lt1"/>
-          </a:fontRef>
-        </p:style>
-        <p:txBody>
-          <a:bodyPr rtlCol="0" anchor="ctr"/>
-          <a:lstStyle/>
-          <a:p>
-            <a:pPr algn="ctr"/>
-          </a:p>
-        </p:txBody>
-      </p:sp>
-      <p:sp>
-        <p:nvSpPr>
-          <p:cNvPr id="31" name="TextBox 30"/>
-          <p:cNvSpPr txBox="1"/>
-          <p:nvPr/>
-        </p:nvSpPr>
-        <p:spPr>
-          <a:xfrm>
-            <a:off x="9116564" y="2926080"/>
-            <a:ext cx="1508759" cy="411480"/>
-          </a:xfrm>
-          <a:prstGeom prst="rect">
-            <a:avLst/>
-          </a:prstGeom>
-          <a:noFill/>
-        </p:spPr>
-        <p:txBody>
-          <a:bodyPr wrap="square">
-            <a:spAutoFit/>
-          </a:bodyPr>
-          <a:lstStyle/>
-          <a:p>
-            <a:pPr algn="l">
-              <a:defRPr sz="1800" b="1">
-                <a:solidFill>
-                  <a:srgbClr val="202123"/>
-                </a:solidFill>
-                <a:latin typeface="Calibri"/>
-              </a:defRPr>
-            </a:pPr>
-            <a:r>
-              <a:t>Proof</a:t>
-            </a:r>
-          </a:p>
-        </p:txBody>
-      </p:sp>
-      <p:sp>
-        <p:nvSpPr>
-          <p:cNvPr id="32" name="TextBox 31"/>
-          <p:cNvSpPr txBox="1"/>
-          <p:nvPr/>
-        </p:nvSpPr>
-        <p:spPr>
-          <a:xfrm>
-            <a:off x="9116564" y="3383280"/>
-            <a:ext cx="1508759" cy="2057400"/>
-          </a:xfrm>
-          <a:prstGeom prst="rect">
-            <a:avLst/>
-          </a:prstGeom>
-          <a:noFill/>
-        </p:spPr>
-        <p:txBody>
-          <a:bodyPr wrap="square">
-            <a:spAutoFit/>
-          </a:bodyPr>
-          <a:lstStyle/>
-          <a:p>
-            <a:pPr algn="l">
-              <a:defRPr sz="1300" b="0">
-                <a:solidFill>
-                  <a:srgbClr val="6E6E68"/>
-                </a:solidFill>
-                <a:latin typeface="Calibri"/>
-              </a:defRPr>
-            </a:pPr>
-            <a:r>
-              <a:t>evidence</a:t>
+                <a:latin typeface="Consolas"/>
+              </a:defRPr>
+            </a:pPr>
+            <a:r>
+              <a:t># TEMP TABLE (явная relation)</a:t>
+            </a:r>
+            <a:br/>
+            <a:r>
+              <a:t>/data/data1/gpsne0/base/12812/t_16465     # ~1.1 MB на seg0</a:t>
+            </a:r>
+            <a:br/>
+            <a:r>
+              <a:t>/data/data2/gpsne1/base/12812/t_16465     # ~1.2 MB на seg1</a:t>
+            </a:r>
+            <a:br/>
+            <a:r>
+              <a:t>/data/master/gpsne-1/base/12812/t_16465   # 0 bytes (QD placeholder)</a:t>
+            </a:r>
+            <a:br/>
+            <a:r>
+              <a:t># pg_relation_filepath → base/12812/t_16465</a:t>
+            </a:r>
+            <a:br/>
+            <a:r>
+              <a:t># nspname = pg_temp_787, relpersistence = t</a:t>
+            </a:r>
+            <a:br/>
+            <a:br/>
+            <a:r>
+              <a:t># Spill / workfiles (исполнитель Sort/Hash)</a:t>
+            </a:r>
+            <a:br/>
+            <a:r>
+              <a:t>/data/data1/gpsne0/base/pgsql_tmp/pgsql_tmp_Sort_1_&lt;pid&gt;.0</a:t>
+            </a:r>
+            <a:br/>
+            <a:r>
+              <a:t>/data/data2/gpsne1/base/pgsql_tmp/pgsql_tmp_Sort_1_&lt;pid&gt;.0</a:t>
+            </a:r>
+            <a:br/>
+            <a:r>
+              <a:t># растут во время query, удаляются после завершения</a:t>
             </a:r>
           </a:p>
         </p:txBody>
@@ -27856,7 +27053,7 @@
               </a:defRPr>
             </a:pPr>
             <a:r>
-              <a:t>DEEP ROUTE</a:t>
+              <a:t>SCREENSHOT</a:t>
             </a:r>
           </a:p>
         </p:txBody>
@@ -27892,7 +27089,7 @@
               </a:defRPr>
             </a:pPr>
             <a:r>
-              <a:t>Deep-dive Principal: internals end-to-end</a:t>
+              <a:t>Скрин FS: TEMP relfilenode t_* на сегментах</a:t>
             </a:r>
           </a:p>
         </p:txBody>
@@ -27928,7 +27125,7 @@
               </a:defRPr>
             </a:pPr>
             <a:r>
-              <a:t>ORCA memo/xforms, pg_statistic slots, AOCO files, TEMP spill, design review.</a:t>
+              <a:t>После CREATE TEMP … AS SELECT … DISTRIBUTED BY — данные на QE, не в pgsql_tmp.</a:t>
             </a:r>
           </a:p>
         </p:txBody>
@@ -27969,654 +27166,30 @@
           </a:p>
         </p:txBody>
       </p:sp>
-      <p:sp>
-        <p:nvSpPr>
-          <p:cNvPr id="9" name="Rounded Rectangle 8"/>
-          <p:cNvSpPr/>
-          <p:nvPr/>
-        </p:nvSpPr>
-        <p:spPr>
-          <a:xfrm>
-            <a:off x="548640" y="2331720"/>
-            <a:ext cx="5303520" cy="1508760"/>
-          </a:xfrm>
-          <a:prstGeom prst="roundRect">
-            <a:avLst>
-              <a:gd name="adj" fmla="val 8000"/>
-            </a:avLst>
-          </a:prstGeom>
-          <a:solidFill>
-            <a:srgbClr val="FFFFFF"/>
-          </a:solidFill>
-          <a:ln>
-            <a:solidFill>
-              <a:srgbClr val="D8D7D0"/>
-            </a:solidFill>
-          </a:ln>
-        </p:spPr>
-        <p:style>
-          <a:lnRef idx="1">
-            <a:schemeClr val="accent1"/>
-          </a:lnRef>
-          <a:fillRef idx="3">
-            <a:schemeClr val="accent1"/>
-          </a:fillRef>
-          <a:effectRef idx="2">
-            <a:schemeClr val="accent1"/>
-          </a:effectRef>
-          <a:fontRef idx="minor">
-            <a:schemeClr val="lt1"/>
-          </a:fontRef>
-        </p:style>
-        <p:txBody>
-          <a:bodyPr rtlCol="0" anchor="ctr"/>
-          <a:lstStyle/>
-          <a:p>
-            <a:pPr algn="ctr"/>
-          </a:p>
-        </p:txBody>
-      </p:sp>
-      <p:sp>
-        <p:nvSpPr>
-          <p:cNvPr id="10" name="Rectangle 9"/>
-          <p:cNvSpPr/>
-          <p:nvPr/>
-        </p:nvSpPr>
-        <p:spPr>
-          <a:xfrm>
-            <a:off x="731520" y="2514600"/>
-            <a:ext cx="411480" cy="45720"/>
-          </a:xfrm>
-          <a:prstGeom prst="rect">
-            <a:avLst/>
-          </a:prstGeom>
-          <a:solidFill>
-            <a:srgbClr val="10A37F"/>
-          </a:solidFill>
-          <a:ln>
-            <a:noFill/>
-          </a:ln>
-        </p:spPr>
-        <p:style>
-          <a:lnRef idx="1">
-            <a:schemeClr val="accent1"/>
-          </a:lnRef>
-          <a:fillRef idx="3">
-            <a:schemeClr val="accent1"/>
-          </a:fillRef>
-          <a:effectRef idx="2">
-            <a:schemeClr val="accent1"/>
-          </a:effectRef>
-          <a:fontRef idx="minor">
-            <a:schemeClr val="lt1"/>
-          </a:fontRef>
-        </p:style>
-        <p:txBody>
-          <a:bodyPr rtlCol="0" anchor="ctr"/>
-          <a:lstStyle/>
-          <a:p>
-            <a:pPr algn="ctr"/>
-          </a:p>
-        </p:txBody>
-      </p:sp>
-      <p:sp>
-        <p:nvSpPr>
-          <p:cNvPr id="11" name="TextBox 10"/>
-          <p:cNvSpPr txBox="1"/>
-          <p:nvPr/>
-        </p:nvSpPr>
-        <p:spPr>
-          <a:xfrm>
-            <a:off x="749808" y="2651760"/>
-            <a:ext cx="4937760" cy="411480"/>
-          </a:xfrm>
-          <a:prstGeom prst="rect">
-            <a:avLst/>
-          </a:prstGeom>
-          <a:noFill/>
-        </p:spPr>
-        <p:txBody>
-          <a:bodyPr wrap="square">
-            <a:spAutoFit/>
-          </a:bodyPr>
-          <a:lstStyle/>
-          <a:p>
-            <a:pPr algn="l">
-              <a:defRPr sz="1800" b="1">
-                <a:solidFill>
-                  <a:srgbClr val="202123"/>
-                </a:solidFill>
-                <a:latin typeface="Calibri"/>
-              </a:defRPr>
-            </a:pPr>
-            <a:r>
-              <a:t>ORCA</a:t>
-            </a:r>
-          </a:p>
-        </p:txBody>
-      </p:sp>
-      <p:sp>
-        <p:nvSpPr>
-          <p:cNvPr id="12" name="TextBox 11"/>
-          <p:cNvSpPr txBox="1"/>
-          <p:nvPr/>
-        </p:nvSpPr>
-        <p:spPr>
-          <a:xfrm>
-            <a:off x="749808" y="3108960"/>
-            <a:ext cx="4937760" cy="548640"/>
-          </a:xfrm>
-          <a:prstGeom prst="rect">
-            <a:avLst/>
-          </a:prstGeom>
-          <a:noFill/>
-        </p:spPr>
-        <p:txBody>
-          <a:bodyPr wrap="square">
-            <a:spAutoFit/>
-          </a:bodyPr>
-          <a:lstStyle/>
-          <a:p>
-            <a:pPr algn="l">
-              <a:defRPr sz="1300" b="0">
-                <a:solidFill>
-                  <a:srgbClr val="6E6E68"/>
-                </a:solidFill>
-                <a:latin typeface="Calibri"/>
-              </a:defRPr>
-            </a:pPr>
-            <a:r>
-              <a:t>fallback, minidump, join_order GUCs.</a:t>
-            </a:r>
-          </a:p>
-        </p:txBody>
-      </p:sp>
-      <p:sp>
-        <p:nvSpPr>
-          <p:cNvPr id="13" name="Rounded Rectangle 12"/>
-          <p:cNvSpPr/>
-          <p:nvPr/>
-        </p:nvSpPr>
-        <p:spPr>
-          <a:xfrm>
-            <a:off x="6217920" y="2331720"/>
-            <a:ext cx="5303520" cy="1508760"/>
-          </a:xfrm>
-          <a:prstGeom prst="roundRect">
-            <a:avLst>
-              <a:gd name="adj" fmla="val 8000"/>
-            </a:avLst>
-          </a:prstGeom>
-          <a:solidFill>
-            <a:srgbClr val="FFFFFF"/>
-          </a:solidFill>
-          <a:ln>
-            <a:solidFill>
-              <a:srgbClr val="D8D7D0"/>
-            </a:solidFill>
-          </a:ln>
-        </p:spPr>
-        <p:style>
-          <a:lnRef idx="1">
-            <a:schemeClr val="accent1"/>
-          </a:lnRef>
-          <a:fillRef idx="3">
-            <a:schemeClr val="accent1"/>
-          </a:fillRef>
-          <a:effectRef idx="2">
-            <a:schemeClr val="accent1"/>
-          </a:effectRef>
-          <a:fontRef idx="minor">
-            <a:schemeClr val="lt1"/>
-          </a:fontRef>
-        </p:style>
-        <p:txBody>
-          <a:bodyPr rtlCol="0" anchor="ctr"/>
-          <a:lstStyle/>
-          <a:p>
-            <a:pPr algn="ctr"/>
-          </a:p>
-        </p:txBody>
-      </p:sp>
-      <p:sp>
-        <p:nvSpPr>
-          <p:cNvPr id="14" name="Rectangle 13"/>
-          <p:cNvSpPr/>
-          <p:nvPr/>
-        </p:nvSpPr>
-        <p:spPr>
-          <a:xfrm>
-            <a:off x="6400800" y="2514600"/>
-            <a:ext cx="411480" cy="45720"/>
-          </a:xfrm>
-          <a:prstGeom prst="rect">
-            <a:avLst/>
-          </a:prstGeom>
-          <a:solidFill>
-            <a:srgbClr val="2F6FED"/>
-          </a:solidFill>
-          <a:ln>
-            <a:noFill/>
-          </a:ln>
-        </p:spPr>
-        <p:style>
-          <a:lnRef idx="1">
-            <a:schemeClr val="accent1"/>
-          </a:lnRef>
-          <a:fillRef idx="3">
-            <a:schemeClr val="accent1"/>
-          </a:fillRef>
-          <a:effectRef idx="2">
-            <a:schemeClr val="accent1"/>
-          </a:effectRef>
-          <a:fontRef idx="minor">
-            <a:schemeClr val="lt1"/>
-          </a:fontRef>
-        </p:style>
-        <p:txBody>
-          <a:bodyPr rtlCol="0" anchor="ctr"/>
-          <a:lstStyle/>
-          <a:p>
-            <a:pPr algn="ctr"/>
-          </a:p>
-        </p:txBody>
-      </p:sp>
-      <p:sp>
-        <p:nvSpPr>
-          <p:cNvPr id="15" name="TextBox 14"/>
-          <p:cNvSpPr txBox="1"/>
-          <p:nvPr/>
-        </p:nvSpPr>
-        <p:spPr>
-          <a:xfrm>
-            <a:off x="6419088" y="2651760"/>
-            <a:ext cx="4937760" cy="411480"/>
-          </a:xfrm>
-          <a:prstGeom prst="rect">
-            <a:avLst/>
-          </a:prstGeom>
-          <a:noFill/>
-        </p:spPr>
-        <p:txBody>
-          <a:bodyPr wrap="square">
-            <a:spAutoFit/>
-          </a:bodyPr>
-          <a:lstStyle/>
-          <a:p>
-            <a:pPr algn="l">
-              <a:defRPr sz="1800" b="1">
-                <a:solidFill>
-                  <a:srgbClr val="202123"/>
-                </a:solidFill>
-                <a:latin typeface="Calibri"/>
-              </a:defRPr>
-            </a:pPr>
-            <a:r>
-              <a:t>Stats files</a:t>
-            </a:r>
-          </a:p>
-        </p:txBody>
-      </p:sp>
-      <p:sp>
-        <p:nvSpPr>
-          <p:cNvPr id="16" name="TextBox 15"/>
-          <p:cNvSpPr txBox="1"/>
-          <p:nvPr/>
-        </p:nvSpPr>
-        <p:spPr>
-          <a:xfrm>
-            <a:off x="6419088" y="3108960"/>
-            <a:ext cx="4937760" cy="548640"/>
-          </a:xfrm>
-          <a:prstGeom prst="rect">
-            <a:avLst/>
-          </a:prstGeom>
-          <a:noFill/>
-        </p:spPr>
-        <p:txBody>
-          <a:bodyPr wrap="square">
-            <a:spAutoFit/>
-          </a:bodyPr>
-          <a:lstStyle/>
-          <a:p>
-            <a:pPr algn="l">
-              <a:defRPr sz="1300" b="0">
-                <a:solidFill>
-                  <a:srgbClr val="6E6E68"/>
-                </a:solidFill>
-                <a:latin typeface="Calibri"/>
-              </a:defRPr>
-            </a:pPr>
-            <a:r>
-              <a:t>stakind/stavalues/TOAST.</a:t>
-            </a:r>
-          </a:p>
-        </p:txBody>
-      </p:sp>
-      <p:sp>
-        <p:nvSpPr>
-          <p:cNvPr id="17" name="Rounded Rectangle 16"/>
-          <p:cNvSpPr/>
-          <p:nvPr/>
-        </p:nvSpPr>
-        <p:spPr>
-          <a:xfrm>
-            <a:off x="548640" y="4160520"/>
-            <a:ext cx="5303520" cy="1508760"/>
-          </a:xfrm>
-          <a:prstGeom prst="roundRect">
-            <a:avLst>
-              <a:gd name="adj" fmla="val 8000"/>
-            </a:avLst>
-          </a:prstGeom>
-          <a:solidFill>
-            <a:srgbClr val="FFFFFF"/>
-          </a:solidFill>
-          <a:ln>
-            <a:solidFill>
-              <a:srgbClr val="D8D7D0"/>
-            </a:solidFill>
-          </a:ln>
-        </p:spPr>
-        <p:style>
-          <a:lnRef idx="1">
-            <a:schemeClr val="accent1"/>
-          </a:lnRef>
-          <a:fillRef idx="3">
-            <a:schemeClr val="accent1"/>
-          </a:fillRef>
-          <a:effectRef idx="2">
-            <a:schemeClr val="accent1"/>
-          </a:effectRef>
-          <a:fontRef idx="minor">
-            <a:schemeClr val="lt1"/>
-          </a:fontRef>
-        </p:style>
-        <p:txBody>
-          <a:bodyPr rtlCol="0" anchor="ctr"/>
-          <a:lstStyle/>
-          <a:p>
-            <a:pPr algn="ctr"/>
-          </a:p>
-        </p:txBody>
-      </p:sp>
-      <p:sp>
-        <p:nvSpPr>
-          <p:cNvPr id="18" name="Rectangle 17"/>
-          <p:cNvSpPr/>
-          <p:nvPr/>
-        </p:nvSpPr>
-        <p:spPr>
-          <a:xfrm>
-            <a:off x="731520" y="4343400"/>
-            <a:ext cx="411480" cy="45720"/>
-          </a:xfrm>
-          <a:prstGeom prst="rect">
-            <a:avLst/>
-          </a:prstGeom>
-          <a:solidFill>
-            <a:srgbClr val="B7791F"/>
-          </a:solidFill>
-          <a:ln>
-            <a:noFill/>
-          </a:ln>
-        </p:spPr>
-        <p:style>
-          <a:lnRef idx="1">
-            <a:schemeClr val="accent1"/>
-          </a:lnRef>
-          <a:fillRef idx="3">
-            <a:schemeClr val="accent1"/>
-          </a:fillRef>
-          <a:effectRef idx="2">
-            <a:schemeClr val="accent1"/>
-          </a:effectRef>
-          <a:fontRef idx="minor">
-            <a:schemeClr val="lt1"/>
-          </a:fontRef>
-        </p:style>
-        <p:txBody>
-          <a:bodyPr rtlCol="0" anchor="ctr"/>
-          <a:lstStyle/>
-          <a:p>
-            <a:pPr algn="ctr"/>
-          </a:p>
-        </p:txBody>
-      </p:sp>
-      <p:sp>
-        <p:nvSpPr>
-          <p:cNvPr id="19" name="TextBox 18"/>
-          <p:cNvSpPr txBox="1"/>
-          <p:nvPr/>
-        </p:nvSpPr>
-        <p:spPr>
-          <a:xfrm>
-            <a:off x="749808" y="4480560"/>
-            <a:ext cx="4937760" cy="411480"/>
-          </a:xfrm>
-          <a:prstGeom prst="rect">
-            <a:avLst/>
-          </a:prstGeom>
-          <a:noFill/>
-        </p:spPr>
-        <p:txBody>
-          <a:bodyPr wrap="square">
-            <a:spAutoFit/>
-          </a:bodyPr>
-          <a:lstStyle/>
-          <a:p>
-            <a:pPr algn="l">
-              <a:defRPr sz="1800" b="1">
-                <a:solidFill>
-                  <a:srgbClr val="202123"/>
-                </a:solidFill>
-                <a:latin typeface="Calibri"/>
-              </a:defRPr>
-            </a:pPr>
-            <a:r>
-              <a:t>Storage</a:t>
-            </a:r>
-          </a:p>
-        </p:txBody>
-      </p:sp>
-      <p:sp>
-        <p:nvSpPr>
-          <p:cNvPr id="20" name="TextBox 19"/>
-          <p:cNvSpPr txBox="1"/>
-          <p:nvPr/>
-        </p:nvSpPr>
-        <p:spPr>
-          <a:xfrm>
-            <a:off x="749808" y="4937760"/>
-            <a:ext cx="4937760" cy="548640"/>
-          </a:xfrm>
-          <a:prstGeom prst="rect">
-            <a:avLst/>
-          </a:prstGeom>
-          <a:noFill/>
-        </p:spPr>
-        <p:txBody>
-          <a:bodyPr wrap="square">
-            <a:spAutoFit/>
-          </a:bodyPr>
-          <a:lstStyle/>
-          <a:p>
-            <a:pPr algn="l">
-              <a:defRPr sz="1300" b="0">
-                <a:solidFill>
-                  <a:srgbClr val="6E6E68"/>
-                </a:solidFill>
-                <a:latin typeface="Calibri"/>
-              </a:defRPr>
-            </a:pPr>
-            <a:r>
-              <a:t>appendonly column layout.</a:t>
-            </a:r>
-          </a:p>
-        </p:txBody>
-      </p:sp>
-      <p:sp>
-        <p:nvSpPr>
-          <p:cNvPr id="21" name="Rounded Rectangle 20"/>
-          <p:cNvSpPr/>
-          <p:nvPr/>
-        </p:nvSpPr>
-        <p:spPr>
-          <a:xfrm>
-            <a:off x="6217920" y="4160520"/>
-            <a:ext cx="5303520" cy="1508760"/>
-          </a:xfrm>
-          <a:prstGeom prst="roundRect">
-            <a:avLst>
-              <a:gd name="adj" fmla="val 8000"/>
-            </a:avLst>
-          </a:prstGeom>
-          <a:solidFill>
-            <a:srgbClr val="FFFFFF"/>
-          </a:solidFill>
-          <a:ln>
-            <a:solidFill>
-              <a:srgbClr val="D8D7D0"/>
-            </a:solidFill>
-          </a:ln>
-        </p:spPr>
-        <p:style>
-          <a:lnRef idx="1">
-            <a:schemeClr val="accent1"/>
-          </a:lnRef>
-          <a:fillRef idx="3">
-            <a:schemeClr val="accent1"/>
-          </a:fillRef>
-          <a:effectRef idx="2">
-            <a:schemeClr val="accent1"/>
-          </a:effectRef>
-          <a:fontRef idx="minor">
-            <a:schemeClr val="lt1"/>
-          </a:fontRef>
-        </p:style>
-        <p:txBody>
-          <a:bodyPr rtlCol="0" anchor="ctr"/>
-          <a:lstStyle/>
-          <a:p>
-            <a:pPr algn="ctr"/>
-          </a:p>
-        </p:txBody>
-      </p:sp>
-      <p:sp>
-        <p:nvSpPr>
-          <p:cNvPr id="22" name="Rectangle 21"/>
-          <p:cNvSpPr/>
-          <p:nvPr/>
-        </p:nvSpPr>
-        <p:spPr>
-          <a:xfrm>
-            <a:off x="6400800" y="4343400"/>
-            <a:ext cx="411480" cy="45720"/>
-          </a:xfrm>
-          <a:prstGeom prst="rect">
-            <a:avLst/>
-          </a:prstGeom>
-          <a:solidFill>
-            <a:srgbClr val="10A37F"/>
-          </a:solidFill>
-          <a:ln>
-            <a:noFill/>
-          </a:ln>
-        </p:spPr>
-        <p:style>
-          <a:lnRef idx="1">
-            <a:schemeClr val="accent1"/>
-          </a:lnRef>
-          <a:fillRef idx="3">
-            <a:schemeClr val="accent1"/>
-          </a:fillRef>
-          <a:effectRef idx="2">
-            <a:schemeClr val="accent1"/>
-          </a:effectRef>
-          <a:fontRef idx="minor">
-            <a:schemeClr val="lt1"/>
-          </a:fontRef>
-        </p:style>
-        <p:txBody>
-          <a:bodyPr rtlCol="0" anchor="ctr"/>
-          <a:lstStyle/>
-          <a:p>
-            <a:pPr algn="ctr"/>
-          </a:p>
-        </p:txBody>
-      </p:sp>
-      <p:sp>
-        <p:nvSpPr>
-          <p:cNvPr id="23" name="TextBox 22"/>
-          <p:cNvSpPr txBox="1"/>
-          <p:nvPr/>
-        </p:nvSpPr>
-        <p:spPr>
-          <a:xfrm>
-            <a:off x="6419088" y="4480560"/>
-            <a:ext cx="4937760" cy="411480"/>
-          </a:xfrm>
-          <a:prstGeom prst="rect">
-            <a:avLst/>
-          </a:prstGeom>
-          <a:noFill/>
-        </p:spPr>
-        <p:txBody>
-          <a:bodyPr wrap="square">
-            <a:spAutoFit/>
-          </a:bodyPr>
-          <a:lstStyle/>
-          <a:p>
-            <a:pPr algn="l">
-              <a:defRPr sz="1800" b="1">
-                <a:solidFill>
-                  <a:srgbClr val="202123"/>
-                </a:solidFill>
-                <a:latin typeface="Calibri"/>
-              </a:defRPr>
-            </a:pPr>
-            <a:r>
-              <a:t>RFC</a:t>
-            </a:r>
-          </a:p>
-        </p:txBody>
-      </p:sp>
-      <p:sp>
-        <p:nvSpPr>
-          <p:cNvPr id="24" name="TextBox 23"/>
-          <p:cNvSpPr txBox="1"/>
-          <p:nvPr/>
-        </p:nvSpPr>
-        <p:spPr>
-          <a:xfrm>
-            <a:off x="6419088" y="4937760"/>
-            <a:ext cx="4937760" cy="548640"/>
-          </a:xfrm>
-          <a:prstGeom prst="rect">
-            <a:avLst/>
-          </a:prstGeom>
-          <a:noFill/>
-        </p:spPr>
-        <p:txBody>
-          <a:bodyPr wrap="square">
-            <a:spAutoFit/>
-          </a:bodyPr>
-          <a:lstStyle/>
-          <a:p>
-            <a:pPr algn="l">
-              <a:defRPr sz="1300" b="0">
-                <a:solidFill>
-                  <a:srgbClr val="6E6E68"/>
-                </a:solidFill>
-                <a:latin typeface="Calibri"/>
-              </a:defRPr>
-            </a:pPr>
-            <a:r>
-              <a:t>rewrite + optimizer policy.</a:t>
-            </a:r>
-          </a:p>
-        </p:txBody>
-      </p:sp>
+      <p:pic>
+        <p:nvPicPr>
+          <p:cNvPr id="9" name="Picture 8" descr="temp-relfilenode-fs.png"/>
+          <p:cNvPicPr>
+            <a:picLocks noChangeAspect="1"/>
+          </p:cNvPicPr>
+          <p:nvPr/>
+        </p:nvPicPr>
+        <p:blipFill>
+          <a:blip r:embed="rId2"/>
+          <a:stretch>
+            <a:fillRect/>
+          </a:stretch>
+        </p:blipFill>
+        <p:spPr>
+          <a:xfrm>
+            <a:off x="2836333" y="2286000"/>
+            <a:ext cx="6519333" cy="3840480"/>
+          </a:xfrm>
+          <a:prstGeom prst="rect">
+            <a:avLst/>
+          </a:prstGeom>
+        </p:spPr>
+      </p:pic>
     </p:spTree>
   </p:cSld>
   <p:clrMapOvr>
@@ -28795,7 +27368,7 @@
               </a:defRPr>
             </a:pPr>
             <a:r>
-              <a:t>SUMMARY</a:t>
+              <a:t>TEMP CODE</a:t>
             </a:r>
           </a:p>
         </p:txBody>
@@ -28831,7 +27404,7 @@
               </a:defRPr>
             </a:pPr>
             <a:r>
-              <a:t>Что унести с Урока 03</a:t>
+              <a:t>Код GPDB 6X_STABLE: TEMP и workfiles</a:t>
             </a:r>
           </a:p>
         </p:txBody>
@@ -28867,7 +27440,7 @@
               </a:defRPr>
             </a:pPr>
             <a:r>
-              <a:t>Оптимизация Greenplum — это pipeline + два optimizer + физика данных.</a:t>
+              <a:t>Якоря для deep-dive чтения, не «магия кластера».</a:t>
             </a:r>
           </a:p>
         </p:txBody>
@@ -28917,7 +27490,7 @@
         <p:spPr>
           <a:xfrm>
             <a:off x="548640" y="2331720"/>
-            <a:ext cx="5303520" cy="1508760"/>
+            <a:ext cx="5303520" cy="1691640"/>
           </a:xfrm>
           <a:prstGeom prst="roundRect">
             <a:avLst>
@@ -29029,7 +27602,7 @@
               </a:defRPr>
             </a:pPr>
             <a:r>
-              <a:t>GUC</a:t>
+              <a:t>TEMP namespace</a:t>
             </a:r>
           </a:p>
         </p:txBody>
@@ -29043,21 +27616,21 @@
         <p:spPr>
           <a:xfrm>
             <a:off x="749808" y="3108960"/>
-            <a:ext cx="4937760" cy="548640"/>
-          </a:xfrm>
-          <a:prstGeom prst="rect">
-            <a:avLst/>
-          </a:prstGeom>
-          <a:noFill/>
-        </p:spPr>
-        <p:txBody>
-          <a:bodyPr wrap="square">
-            <a:spAutoFit/>
-          </a:bodyPr>
-          <a:lstStyle/>
-          <a:p>
-            <a:pPr algn="l">
-              <a:defRPr sz="1300" b="0">
+            <a:ext cx="4937760" cy="731520"/>
+          </a:xfrm>
+          <a:prstGeom prst="rect">
+            <a:avLst/>
+          </a:prstGeom>
+          <a:noFill/>
+        </p:spPr>
+        <p:txBody>
+          <a:bodyPr wrap="square">
+            <a:spAutoFit/>
+          </a:bodyPr>
+          <a:lstStyle/>
+          <a:p>
+            <a:pPr algn="l">
+              <a:defRPr sz="1100" b="0">
                 <a:solidFill>
                   <a:srgbClr val="6E6E68"/>
                 </a:solidFill>
@@ -29065,7 +27638,11 @@
               </a:defRPr>
             </a:pPr>
             <a:r>
-              <a:t>optimizer on/off — явный выбор движка плана.</a:t>
+              <a:t>catalog/namespace.c — InitTempTableNamespace</a:t>
+            </a:r>
+            <a:br/>
+            <a:r>
+              <a:t>https://github.com/greenplum-db/gpdb/blob/6X_STABLE/src/backend/catalog/namespace.c</a:t>
             </a:r>
           </a:p>
         </p:txBody>
@@ -29079,7 +27656,7 @@
         <p:spPr>
           <a:xfrm>
             <a:off x="6217920" y="2331720"/>
-            <a:ext cx="5303520" cy="1508760"/>
+            <a:ext cx="5303520" cy="1691640"/>
           </a:xfrm>
           <a:prstGeom prst="roundRect">
             <a:avLst>
@@ -29191,7 +27768,7 @@
               </a:defRPr>
             </a:pPr>
             <a:r>
-              <a:t>Деревья</a:t>
+              <a:t>Heap / relfilenode</a:t>
             </a:r>
           </a:p>
         </p:txBody>
@@ -29205,21 +27782,21 @@
         <p:spPr>
           <a:xfrm>
             <a:off x="6419088" y="3108960"/>
-            <a:ext cx="4937760" cy="548640"/>
-          </a:xfrm>
-          <a:prstGeom prst="rect">
-            <a:avLst/>
-          </a:prstGeom>
-          <a:noFill/>
-        </p:spPr>
-        <p:txBody>
-          <a:bodyPr wrap="square">
-            <a:spAutoFit/>
-          </a:bodyPr>
-          <a:lstStyle/>
-          <a:p>
-            <a:pPr algn="l">
-              <a:defRPr sz="1300" b="0">
+            <a:ext cx="4937760" cy="731520"/>
+          </a:xfrm>
+          <a:prstGeom prst="rect">
+            <a:avLst/>
+          </a:prstGeom>
+          <a:noFill/>
+        </p:spPr>
+        <p:txBody>
+          <a:bodyPr wrap="square">
+            <a:spAutoFit/>
+          </a:bodyPr>
+          <a:lstStyle/>
+          <a:p>
+            <a:pPr algn="l">
+              <a:defRPr sz="1100" b="0">
                 <a:solidFill>
                   <a:srgbClr val="6E6E68"/>
                 </a:solidFill>
@@ -29227,7 +27804,11 @@
               </a:defRPr>
             </a:pPr>
             <a:r>
-              <a:t>Parse→Rewrite→Optimize→Dispatch→Execute + Motion/slices.</a:t>
+              <a:t>storage/smgr + heapam; temp prefix t_</a:t>
+            </a:r>
+            <a:br/>
+            <a:r>
+              <a:t>https://github.com/greenplum-db/gpdb/tree/6X_STABLE/src/backend/storage</a:t>
             </a:r>
           </a:p>
         </p:txBody>
@@ -29241,7 +27822,7 @@
         <p:spPr>
           <a:xfrm>
             <a:off x="548640" y="4160520"/>
-            <a:ext cx="5303520" cy="1508760"/>
+            <a:ext cx="5303520" cy="1691640"/>
           </a:xfrm>
           <a:prstGeom prst="roundRect">
             <a:avLst>
@@ -29353,7 +27934,7 @@
               </a:defRPr>
             </a:pPr>
             <a:r>
-              <a:t>Доказательство</a:t>
+              <a:t>Workfile manager</a:t>
             </a:r>
           </a:p>
         </p:txBody>
@@ -29367,21 +27948,21 @@
         <p:spPr>
           <a:xfrm>
             <a:off x="749808" y="4937760"/>
-            <a:ext cx="4937760" cy="548640"/>
-          </a:xfrm>
-          <a:prstGeom prst="rect">
-            <a:avLst/>
-          </a:prstGeom>
-          <a:noFill/>
-        </p:spPr>
-        <p:txBody>
-          <a:bodyPr wrap="square">
-            <a:spAutoFit/>
-          </a:bodyPr>
-          <a:lstStyle/>
-          <a:p>
-            <a:pPr algn="l">
-              <a:defRPr sz="1300" b="0">
+            <a:ext cx="4937760" cy="731520"/>
+          </a:xfrm>
+          <a:prstGeom prst="rect">
+            <a:avLst/>
+          </a:prstGeom>
+          <a:noFill/>
+        </p:spPr>
+        <p:txBody>
+          <a:bodyPr wrap="square">
+            <a:spAutoFit/>
+          </a:bodyPr>
+          <a:lstStyle/>
+          <a:p>
+            <a:pPr algn="l">
+              <a:defRPr sz="1100" b="0">
                 <a:solidFill>
                   <a:srgbClr val="6E6E68"/>
                 </a:solidFill>
@@ -29389,7 +27970,2943 @@
               </a:defRPr>
             </a:pPr>
             <a:r>
-              <a:t>before/after EXPLAIN при фиксированном GUC + stats/TEMP.</a:t>
+              <a:t>utils/workfile_manager/workfile_mgr.c</a:t>
+            </a:r>
+            <a:br/>
+            <a:r>
+              <a:t>https://github.com/greenplum-db/gpdb/tree/6X_STABLE/src/backend/utils/workfile_manager</a:t>
+            </a:r>
+          </a:p>
+        </p:txBody>
+      </p:sp>
+      <p:sp>
+        <p:nvSpPr>
+          <p:cNvPr id="21" name="Rounded Rectangle 20"/>
+          <p:cNvSpPr/>
+          <p:nvPr/>
+        </p:nvSpPr>
+        <p:spPr>
+          <a:xfrm>
+            <a:off x="6217920" y="4160520"/>
+            <a:ext cx="5303520" cy="1691640"/>
+          </a:xfrm>
+          <a:prstGeom prst="roundRect">
+            <a:avLst>
+              <a:gd name="adj" fmla="val 8000"/>
+            </a:avLst>
+          </a:prstGeom>
+          <a:solidFill>
+            <a:srgbClr val="FFFFFF"/>
+          </a:solidFill>
+          <a:ln>
+            <a:solidFill>
+              <a:srgbClr val="D8D7D0"/>
+            </a:solidFill>
+          </a:ln>
+        </p:spPr>
+        <p:style>
+          <a:lnRef idx="1">
+            <a:schemeClr val="accent1"/>
+          </a:lnRef>
+          <a:fillRef idx="3">
+            <a:schemeClr val="accent1"/>
+          </a:fillRef>
+          <a:effectRef idx="2">
+            <a:schemeClr val="accent1"/>
+          </a:effectRef>
+          <a:fontRef idx="minor">
+            <a:schemeClr val="lt1"/>
+          </a:fontRef>
+        </p:style>
+        <p:txBody>
+          <a:bodyPr rtlCol="0" anchor="ctr"/>
+          <a:lstStyle/>
+          <a:p>
+            <a:pPr algn="ctr"/>
+          </a:p>
+        </p:txBody>
+      </p:sp>
+      <p:sp>
+        <p:nvSpPr>
+          <p:cNvPr id="22" name="Rectangle 21"/>
+          <p:cNvSpPr/>
+          <p:nvPr/>
+        </p:nvSpPr>
+        <p:spPr>
+          <a:xfrm>
+            <a:off x="6400800" y="4343400"/>
+            <a:ext cx="411480" cy="45720"/>
+          </a:xfrm>
+          <a:prstGeom prst="rect">
+            <a:avLst/>
+          </a:prstGeom>
+          <a:solidFill>
+            <a:srgbClr val="10A37F"/>
+          </a:solidFill>
+          <a:ln>
+            <a:noFill/>
+          </a:ln>
+        </p:spPr>
+        <p:style>
+          <a:lnRef idx="1">
+            <a:schemeClr val="accent1"/>
+          </a:lnRef>
+          <a:fillRef idx="3">
+            <a:schemeClr val="accent1"/>
+          </a:fillRef>
+          <a:effectRef idx="2">
+            <a:schemeClr val="accent1"/>
+          </a:effectRef>
+          <a:fontRef idx="minor">
+            <a:schemeClr val="lt1"/>
+          </a:fontRef>
+        </p:style>
+        <p:txBody>
+          <a:bodyPr rtlCol="0" anchor="ctr"/>
+          <a:lstStyle/>
+          <a:p>
+            <a:pPr algn="ctr"/>
+          </a:p>
+        </p:txBody>
+      </p:sp>
+      <p:sp>
+        <p:nvSpPr>
+          <p:cNvPr id="23" name="TextBox 22"/>
+          <p:cNvSpPr txBox="1"/>
+          <p:nvPr/>
+        </p:nvSpPr>
+        <p:spPr>
+          <a:xfrm>
+            <a:off x="6419088" y="4480560"/>
+            <a:ext cx="4937760" cy="411480"/>
+          </a:xfrm>
+          <a:prstGeom prst="rect">
+            <a:avLst/>
+          </a:prstGeom>
+          <a:noFill/>
+        </p:spPr>
+        <p:txBody>
+          <a:bodyPr wrap="square">
+            <a:spAutoFit/>
+          </a:bodyPr>
+          <a:lstStyle/>
+          <a:p>
+            <a:pPr algn="l">
+              <a:defRPr sz="1800" b="1">
+                <a:solidFill>
+                  <a:srgbClr val="202123"/>
+                </a:solidFill>
+                <a:latin typeface="Calibri"/>
+              </a:defRPr>
+            </a:pPr>
+            <a:r>
+              <a:t>GUC памяти</a:t>
+            </a:r>
+          </a:p>
+        </p:txBody>
+      </p:sp>
+      <p:sp>
+        <p:nvSpPr>
+          <p:cNvPr id="24" name="TextBox 23"/>
+          <p:cNvSpPr txBox="1"/>
+          <p:nvPr/>
+        </p:nvSpPr>
+        <p:spPr>
+          <a:xfrm>
+            <a:off x="6419088" y="4937760"/>
+            <a:ext cx="4937760" cy="731520"/>
+          </a:xfrm>
+          <a:prstGeom prst="rect">
+            <a:avLst/>
+          </a:prstGeom>
+          <a:noFill/>
+        </p:spPr>
+        <p:txBody>
+          <a:bodyPr wrap="square">
+            <a:spAutoFit/>
+          </a:bodyPr>
+          <a:lstStyle/>
+          <a:p>
+            <a:pPr algn="l">
+              <a:defRPr sz="1100" b="0">
+                <a:solidFill>
+                  <a:srgbClr val="6E6E68"/>
+                </a:solidFill>
+                <a:latin typeface="Calibri"/>
+              </a:defRPr>
+            </a:pPr>
+            <a:r>
+              <a:t>statement_mem / max_statement_mem, gp_workfile_limit_*, gp_workfile_compression.</a:t>
+            </a:r>
+          </a:p>
+        </p:txBody>
+      </p:sp>
+    </p:spTree>
+  </p:cSld>
+  <p:clrMapOvr>
+    <a:masterClrMapping/>
+  </p:clrMapOvr>
+</p:sld>
+</file>
+
+<file path=ppt/slides/slide44.xml><?xml version="1.0" encoding="utf-8"?>
+<p:sld xmlns:a="http://schemas.openxmlformats.org/drawingml/2006/main" xmlns:p="http://schemas.openxmlformats.org/presentationml/2006/main" xmlns:r="http://schemas.openxmlformats.org/officeDocument/2006/relationships">
+  <p:cSld>
+    <p:spTree>
+      <p:nvGrpSpPr>
+        <p:cNvPr id="1" name=""/>
+        <p:cNvGrpSpPr/>
+        <p:nvPr/>
+      </p:nvGrpSpPr>
+      <p:grpSpPr/>
+      <p:sp>
+        <p:nvSpPr>
+          <p:cNvPr id="2" name="Rectangle 1"/>
+          <p:cNvSpPr/>
+          <p:nvPr/>
+        </p:nvSpPr>
+        <p:spPr>
+          <a:xfrm>
+            <a:off x="0" y="0"/>
+            <a:ext cx="12192000" cy="6858000"/>
+          </a:xfrm>
+          <a:prstGeom prst="rect">
+            <a:avLst/>
+          </a:prstGeom>
+          <a:solidFill>
+            <a:srgbClr val="F7F7F4"/>
+          </a:solidFill>
+          <a:ln>
+            <a:noFill/>
+          </a:ln>
+        </p:spPr>
+        <p:style>
+          <a:lnRef idx="1">
+            <a:schemeClr val="accent1"/>
+          </a:lnRef>
+          <a:fillRef idx="3">
+            <a:schemeClr val="accent1"/>
+          </a:fillRef>
+          <a:effectRef idx="2">
+            <a:schemeClr val="accent1"/>
+          </a:effectRef>
+          <a:fontRef idx="minor">
+            <a:schemeClr val="lt1"/>
+          </a:fontRef>
+        </p:style>
+        <p:txBody>
+          <a:bodyPr rtlCol="0" anchor="ctr"/>
+          <a:lstStyle/>
+          <a:p>
+            <a:pPr algn="ctr"/>
+          </a:p>
+        </p:txBody>
+      </p:sp>
+      <p:sp>
+        <p:nvSpPr>
+          <p:cNvPr id="3" name="Rectangle 2"/>
+          <p:cNvSpPr/>
+          <p:nvPr/>
+        </p:nvSpPr>
+        <p:spPr>
+          <a:xfrm>
+            <a:off x="0" y="0"/>
+            <a:ext cx="12192000" cy="18288"/>
+          </a:xfrm>
+          <a:prstGeom prst="rect">
+            <a:avLst/>
+          </a:prstGeom>
+          <a:solidFill>
+            <a:srgbClr val="D8D7D0"/>
+          </a:solidFill>
+          <a:ln>
+            <a:noFill/>
+          </a:ln>
+        </p:spPr>
+        <p:style>
+          <a:lnRef idx="1">
+            <a:schemeClr val="accent1"/>
+          </a:lnRef>
+          <a:fillRef idx="3">
+            <a:schemeClr val="accent1"/>
+          </a:fillRef>
+          <a:effectRef idx="2">
+            <a:schemeClr val="accent1"/>
+          </a:effectRef>
+          <a:fontRef idx="minor">
+            <a:schemeClr val="lt1"/>
+          </a:fontRef>
+        </p:style>
+        <p:txBody>
+          <a:bodyPr rtlCol="0" anchor="ctr"/>
+          <a:lstStyle/>
+          <a:p>
+            <a:pPr algn="ctr"/>
+          </a:p>
+        </p:txBody>
+      </p:sp>
+      <p:sp>
+        <p:nvSpPr>
+          <p:cNvPr id="4" name="Rectangle 3"/>
+          <p:cNvSpPr/>
+          <p:nvPr/>
+        </p:nvSpPr>
+        <p:spPr>
+          <a:xfrm>
+            <a:off x="0" y="6839712"/>
+            <a:ext cx="12192000" cy="18288"/>
+          </a:xfrm>
+          <a:prstGeom prst="rect">
+            <a:avLst/>
+          </a:prstGeom>
+          <a:solidFill>
+            <a:srgbClr val="D8D7D0"/>
+          </a:solidFill>
+          <a:ln>
+            <a:noFill/>
+          </a:ln>
+        </p:spPr>
+        <p:style>
+          <a:lnRef idx="1">
+            <a:schemeClr val="accent1"/>
+          </a:lnRef>
+          <a:fillRef idx="3">
+            <a:schemeClr val="accent1"/>
+          </a:fillRef>
+          <a:effectRef idx="2">
+            <a:schemeClr val="accent1"/>
+          </a:effectRef>
+          <a:fontRef idx="minor">
+            <a:schemeClr val="lt1"/>
+          </a:fontRef>
+        </p:style>
+        <p:txBody>
+          <a:bodyPr rtlCol="0" anchor="ctr"/>
+          <a:lstStyle/>
+          <a:p>
+            <a:pPr algn="ctr"/>
+          </a:p>
+        </p:txBody>
+      </p:sp>
+      <p:sp>
+        <p:nvSpPr>
+          <p:cNvPr id="5" name="TextBox 4"/>
+          <p:cNvSpPr txBox="1"/>
+          <p:nvPr/>
+        </p:nvSpPr>
+        <p:spPr>
+          <a:xfrm>
+            <a:off x="502920" y="320040"/>
+            <a:ext cx="4114800" cy="274320"/>
+          </a:xfrm>
+          <a:prstGeom prst="rect">
+            <a:avLst/>
+          </a:prstGeom>
+          <a:noFill/>
+        </p:spPr>
+        <p:txBody>
+          <a:bodyPr wrap="square">
+            <a:spAutoFit/>
+          </a:bodyPr>
+          <a:lstStyle/>
+          <a:p>
+            <a:pPr algn="l">
+              <a:defRPr sz="1300" b="1">
+                <a:solidFill>
+                  <a:srgbClr val="10A37F"/>
+                </a:solidFill>
+                <a:latin typeface="Calibri"/>
+              </a:defRPr>
+            </a:pPr>
+            <a:r>
+              <a:t>SPILL</a:t>
+            </a:r>
+          </a:p>
+        </p:txBody>
+      </p:sp>
+      <p:sp>
+        <p:nvSpPr>
+          <p:cNvPr id="6" name="TextBox 5"/>
+          <p:cNvSpPr txBox="1"/>
+          <p:nvPr/>
+        </p:nvSpPr>
+        <p:spPr>
+          <a:xfrm>
+            <a:off x="502920" y="640080"/>
+            <a:ext cx="10515600" cy="1005840"/>
+          </a:xfrm>
+          <a:prstGeom prst="rect">
+            <a:avLst/>
+          </a:prstGeom>
+          <a:noFill/>
+        </p:spPr>
+        <p:txBody>
+          <a:bodyPr wrap="square">
+            <a:spAutoFit/>
+          </a:bodyPr>
+          <a:lstStyle/>
+          <a:p>
+            <a:pPr algn="l">
+              <a:defRPr sz="3000" b="1">
+                <a:solidFill>
+                  <a:srgbClr val="202123"/>
+                </a:solidFill>
+                <a:latin typeface="Calibri"/>
+              </a:defRPr>
+            </a:pPr>
+            <a:r>
+              <a:t>Spill deep-dive: когда executor пишет pgsql_tmp</a:t>
+            </a:r>
+          </a:p>
+        </p:txBody>
+      </p:sp>
+      <p:sp>
+        <p:nvSpPr>
+          <p:cNvPr id="7" name="TextBox 6"/>
+          <p:cNvSpPr txBox="1"/>
+          <p:nvPr/>
+        </p:nvSpPr>
+        <p:spPr>
+          <a:xfrm>
+            <a:off x="502920" y="1691640"/>
+            <a:ext cx="10241280" cy="548640"/>
+          </a:xfrm>
+          <a:prstGeom prst="rect">
+            <a:avLst/>
+          </a:prstGeom>
+          <a:noFill/>
+        </p:spPr>
+        <p:txBody>
+          <a:bodyPr wrap="square">
+            <a:spAutoFit/>
+          </a:bodyPr>
+          <a:lstStyle/>
+          <a:p>
+            <a:pPr algn="l">
+              <a:defRPr sz="1600" b="0">
+                <a:solidFill>
+                  <a:srgbClr val="6E6E68"/>
+                </a:solidFill>
+                <a:latin typeface="Calibri"/>
+              </a:defRPr>
+            </a:pPr>
+            <a:r>
+              <a:t>GUC statement_mem (на GP6 work_mem deprecated). Маркер в EXPLAIN ANALYZE.</a:t>
+            </a:r>
+          </a:p>
+        </p:txBody>
+      </p:sp>
+      <p:sp>
+        <p:nvSpPr>
+          <p:cNvPr id="8" name="TextBox 7"/>
+          <p:cNvSpPr txBox="1"/>
+          <p:nvPr/>
+        </p:nvSpPr>
+        <p:spPr>
+          <a:xfrm>
+            <a:off x="10058400" y="6446520"/>
+            <a:ext cx="1645920" cy="274320"/>
+          </a:xfrm>
+          <a:prstGeom prst="rect">
+            <a:avLst/>
+          </a:prstGeom>
+          <a:noFill/>
+        </p:spPr>
+        <p:txBody>
+          <a:bodyPr wrap="square">
+            <a:spAutoFit/>
+          </a:bodyPr>
+          <a:lstStyle/>
+          <a:p>
+            <a:pPr algn="r">
+              <a:defRPr sz="1100" b="0">
+                <a:solidFill>
+                  <a:srgbClr val="6E6E68"/>
+                </a:solidFill>
+                <a:latin typeface="Calibri"/>
+              </a:defRPr>
+            </a:pPr>
+            <a:r>
+              <a:t>Урок 03</a:t>
+            </a:r>
+          </a:p>
+        </p:txBody>
+      </p:sp>
+      <p:sp>
+        <p:nvSpPr>
+          <p:cNvPr id="9" name="Rounded Rectangle 8"/>
+          <p:cNvSpPr/>
+          <p:nvPr/>
+        </p:nvSpPr>
+        <p:spPr>
+          <a:xfrm>
+            <a:off x="640080" y="2331720"/>
+            <a:ext cx="10881360" cy="3657600"/>
+          </a:xfrm>
+          <a:prstGeom prst="roundRect">
+            <a:avLst>
+              <a:gd name="adj" fmla="val 8000"/>
+            </a:avLst>
+          </a:prstGeom>
+          <a:solidFill>
+            <a:srgbClr val="FFFFFF"/>
+          </a:solidFill>
+          <a:ln>
+            <a:solidFill>
+              <a:srgbClr val="D8D7D0"/>
+            </a:solidFill>
+          </a:ln>
+        </p:spPr>
+        <p:style>
+          <a:lnRef idx="1">
+            <a:schemeClr val="accent1"/>
+          </a:lnRef>
+          <a:fillRef idx="3">
+            <a:schemeClr val="accent1"/>
+          </a:fillRef>
+          <a:effectRef idx="2">
+            <a:schemeClr val="accent1"/>
+          </a:effectRef>
+          <a:fontRef idx="minor">
+            <a:schemeClr val="lt1"/>
+          </a:fontRef>
+        </p:style>
+        <p:txBody>
+          <a:bodyPr rtlCol="0" anchor="ctr"/>
+          <a:lstStyle/>
+          <a:p>
+            <a:pPr algn="ctr"/>
+          </a:p>
+        </p:txBody>
+      </p:sp>
+      <p:sp>
+        <p:nvSpPr>
+          <p:cNvPr id="10" name="TextBox 9"/>
+          <p:cNvSpPr txBox="1"/>
+          <p:nvPr/>
+        </p:nvSpPr>
+        <p:spPr>
+          <a:xfrm>
+            <a:off x="868680" y="2468880"/>
+            <a:ext cx="1828800" cy="274320"/>
+          </a:xfrm>
+          <a:prstGeom prst="rect">
+            <a:avLst/>
+          </a:prstGeom>
+          <a:noFill/>
+        </p:spPr>
+        <p:txBody>
+          <a:bodyPr wrap="square">
+            <a:spAutoFit/>
+          </a:bodyPr>
+          <a:lstStyle/>
+          <a:p>
+            <a:pPr algn="l">
+              <a:defRPr sz="1200" b="1">
+                <a:solidFill>
+                  <a:srgbClr val="10A37F"/>
+                </a:solidFill>
+                <a:latin typeface="Calibri"/>
+              </a:defRPr>
+            </a:pPr>
+            <a:r>
+              <a:t>SQL</a:t>
+            </a:r>
+          </a:p>
+        </p:txBody>
+      </p:sp>
+      <p:sp>
+        <p:nvSpPr>
+          <p:cNvPr id="11" name="TextBox 10"/>
+          <p:cNvSpPr txBox="1"/>
+          <p:nvPr/>
+        </p:nvSpPr>
+        <p:spPr>
+          <a:xfrm>
+            <a:off x="868680" y="2788920"/>
+            <a:ext cx="10424160" cy="2926080"/>
+          </a:xfrm>
+          <a:prstGeom prst="rect">
+            <a:avLst/>
+          </a:prstGeom>
+          <a:noFill/>
+        </p:spPr>
+        <p:txBody>
+          <a:bodyPr wrap="square">
+            <a:spAutoFit/>
+          </a:bodyPr>
+          <a:lstStyle/>
+          <a:p>
+            <a:pPr algn="l">
+              <a:defRPr sz="1100" b="0">
+                <a:solidFill>
+                  <a:srgbClr val="202123"/>
+                </a:solidFill>
+                <a:latin typeface="Consolas"/>
+              </a:defRPr>
+            </a:pPr>
+            <a:r>
+              <a:t>-- Демо со стенда (ужать память → external sort):</a:t>
+            </a:r>
+            <a:br/>
+            <a:r>
+              <a:t>SET optimizer = off;</a:t>
+            </a:r>
+            <a:br/>
+            <a:r>
+              <a:t>SET statement_mem = '8MB';</a:t>
+            </a:r>
+            <a:br/>
+            <a:r>
+              <a:t>EXPLAIN ANALYZE</a:t>
+            </a:r>
+            <a:br/>
+            <a:r>
+              <a:t>SELECT customer_id, product_id, amount, sale_date</a:t>
+            </a:r>
+            <a:br/>
+            <a:r>
+              <a:t>FROM tmp_spill_fuel   -- ~1M rows amplified TEMP</a:t>
+            </a:r>
+            <a:br/>
+            <a:r>
+              <a:t>ORDER BY amount DESC, customer_id, product_id, sale_date;</a:t>
+            </a:r>
+            <a:br/>
+            <a:br/>
+            <a:r>
+              <a:t>-- Факт с greenplum-625:</a:t>
+            </a:r>
+            <a:br/>
+            <a:r>
+              <a:t>-- Sort Method: external merge  Disk: 34592kB</a:t>
+            </a:r>
+            <a:br/>
+            <a:r>
+              <a:t>-- Memory used: 8192kB   Memory wanted: 58688kB</a:t>
+            </a:r>
+            <a:br/>
+            <a:r>
+              <a:t>-- FS: pgsql_tmp_Sort_1_*.0 рос 0.4MB → 17MB на сегмент, потом cleanup</a:t>
+            </a:r>
+          </a:p>
+        </p:txBody>
+      </p:sp>
+    </p:spTree>
+  </p:cSld>
+  <p:clrMapOvr>
+    <a:masterClrMapping/>
+  </p:clrMapOvr>
+</p:sld>
+</file>
+
+<file path=ppt/slides/slide45.xml><?xml version="1.0" encoding="utf-8"?>
+<p:sld xmlns:a="http://schemas.openxmlformats.org/drawingml/2006/main" xmlns:p="http://schemas.openxmlformats.org/presentationml/2006/main" xmlns:r="http://schemas.openxmlformats.org/officeDocument/2006/relationships">
+  <p:cSld>
+    <p:spTree>
+      <p:nvGrpSpPr>
+        <p:cNvPr id="1" name=""/>
+        <p:cNvGrpSpPr/>
+        <p:nvPr/>
+      </p:nvGrpSpPr>
+      <p:grpSpPr/>
+      <p:sp>
+        <p:nvSpPr>
+          <p:cNvPr id="2" name="Rectangle 1"/>
+          <p:cNvSpPr/>
+          <p:nvPr/>
+        </p:nvSpPr>
+        <p:spPr>
+          <a:xfrm>
+            <a:off x="0" y="0"/>
+            <a:ext cx="12192000" cy="6858000"/>
+          </a:xfrm>
+          <a:prstGeom prst="rect">
+            <a:avLst/>
+          </a:prstGeom>
+          <a:solidFill>
+            <a:srgbClr val="F7F7F4"/>
+          </a:solidFill>
+          <a:ln>
+            <a:noFill/>
+          </a:ln>
+        </p:spPr>
+        <p:style>
+          <a:lnRef idx="1">
+            <a:schemeClr val="accent1"/>
+          </a:lnRef>
+          <a:fillRef idx="3">
+            <a:schemeClr val="accent1"/>
+          </a:fillRef>
+          <a:effectRef idx="2">
+            <a:schemeClr val="accent1"/>
+          </a:effectRef>
+          <a:fontRef idx="minor">
+            <a:schemeClr val="lt1"/>
+          </a:fontRef>
+        </p:style>
+        <p:txBody>
+          <a:bodyPr rtlCol="0" anchor="ctr"/>
+          <a:lstStyle/>
+          <a:p>
+            <a:pPr algn="ctr"/>
+          </a:p>
+        </p:txBody>
+      </p:sp>
+      <p:sp>
+        <p:nvSpPr>
+          <p:cNvPr id="3" name="Rectangle 2"/>
+          <p:cNvSpPr/>
+          <p:nvPr/>
+        </p:nvSpPr>
+        <p:spPr>
+          <a:xfrm>
+            <a:off x="0" y="0"/>
+            <a:ext cx="12192000" cy="18288"/>
+          </a:xfrm>
+          <a:prstGeom prst="rect">
+            <a:avLst/>
+          </a:prstGeom>
+          <a:solidFill>
+            <a:srgbClr val="D8D7D0"/>
+          </a:solidFill>
+          <a:ln>
+            <a:noFill/>
+          </a:ln>
+        </p:spPr>
+        <p:style>
+          <a:lnRef idx="1">
+            <a:schemeClr val="accent1"/>
+          </a:lnRef>
+          <a:fillRef idx="3">
+            <a:schemeClr val="accent1"/>
+          </a:fillRef>
+          <a:effectRef idx="2">
+            <a:schemeClr val="accent1"/>
+          </a:effectRef>
+          <a:fontRef idx="minor">
+            <a:schemeClr val="lt1"/>
+          </a:fontRef>
+        </p:style>
+        <p:txBody>
+          <a:bodyPr rtlCol="0" anchor="ctr"/>
+          <a:lstStyle/>
+          <a:p>
+            <a:pPr algn="ctr"/>
+          </a:p>
+        </p:txBody>
+      </p:sp>
+      <p:sp>
+        <p:nvSpPr>
+          <p:cNvPr id="4" name="Rectangle 3"/>
+          <p:cNvSpPr/>
+          <p:nvPr/>
+        </p:nvSpPr>
+        <p:spPr>
+          <a:xfrm>
+            <a:off x="0" y="6839712"/>
+            <a:ext cx="12192000" cy="18288"/>
+          </a:xfrm>
+          <a:prstGeom prst="rect">
+            <a:avLst/>
+          </a:prstGeom>
+          <a:solidFill>
+            <a:srgbClr val="D8D7D0"/>
+          </a:solidFill>
+          <a:ln>
+            <a:noFill/>
+          </a:ln>
+        </p:spPr>
+        <p:style>
+          <a:lnRef idx="1">
+            <a:schemeClr val="accent1"/>
+          </a:lnRef>
+          <a:fillRef idx="3">
+            <a:schemeClr val="accent1"/>
+          </a:fillRef>
+          <a:effectRef idx="2">
+            <a:schemeClr val="accent1"/>
+          </a:effectRef>
+          <a:fontRef idx="minor">
+            <a:schemeClr val="lt1"/>
+          </a:fontRef>
+        </p:style>
+        <p:txBody>
+          <a:bodyPr rtlCol="0" anchor="ctr"/>
+          <a:lstStyle/>
+          <a:p>
+            <a:pPr algn="ctr"/>
+          </a:p>
+        </p:txBody>
+      </p:sp>
+      <p:sp>
+        <p:nvSpPr>
+          <p:cNvPr id="5" name="TextBox 4"/>
+          <p:cNvSpPr txBox="1"/>
+          <p:nvPr/>
+        </p:nvSpPr>
+        <p:spPr>
+          <a:xfrm>
+            <a:off x="502920" y="320040"/>
+            <a:ext cx="4114800" cy="274320"/>
+          </a:xfrm>
+          <a:prstGeom prst="rect">
+            <a:avLst/>
+          </a:prstGeom>
+          <a:noFill/>
+        </p:spPr>
+        <p:txBody>
+          <a:bodyPr wrap="square">
+            <a:spAutoFit/>
+          </a:bodyPr>
+          <a:lstStyle/>
+          <a:p>
+            <a:pPr algn="l">
+              <a:defRPr sz="1300" b="1">
+                <a:solidFill>
+                  <a:srgbClr val="10A37F"/>
+                </a:solidFill>
+                <a:latin typeface="Calibri"/>
+              </a:defRPr>
+            </a:pPr>
+            <a:r>
+              <a:t>SCREENSHOT</a:t>
+            </a:r>
+          </a:p>
+        </p:txBody>
+      </p:sp>
+      <p:sp>
+        <p:nvSpPr>
+          <p:cNvPr id="6" name="TextBox 5"/>
+          <p:cNvSpPr txBox="1"/>
+          <p:nvPr/>
+        </p:nvSpPr>
+        <p:spPr>
+          <a:xfrm>
+            <a:off x="502920" y="640080"/>
+            <a:ext cx="10515600" cy="1005840"/>
+          </a:xfrm>
+          <a:prstGeom prst="rect">
+            <a:avLst/>
+          </a:prstGeom>
+          <a:noFill/>
+        </p:spPr>
+        <p:txBody>
+          <a:bodyPr wrap="square">
+            <a:spAutoFit/>
+          </a:bodyPr>
+          <a:lstStyle/>
+          <a:p>
+            <a:pPr algn="l">
+              <a:defRPr sz="3000" b="1">
+                <a:solidFill>
+                  <a:srgbClr val="202123"/>
+                </a:solidFill>
+                <a:latin typeface="Calibri"/>
+              </a:defRPr>
+            </a:pPr>
+            <a:r>
+              <a:t>Скрин FS: рост spill-файлов pgsql_tmp_Sort_*</a:t>
+            </a:r>
+          </a:p>
+        </p:txBody>
+      </p:sp>
+      <p:sp>
+        <p:nvSpPr>
+          <p:cNvPr id="7" name="TextBox 6"/>
+          <p:cNvSpPr txBox="1"/>
+          <p:nvPr/>
+        </p:nvSpPr>
+        <p:spPr>
+          <a:xfrm>
+            <a:off x="502920" y="1691640"/>
+            <a:ext cx="10241280" cy="548640"/>
+          </a:xfrm>
+          <a:prstGeom prst="rect">
+            <a:avLst/>
+          </a:prstGeom>
+          <a:noFill/>
+        </p:spPr>
+        <p:txBody>
+          <a:bodyPr wrap="square">
+            <a:spAutoFit/>
+          </a:bodyPr>
+          <a:lstStyle/>
+          <a:p>
+            <a:pPr algn="l">
+              <a:defRPr sz="1600" b="0">
+                <a:solidFill>
+                  <a:srgbClr val="6E6E68"/>
+                </a:solidFill>
+                <a:latin typeface="Calibri"/>
+              </a:defRPr>
+            </a:pPr>
+            <a:r>
+              <a:t>Поллинг во время EXPLAIN ANALYZE: bytes на seg0/seg1 растут, после query → cleanup.</a:t>
+            </a:r>
+          </a:p>
+        </p:txBody>
+      </p:sp>
+      <p:sp>
+        <p:nvSpPr>
+          <p:cNvPr id="8" name="TextBox 7"/>
+          <p:cNvSpPr txBox="1"/>
+          <p:nvPr/>
+        </p:nvSpPr>
+        <p:spPr>
+          <a:xfrm>
+            <a:off x="10058400" y="6446520"/>
+            <a:ext cx="1645920" cy="274320"/>
+          </a:xfrm>
+          <a:prstGeom prst="rect">
+            <a:avLst/>
+          </a:prstGeom>
+          <a:noFill/>
+        </p:spPr>
+        <p:txBody>
+          <a:bodyPr wrap="square">
+            <a:spAutoFit/>
+          </a:bodyPr>
+          <a:lstStyle/>
+          <a:p>
+            <a:pPr algn="r">
+              <a:defRPr sz="1100" b="0">
+                <a:solidFill>
+                  <a:srgbClr val="6E6E68"/>
+                </a:solidFill>
+                <a:latin typeface="Calibri"/>
+              </a:defRPr>
+            </a:pPr>
+            <a:r>
+              <a:t>Урок 03</a:t>
+            </a:r>
+          </a:p>
+        </p:txBody>
+      </p:sp>
+      <p:pic>
+        <p:nvPicPr>
+          <p:cNvPr id="9" name="Picture 8" descr="spill-pgsql_tmp-growth.png"/>
+          <p:cNvPicPr>
+            <a:picLocks noChangeAspect="1"/>
+          </p:cNvPicPr>
+          <p:nvPr/>
+        </p:nvPicPr>
+        <p:blipFill>
+          <a:blip r:embed="rId2"/>
+          <a:stretch>
+            <a:fillRect/>
+          </a:stretch>
+        </p:blipFill>
+        <p:spPr>
+          <a:xfrm>
+            <a:off x="3518708" y="2286000"/>
+            <a:ext cx="5154583" cy="3840480"/>
+          </a:xfrm>
+          <a:prstGeom prst="rect">
+            <a:avLst/>
+          </a:prstGeom>
+        </p:spPr>
+      </p:pic>
+    </p:spTree>
+  </p:cSld>
+  <p:clrMapOvr>
+    <a:masterClrMapping/>
+  </p:clrMapOvr>
+</p:sld>
+</file>
+
+<file path=ppt/slides/slide46.xml><?xml version="1.0" encoding="utf-8"?>
+<p:sld xmlns:a="http://schemas.openxmlformats.org/drawingml/2006/main" xmlns:p="http://schemas.openxmlformats.org/presentationml/2006/main" xmlns:r="http://schemas.openxmlformats.org/officeDocument/2006/relationships">
+  <p:cSld>
+    <p:spTree>
+      <p:nvGrpSpPr>
+        <p:cNvPr id="1" name=""/>
+        <p:cNvGrpSpPr/>
+        <p:nvPr/>
+      </p:nvGrpSpPr>
+      <p:grpSpPr/>
+      <p:sp>
+        <p:nvSpPr>
+          <p:cNvPr id="2" name="Rectangle 1"/>
+          <p:cNvSpPr/>
+          <p:nvPr/>
+        </p:nvSpPr>
+        <p:spPr>
+          <a:xfrm>
+            <a:off x="0" y="0"/>
+            <a:ext cx="12192000" cy="6858000"/>
+          </a:xfrm>
+          <a:prstGeom prst="rect">
+            <a:avLst/>
+          </a:prstGeom>
+          <a:solidFill>
+            <a:srgbClr val="F7F7F4"/>
+          </a:solidFill>
+          <a:ln>
+            <a:noFill/>
+          </a:ln>
+        </p:spPr>
+        <p:style>
+          <a:lnRef idx="1">
+            <a:schemeClr val="accent1"/>
+          </a:lnRef>
+          <a:fillRef idx="3">
+            <a:schemeClr val="accent1"/>
+          </a:fillRef>
+          <a:effectRef idx="2">
+            <a:schemeClr val="accent1"/>
+          </a:effectRef>
+          <a:fontRef idx="minor">
+            <a:schemeClr val="lt1"/>
+          </a:fontRef>
+        </p:style>
+        <p:txBody>
+          <a:bodyPr rtlCol="0" anchor="ctr"/>
+          <a:lstStyle/>
+          <a:p>
+            <a:pPr algn="ctr"/>
+          </a:p>
+        </p:txBody>
+      </p:sp>
+      <p:sp>
+        <p:nvSpPr>
+          <p:cNvPr id="3" name="Rectangle 2"/>
+          <p:cNvSpPr/>
+          <p:nvPr/>
+        </p:nvSpPr>
+        <p:spPr>
+          <a:xfrm>
+            <a:off x="0" y="0"/>
+            <a:ext cx="12192000" cy="18288"/>
+          </a:xfrm>
+          <a:prstGeom prst="rect">
+            <a:avLst/>
+          </a:prstGeom>
+          <a:solidFill>
+            <a:srgbClr val="D8D7D0"/>
+          </a:solidFill>
+          <a:ln>
+            <a:noFill/>
+          </a:ln>
+        </p:spPr>
+        <p:style>
+          <a:lnRef idx="1">
+            <a:schemeClr val="accent1"/>
+          </a:lnRef>
+          <a:fillRef idx="3">
+            <a:schemeClr val="accent1"/>
+          </a:fillRef>
+          <a:effectRef idx="2">
+            <a:schemeClr val="accent1"/>
+          </a:effectRef>
+          <a:fontRef idx="minor">
+            <a:schemeClr val="lt1"/>
+          </a:fontRef>
+        </p:style>
+        <p:txBody>
+          <a:bodyPr rtlCol="0" anchor="ctr"/>
+          <a:lstStyle/>
+          <a:p>
+            <a:pPr algn="ctr"/>
+          </a:p>
+        </p:txBody>
+      </p:sp>
+      <p:sp>
+        <p:nvSpPr>
+          <p:cNvPr id="4" name="Rectangle 3"/>
+          <p:cNvSpPr/>
+          <p:nvPr/>
+        </p:nvSpPr>
+        <p:spPr>
+          <a:xfrm>
+            <a:off x="0" y="6839712"/>
+            <a:ext cx="12192000" cy="18288"/>
+          </a:xfrm>
+          <a:prstGeom prst="rect">
+            <a:avLst/>
+          </a:prstGeom>
+          <a:solidFill>
+            <a:srgbClr val="D8D7D0"/>
+          </a:solidFill>
+          <a:ln>
+            <a:noFill/>
+          </a:ln>
+        </p:spPr>
+        <p:style>
+          <a:lnRef idx="1">
+            <a:schemeClr val="accent1"/>
+          </a:lnRef>
+          <a:fillRef idx="3">
+            <a:schemeClr val="accent1"/>
+          </a:fillRef>
+          <a:effectRef idx="2">
+            <a:schemeClr val="accent1"/>
+          </a:effectRef>
+          <a:fontRef idx="minor">
+            <a:schemeClr val="lt1"/>
+          </a:fontRef>
+        </p:style>
+        <p:txBody>
+          <a:bodyPr rtlCol="0" anchor="ctr"/>
+          <a:lstStyle/>
+          <a:p>
+            <a:pPr algn="ctr"/>
+          </a:p>
+        </p:txBody>
+      </p:sp>
+      <p:sp>
+        <p:nvSpPr>
+          <p:cNvPr id="5" name="TextBox 4"/>
+          <p:cNvSpPr txBox="1"/>
+          <p:nvPr/>
+        </p:nvSpPr>
+        <p:spPr>
+          <a:xfrm>
+            <a:off x="502920" y="320040"/>
+            <a:ext cx="4114800" cy="274320"/>
+          </a:xfrm>
+          <a:prstGeom prst="rect">
+            <a:avLst/>
+          </a:prstGeom>
+          <a:noFill/>
+        </p:spPr>
+        <p:txBody>
+          <a:bodyPr wrap="square">
+            <a:spAutoFit/>
+          </a:bodyPr>
+          <a:lstStyle/>
+          <a:p>
+            <a:pPr algn="l">
+              <a:defRPr sz="1300" b="1">
+                <a:solidFill>
+                  <a:srgbClr val="10A37F"/>
+                </a:solidFill>
+                <a:latin typeface="Calibri"/>
+              </a:defRPr>
+            </a:pPr>
+            <a:r>
+              <a:t>SCREENSHOT</a:t>
+            </a:r>
+          </a:p>
+        </p:txBody>
+      </p:sp>
+      <p:sp>
+        <p:nvSpPr>
+          <p:cNvPr id="6" name="TextBox 5"/>
+          <p:cNvSpPr txBox="1"/>
+          <p:nvPr/>
+        </p:nvSpPr>
+        <p:spPr>
+          <a:xfrm>
+            <a:off x="502920" y="640080"/>
+            <a:ext cx="10515600" cy="1005840"/>
+          </a:xfrm>
+          <a:prstGeom prst="rect">
+            <a:avLst/>
+          </a:prstGeom>
+          <a:noFill/>
+        </p:spPr>
+        <p:txBody>
+          <a:bodyPr wrap="square">
+            <a:spAutoFit/>
+          </a:bodyPr>
+          <a:lstStyle/>
+          <a:p>
+            <a:pPr algn="l">
+              <a:defRPr sz="3000" b="1">
+                <a:solidFill>
+                  <a:srgbClr val="202123"/>
+                </a:solidFill>
+                <a:latin typeface="Calibri"/>
+              </a:defRPr>
+            </a:pPr>
+            <a:r>
+              <a:t>Скрин EXPLAIN: external merge Disk = spill</a:t>
+            </a:r>
+          </a:p>
+        </p:txBody>
+      </p:sp>
+      <p:sp>
+        <p:nvSpPr>
+          <p:cNvPr id="7" name="TextBox 6"/>
+          <p:cNvSpPr txBox="1"/>
+          <p:nvPr/>
+        </p:nvSpPr>
+        <p:spPr>
+          <a:xfrm>
+            <a:off x="502920" y="1691640"/>
+            <a:ext cx="10241280" cy="548640"/>
+          </a:xfrm>
+          <a:prstGeom prst="rect">
+            <a:avLst/>
+          </a:prstGeom>
+          <a:noFill/>
+        </p:spPr>
+        <p:txBody>
+          <a:bodyPr wrap="square">
+            <a:spAutoFit/>
+          </a:bodyPr>
+          <a:lstStyle/>
+          <a:p>
+            <a:pPr algn="l">
+              <a:defRPr sz="1600" b="0">
+                <a:solidFill>
+                  <a:srgbClr val="6E6E68"/>
+                </a:solidFill>
+                <a:latin typeface="Calibri"/>
+              </a:defRPr>
+            </a:pPr>
+            <a:r>
+              <a:t>Связка план ↔ файлы: Disk: NNkB в EXPLAIN = pgsql_tmp_Sort_* на сегментах.</a:t>
+            </a:r>
+          </a:p>
+        </p:txBody>
+      </p:sp>
+      <p:sp>
+        <p:nvSpPr>
+          <p:cNvPr id="8" name="TextBox 7"/>
+          <p:cNvSpPr txBox="1"/>
+          <p:nvPr/>
+        </p:nvSpPr>
+        <p:spPr>
+          <a:xfrm>
+            <a:off x="10058400" y="6446520"/>
+            <a:ext cx="1645920" cy="274320"/>
+          </a:xfrm>
+          <a:prstGeom prst="rect">
+            <a:avLst/>
+          </a:prstGeom>
+          <a:noFill/>
+        </p:spPr>
+        <p:txBody>
+          <a:bodyPr wrap="square">
+            <a:spAutoFit/>
+          </a:bodyPr>
+          <a:lstStyle/>
+          <a:p>
+            <a:pPr algn="r">
+              <a:defRPr sz="1100" b="0">
+                <a:solidFill>
+                  <a:srgbClr val="6E6E68"/>
+                </a:solidFill>
+                <a:latin typeface="Calibri"/>
+              </a:defRPr>
+            </a:pPr>
+            <a:r>
+              <a:t>Урок 03</a:t>
+            </a:r>
+          </a:p>
+        </p:txBody>
+      </p:sp>
+      <p:pic>
+        <p:nvPicPr>
+          <p:cNvPr id="9" name="Picture 8" descr="spill-explain-external-merge.png"/>
+          <p:cNvPicPr>
+            <a:picLocks noChangeAspect="1"/>
+          </p:cNvPicPr>
+          <p:nvPr/>
+        </p:nvPicPr>
+        <p:blipFill>
+          <a:blip r:embed="rId2"/>
+          <a:stretch>
+            <a:fillRect/>
+          </a:stretch>
+        </p:blipFill>
+        <p:spPr>
+          <a:xfrm>
+            <a:off x="1295400" y="2286000"/>
+            <a:ext cx="9601200" cy="3840480"/>
+          </a:xfrm>
+          <a:prstGeom prst="rect">
+            <a:avLst/>
+          </a:prstGeom>
+        </p:spPr>
+      </p:pic>
+    </p:spTree>
+  </p:cSld>
+  <p:clrMapOvr>
+    <a:masterClrMapping/>
+  </p:clrMapOvr>
+</p:sld>
+</file>
+
+<file path=ppt/slides/slide47.xml><?xml version="1.0" encoding="utf-8"?>
+<p:sld xmlns:a="http://schemas.openxmlformats.org/drawingml/2006/main" xmlns:p="http://schemas.openxmlformats.org/presentationml/2006/main" xmlns:r="http://schemas.openxmlformats.org/officeDocument/2006/relationships">
+  <p:cSld>
+    <p:spTree>
+      <p:nvGrpSpPr>
+        <p:cNvPr id="1" name=""/>
+        <p:cNvGrpSpPr/>
+        <p:nvPr/>
+      </p:nvGrpSpPr>
+      <p:grpSpPr/>
+      <p:sp>
+        <p:nvSpPr>
+          <p:cNvPr id="2" name="Rectangle 1"/>
+          <p:cNvSpPr/>
+          <p:nvPr/>
+        </p:nvSpPr>
+        <p:spPr>
+          <a:xfrm>
+            <a:off x="0" y="0"/>
+            <a:ext cx="12192000" cy="6858000"/>
+          </a:xfrm>
+          <a:prstGeom prst="rect">
+            <a:avLst/>
+          </a:prstGeom>
+          <a:solidFill>
+            <a:srgbClr val="F7F7F4"/>
+          </a:solidFill>
+          <a:ln>
+            <a:noFill/>
+          </a:ln>
+        </p:spPr>
+        <p:style>
+          <a:lnRef idx="1">
+            <a:schemeClr val="accent1"/>
+          </a:lnRef>
+          <a:fillRef idx="3">
+            <a:schemeClr val="accent1"/>
+          </a:fillRef>
+          <a:effectRef idx="2">
+            <a:schemeClr val="accent1"/>
+          </a:effectRef>
+          <a:fontRef idx="minor">
+            <a:schemeClr val="lt1"/>
+          </a:fontRef>
+        </p:style>
+        <p:txBody>
+          <a:bodyPr rtlCol="0" anchor="ctr"/>
+          <a:lstStyle/>
+          <a:p>
+            <a:pPr algn="ctr"/>
+          </a:p>
+        </p:txBody>
+      </p:sp>
+      <p:sp>
+        <p:nvSpPr>
+          <p:cNvPr id="3" name="Rectangle 2"/>
+          <p:cNvSpPr/>
+          <p:nvPr/>
+        </p:nvSpPr>
+        <p:spPr>
+          <a:xfrm>
+            <a:off x="0" y="0"/>
+            <a:ext cx="12192000" cy="18288"/>
+          </a:xfrm>
+          <a:prstGeom prst="rect">
+            <a:avLst/>
+          </a:prstGeom>
+          <a:solidFill>
+            <a:srgbClr val="D8D7D0"/>
+          </a:solidFill>
+          <a:ln>
+            <a:noFill/>
+          </a:ln>
+        </p:spPr>
+        <p:style>
+          <a:lnRef idx="1">
+            <a:schemeClr val="accent1"/>
+          </a:lnRef>
+          <a:fillRef idx="3">
+            <a:schemeClr val="accent1"/>
+          </a:fillRef>
+          <a:effectRef idx="2">
+            <a:schemeClr val="accent1"/>
+          </a:effectRef>
+          <a:fontRef idx="minor">
+            <a:schemeClr val="lt1"/>
+          </a:fontRef>
+        </p:style>
+        <p:txBody>
+          <a:bodyPr rtlCol="0" anchor="ctr"/>
+          <a:lstStyle/>
+          <a:p>
+            <a:pPr algn="ctr"/>
+          </a:p>
+        </p:txBody>
+      </p:sp>
+      <p:sp>
+        <p:nvSpPr>
+          <p:cNvPr id="4" name="Rectangle 3"/>
+          <p:cNvSpPr/>
+          <p:nvPr/>
+        </p:nvSpPr>
+        <p:spPr>
+          <a:xfrm>
+            <a:off x="0" y="6839712"/>
+            <a:ext cx="12192000" cy="18288"/>
+          </a:xfrm>
+          <a:prstGeom prst="rect">
+            <a:avLst/>
+          </a:prstGeom>
+          <a:solidFill>
+            <a:srgbClr val="D8D7D0"/>
+          </a:solidFill>
+          <a:ln>
+            <a:noFill/>
+          </a:ln>
+        </p:spPr>
+        <p:style>
+          <a:lnRef idx="1">
+            <a:schemeClr val="accent1"/>
+          </a:lnRef>
+          <a:fillRef idx="3">
+            <a:schemeClr val="accent1"/>
+          </a:fillRef>
+          <a:effectRef idx="2">
+            <a:schemeClr val="accent1"/>
+          </a:effectRef>
+          <a:fontRef idx="minor">
+            <a:schemeClr val="lt1"/>
+          </a:fontRef>
+        </p:style>
+        <p:txBody>
+          <a:bodyPr rtlCol="0" anchor="ctr"/>
+          <a:lstStyle/>
+          <a:p>
+            <a:pPr algn="ctr"/>
+          </a:p>
+        </p:txBody>
+      </p:sp>
+      <p:sp>
+        <p:nvSpPr>
+          <p:cNvPr id="5" name="TextBox 4"/>
+          <p:cNvSpPr txBox="1"/>
+          <p:nvPr/>
+        </p:nvSpPr>
+        <p:spPr>
+          <a:xfrm>
+            <a:off x="502920" y="320040"/>
+            <a:ext cx="4114800" cy="274320"/>
+          </a:xfrm>
+          <a:prstGeom prst="rect">
+            <a:avLst/>
+          </a:prstGeom>
+          <a:noFill/>
+        </p:spPr>
+        <p:txBody>
+          <a:bodyPr wrap="square">
+            <a:spAutoFit/>
+          </a:bodyPr>
+          <a:lstStyle/>
+          <a:p>
+            <a:pPr algn="l">
+              <a:defRPr sz="1300" b="1">
+                <a:solidFill>
+                  <a:srgbClr val="10A37F"/>
+                </a:solidFill>
+                <a:latin typeface="Calibri"/>
+              </a:defRPr>
+            </a:pPr>
+            <a:r>
+              <a:t>TEMP ±</a:t>
+            </a:r>
+          </a:p>
+        </p:txBody>
+      </p:sp>
+      <p:sp>
+        <p:nvSpPr>
+          <p:cNvPr id="6" name="TextBox 5"/>
+          <p:cNvSpPr txBox="1"/>
+          <p:nvPr/>
+        </p:nvSpPr>
+        <p:spPr>
+          <a:xfrm>
+            <a:off x="502920" y="640080"/>
+            <a:ext cx="10515600" cy="1005840"/>
+          </a:xfrm>
+          <a:prstGeom prst="rect">
+            <a:avLst/>
+          </a:prstGeom>
+          <a:noFill/>
+        </p:spPr>
+        <p:txBody>
+          <a:bodyPr wrap="square">
+            <a:spAutoFit/>
+          </a:bodyPr>
+          <a:lstStyle/>
+          <a:p>
+            <a:pPr algn="l">
+              <a:defRPr sz="3000" b="1">
+                <a:solidFill>
+                  <a:srgbClr val="202123"/>
+                </a:solidFill>
+                <a:latin typeface="Calibri"/>
+              </a:defRPr>
+            </a:pPr>
+            <a:r>
+              <a:t>Плюсы и минусы TEMP TABLE</a:t>
+            </a:r>
+          </a:p>
+        </p:txBody>
+      </p:sp>
+      <p:sp>
+        <p:nvSpPr>
+          <p:cNvPr id="7" name="TextBox 6"/>
+          <p:cNvSpPr txBox="1"/>
+          <p:nvPr/>
+        </p:nvSpPr>
+        <p:spPr>
+          <a:xfrm>
+            <a:off x="502920" y="1691640"/>
+            <a:ext cx="10241280" cy="548640"/>
+          </a:xfrm>
+          <a:prstGeom prst="rect">
+            <a:avLst/>
+          </a:prstGeom>
+          <a:noFill/>
+        </p:spPr>
+        <p:txBody>
+          <a:bodyPr wrap="square">
+            <a:spAutoFit/>
+          </a:bodyPr>
+          <a:lstStyle/>
+          <a:p>
+            <a:pPr algn="l">
+              <a:defRPr sz="1600" b="0">
+                <a:solidFill>
+                  <a:srgbClr val="6E6E68"/>
+                </a:solidFill>
+                <a:latin typeface="Calibri"/>
+              </a:defRPr>
+            </a:pPr>
+            <a:r>
+              <a:t>Physical stage — инструмент, не бесплатный cache.</a:t>
+            </a:r>
+          </a:p>
+        </p:txBody>
+      </p:sp>
+      <p:sp>
+        <p:nvSpPr>
+          <p:cNvPr id="8" name="TextBox 7"/>
+          <p:cNvSpPr txBox="1"/>
+          <p:nvPr/>
+        </p:nvSpPr>
+        <p:spPr>
+          <a:xfrm>
+            <a:off x="10058400" y="6446520"/>
+            <a:ext cx="1645920" cy="274320"/>
+          </a:xfrm>
+          <a:prstGeom prst="rect">
+            <a:avLst/>
+          </a:prstGeom>
+          <a:noFill/>
+        </p:spPr>
+        <p:txBody>
+          <a:bodyPr wrap="square">
+            <a:spAutoFit/>
+          </a:bodyPr>
+          <a:lstStyle/>
+          <a:p>
+            <a:pPr algn="r">
+              <a:defRPr sz="1100" b="0">
+                <a:solidFill>
+                  <a:srgbClr val="6E6E68"/>
+                </a:solidFill>
+                <a:latin typeface="Calibri"/>
+              </a:defRPr>
+            </a:pPr>
+            <a:r>
+              <a:t>Урок 03</a:t>
+            </a:r>
+          </a:p>
+        </p:txBody>
+      </p:sp>
+      <p:sp>
+        <p:nvSpPr>
+          <p:cNvPr id="9" name="Rounded Rectangle 8"/>
+          <p:cNvSpPr/>
+          <p:nvPr/>
+        </p:nvSpPr>
+        <p:spPr>
+          <a:xfrm>
+            <a:off x="548640" y="2468880"/>
+            <a:ext cx="5303520" cy="3200400"/>
+          </a:xfrm>
+          <a:prstGeom prst="roundRect">
+            <a:avLst>
+              <a:gd name="adj" fmla="val 8000"/>
+            </a:avLst>
+          </a:prstGeom>
+          <a:solidFill>
+            <a:srgbClr val="FFFFFF"/>
+          </a:solidFill>
+          <a:ln>
+            <a:solidFill>
+              <a:srgbClr val="D8D7D0"/>
+            </a:solidFill>
+          </a:ln>
+        </p:spPr>
+        <p:style>
+          <a:lnRef idx="1">
+            <a:schemeClr val="accent1"/>
+          </a:lnRef>
+          <a:fillRef idx="3">
+            <a:schemeClr val="accent1"/>
+          </a:fillRef>
+          <a:effectRef idx="2">
+            <a:schemeClr val="accent1"/>
+          </a:effectRef>
+          <a:fontRef idx="minor">
+            <a:schemeClr val="lt1"/>
+          </a:fontRef>
+        </p:style>
+        <p:txBody>
+          <a:bodyPr rtlCol="0" anchor="ctr"/>
+          <a:lstStyle/>
+          <a:p>
+            <a:pPr algn="ctr"/>
+          </a:p>
+        </p:txBody>
+      </p:sp>
+      <p:sp>
+        <p:nvSpPr>
+          <p:cNvPr id="10" name="Rectangle 9"/>
+          <p:cNvSpPr/>
+          <p:nvPr/>
+        </p:nvSpPr>
+        <p:spPr>
+          <a:xfrm>
+            <a:off x="731520" y="2651760"/>
+            <a:ext cx="411480" cy="45720"/>
+          </a:xfrm>
+          <a:prstGeom prst="rect">
+            <a:avLst/>
+          </a:prstGeom>
+          <a:solidFill>
+            <a:srgbClr val="10A37F"/>
+          </a:solidFill>
+          <a:ln>
+            <a:noFill/>
+          </a:ln>
+        </p:spPr>
+        <p:style>
+          <a:lnRef idx="1">
+            <a:schemeClr val="accent1"/>
+          </a:lnRef>
+          <a:fillRef idx="3">
+            <a:schemeClr val="accent1"/>
+          </a:fillRef>
+          <a:effectRef idx="2">
+            <a:schemeClr val="accent1"/>
+          </a:effectRef>
+          <a:fontRef idx="minor">
+            <a:schemeClr val="lt1"/>
+          </a:fontRef>
+        </p:style>
+        <p:txBody>
+          <a:bodyPr rtlCol="0" anchor="ctr"/>
+          <a:lstStyle/>
+          <a:p>
+            <a:pPr algn="ctr"/>
+          </a:p>
+        </p:txBody>
+      </p:sp>
+      <p:sp>
+        <p:nvSpPr>
+          <p:cNvPr id="11" name="TextBox 10"/>
+          <p:cNvSpPr txBox="1"/>
+          <p:nvPr/>
+        </p:nvSpPr>
+        <p:spPr>
+          <a:xfrm>
+            <a:off x="749808" y="2788920"/>
+            <a:ext cx="4937760" cy="411480"/>
+          </a:xfrm>
+          <a:prstGeom prst="rect">
+            <a:avLst/>
+          </a:prstGeom>
+          <a:noFill/>
+        </p:spPr>
+        <p:txBody>
+          <a:bodyPr wrap="square">
+            <a:spAutoFit/>
+          </a:bodyPr>
+          <a:lstStyle/>
+          <a:p>
+            <a:pPr algn="l">
+              <a:defRPr sz="1800" b="1">
+                <a:solidFill>
+                  <a:srgbClr val="202123"/>
+                </a:solidFill>
+                <a:latin typeface="Calibri"/>
+              </a:defRPr>
+            </a:pPr>
+            <a:r>
+              <a:t>Плюсы</a:t>
+            </a:r>
+          </a:p>
+        </p:txBody>
+      </p:sp>
+      <p:sp>
+        <p:nvSpPr>
+          <p:cNvPr id="12" name="TextBox 11"/>
+          <p:cNvSpPr txBox="1"/>
+          <p:nvPr/>
+        </p:nvSpPr>
+        <p:spPr>
+          <a:xfrm>
+            <a:off x="749808" y="3246120"/>
+            <a:ext cx="4937760" cy="2240280"/>
+          </a:xfrm>
+          <a:prstGeom prst="rect">
+            <a:avLst/>
+          </a:prstGeom>
+          <a:noFill/>
+        </p:spPr>
+        <p:txBody>
+          <a:bodyPr wrap="square">
+            <a:spAutoFit/>
+          </a:bodyPr>
+          <a:lstStyle/>
+          <a:p>
+            <a:pPr algn="l">
+              <a:defRPr sz="1200" b="0">
+                <a:solidFill>
+                  <a:srgbClr val="6E6E68"/>
+                </a:solidFill>
+                <a:latin typeface="Calibri"/>
+              </a:defRPr>
+            </a:pPr>
+            <a:r>
+              <a:t>Фиксирует grain; свой DISTRIBUTED BY; ANALYZE → честный следующий plan; можно переиспользовать в сессии; проще доказать before/after; отделяет дорогой фильтр от join/window.</a:t>
+            </a:r>
+          </a:p>
+        </p:txBody>
+      </p:sp>
+      <p:sp>
+        <p:nvSpPr>
+          <p:cNvPr id="13" name="Rounded Rectangle 12"/>
+          <p:cNvSpPr/>
+          <p:nvPr/>
+        </p:nvSpPr>
+        <p:spPr>
+          <a:xfrm>
+            <a:off x="6217920" y="2468880"/>
+            <a:ext cx="5303520" cy="3200400"/>
+          </a:xfrm>
+          <a:prstGeom prst="roundRect">
+            <a:avLst>
+              <a:gd name="adj" fmla="val 8000"/>
+            </a:avLst>
+          </a:prstGeom>
+          <a:solidFill>
+            <a:srgbClr val="FFFFFF"/>
+          </a:solidFill>
+          <a:ln>
+            <a:solidFill>
+              <a:srgbClr val="D8D7D0"/>
+            </a:solidFill>
+          </a:ln>
+        </p:spPr>
+        <p:style>
+          <a:lnRef idx="1">
+            <a:schemeClr val="accent1"/>
+          </a:lnRef>
+          <a:fillRef idx="3">
+            <a:schemeClr val="accent1"/>
+          </a:fillRef>
+          <a:effectRef idx="2">
+            <a:schemeClr val="accent1"/>
+          </a:effectRef>
+          <a:fontRef idx="minor">
+            <a:schemeClr val="lt1"/>
+          </a:fontRef>
+        </p:style>
+        <p:txBody>
+          <a:bodyPr rtlCol="0" anchor="ctr"/>
+          <a:lstStyle/>
+          <a:p>
+            <a:pPr algn="ctr"/>
+          </a:p>
+        </p:txBody>
+      </p:sp>
+      <p:sp>
+        <p:nvSpPr>
+          <p:cNvPr id="14" name="Rectangle 13"/>
+          <p:cNvSpPr/>
+          <p:nvPr/>
+        </p:nvSpPr>
+        <p:spPr>
+          <a:xfrm>
+            <a:off x="6400800" y="2651760"/>
+            <a:ext cx="411480" cy="45720"/>
+          </a:xfrm>
+          <a:prstGeom prst="rect">
+            <a:avLst/>
+          </a:prstGeom>
+          <a:solidFill>
+            <a:srgbClr val="B42318"/>
+          </a:solidFill>
+          <a:ln>
+            <a:noFill/>
+          </a:ln>
+        </p:spPr>
+        <p:style>
+          <a:lnRef idx="1">
+            <a:schemeClr val="accent1"/>
+          </a:lnRef>
+          <a:fillRef idx="3">
+            <a:schemeClr val="accent1"/>
+          </a:fillRef>
+          <a:effectRef idx="2">
+            <a:schemeClr val="accent1"/>
+          </a:effectRef>
+          <a:fontRef idx="minor">
+            <a:schemeClr val="lt1"/>
+          </a:fontRef>
+        </p:style>
+        <p:txBody>
+          <a:bodyPr rtlCol="0" anchor="ctr"/>
+          <a:lstStyle/>
+          <a:p>
+            <a:pPr algn="ctr"/>
+          </a:p>
+        </p:txBody>
+      </p:sp>
+      <p:sp>
+        <p:nvSpPr>
+          <p:cNvPr id="15" name="TextBox 14"/>
+          <p:cNvSpPr txBox="1"/>
+          <p:nvPr/>
+        </p:nvSpPr>
+        <p:spPr>
+          <a:xfrm>
+            <a:off x="6419088" y="2788920"/>
+            <a:ext cx="4937760" cy="411480"/>
+          </a:xfrm>
+          <a:prstGeom prst="rect">
+            <a:avLst/>
+          </a:prstGeom>
+          <a:noFill/>
+        </p:spPr>
+        <p:txBody>
+          <a:bodyPr wrap="square">
+            <a:spAutoFit/>
+          </a:bodyPr>
+          <a:lstStyle/>
+          <a:p>
+            <a:pPr algn="l">
+              <a:defRPr sz="1800" b="1">
+                <a:solidFill>
+                  <a:srgbClr val="202123"/>
+                </a:solidFill>
+                <a:latin typeface="Calibri"/>
+              </a:defRPr>
+            </a:pPr>
+            <a:r>
+              <a:t>Минусы</a:t>
+            </a:r>
+          </a:p>
+        </p:txBody>
+      </p:sp>
+      <p:sp>
+        <p:nvSpPr>
+          <p:cNvPr id="16" name="TextBox 15"/>
+          <p:cNvSpPr txBox="1"/>
+          <p:nvPr/>
+        </p:nvSpPr>
+        <p:spPr>
+          <a:xfrm>
+            <a:off x="6419088" y="3246120"/>
+            <a:ext cx="4937760" cy="2240280"/>
+          </a:xfrm>
+          <a:prstGeom prst="rect">
+            <a:avLst/>
+          </a:prstGeom>
+          <a:noFill/>
+        </p:spPr>
+        <p:txBody>
+          <a:bodyPr wrap="square">
+            <a:spAutoFit/>
+          </a:bodyPr>
+          <a:lstStyle/>
+          <a:p>
+            <a:pPr algn="l">
+              <a:defRPr sz="1200" b="0">
+                <a:solidFill>
+                  <a:srgbClr val="6E6E68"/>
+                </a:solidFill>
+                <a:latin typeface="Calibri"/>
+              </a:defRPr>
+            </a:pPr>
+            <a:r>
+              <a:t>Двойной IO (write+read); место на дисках всех сегментов; catalog/planning overhead; риск устаревших данных в сессии; без фильтра = дорогой materialize всего fact.</a:t>
+            </a:r>
+          </a:p>
+        </p:txBody>
+      </p:sp>
+    </p:spTree>
+  </p:cSld>
+  <p:clrMapOvr>
+    <a:masterClrMapping/>
+  </p:clrMapOvr>
+</p:sld>
+</file>
+
+<file path=ppt/slides/slide48.xml><?xml version="1.0" encoding="utf-8"?>
+<p:sld xmlns:a="http://schemas.openxmlformats.org/drawingml/2006/main" xmlns:p="http://schemas.openxmlformats.org/presentationml/2006/main" xmlns:r="http://schemas.openxmlformats.org/officeDocument/2006/relationships">
+  <p:cSld>
+    <p:spTree>
+      <p:nvGrpSpPr>
+        <p:cNvPr id="1" name=""/>
+        <p:cNvGrpSpPr/>
+        <p:nvPr/>
+      </p:nvGrpSpPr>
+      <p:grpSpPr/>
+      <p:sp>
+        <p:nvSpPr>
+          <p:cNvPr id="2" name="Rectangle 1"/>
+          <p:cNvSpPr/>
+          <p:nvPr/>
+        </p:nvSpPr>
+        <p:spPr>
+          <a:xfrm>
+            <a:off x="0" y="0"/>
+            <a:ext cx="12192000" cy="6858000"/>
+          </a:xfrm>
+          <a:prstGeom prst="rect">
+            <a:avLst/>
+          </a:prstGeom>
+          <a:solidFill>
+            <a:srgbClr val="F7F7F4"/>
+          </a:solidFill>
+          <a:ln>
+            <a:noFill/>
+          </a:ln>
+        </p:spPr>
+        <p:style>
+          <a:lnRef idx="1">
+            <a:schemeClr val="accent1"/>
+          </a:lnRef>
+          <a:fillRef idx="3">
+            <a:schemeClr val="accent1"/>
+          </a:fillRef>
+          <a:effectRef idx="2">
+            <a:schemeClr val="accent1"/>
+          </a:effectRef>
+          <a:fontRef idx="minor">
+            <a:schemeClr val="lt1"/>
+          </a:fontRef>
+        </p:style>
+        <p:txBody>
+          <a:bodyPr rtlCol="0" anchor="ctr"/>
+          <a:lstStyle/>
+          <a:p>
+            <a:pPr algn="ctr"/>
+          </a:p>
+        </p:txBody>
+      </p:sp>
+      <p:sp>
+        <p:nvSpPr>
+          <p:cNvPr id="3" name="Rectangle 2"/>
+          <p:cNvSpPr/>
+          <p:nvPr/>
+        </p:nvSpPr>
+        <p:spPr>
+          <a:xfrm>
+            <a:off x="0" y="0"/>
+            <a:ext cx="12192000" cy="18288"/>
+          </a:xfrm>
+          <a:prstGeom prst="rect">
+            <a:avLst/>
+          </a:prstGeom>
+          <a:solidFill>
+            <a:srgbClr val="D8D7D0"/>
+          </a:solidFill>
+          <a:ln>
+            <a:noFill/>
+          </a:ln>
+        </p:spPr>
+        <p:style>
+          <a:lnRef idx="1">
+            <a:schemeClr val="accent1"/>
+          </a:lnRef>
+          <a:fillRef idx="3">
+            <a:schemeClr val="accent1"/>
+          </a:fillRef>
+          <a:effectRef idx="2">
+            <a:schemeClr val="accent1"/>
+          </a:effectRef>
+          <a:fontRef idx="minor">
+            <a:schemeClr val="lt1"/>
+          </a:fontRef>
+        </p:style>
+        <p:txBody>
+          <a:bodyPr rtlCol="0" anchor="ctr"/>
+          <a:lstStyle/>
+          <a:p>
+            <a:pPr algn="ctr"/>
+          </a:p>
+        </p:txBody>
+      </p:sp>
+      <p:sp>
+        <p:nvSpPr>
+          <p:cNvPr id="4" name="Rectangle 3"/>
+          <p:cNvSpPr/>
+          <p:nvPr/>
+        </p:nvSpPr>
+        <p:spPr>
+          <a:xfrm>
+            <a:off x="0" y="6839712"/>
+            <a:ext cx="12192000" cy="18288"/>
+          </a:xfrm>
+          <a:prstGeom prst="rect">
+            <a:avLst/>
+          </a:prstGeom>
+          <a:solidFill>
+            <a:srgbClr val="D8D7D0"/>
+          </a:solidFill>
+          <a:ln>
+            <a:noFill/>
+          </a:ln>
+        </p:spPr>
+        <p:style>
+          <a:lnRef idx="1">
+            <a:schemeClr val="accent1"/>
+          </a:lnRef>
+          <a:fillRef idx="3">
+            <a:schemeClr val="accent1"/>
+          </a:fillRef>
+          <a:effectRef idx="2">
+            <a:schemeClr val="accent1"/>
+          </a:effectRef>
+          <a:fontRef idx="minor">
+            <a:schemeClr val="lt1"/>
+          </a:fontRef>
+        </p:style>
+        <p:txBody>
+          <a:bodyPr rtlCol="0" anchor="ctr"/>
+          <a:lstStyle/>
+          <a:p>
+            <a:pPr algn="ctr"/>
+          </a:p>
+        </p:txBody>
+      </p:sp>
+      <p:sp>
+        <p:nvSpPr>
+          <p:cNvPr id="5" name="TextBox 4"/>
+          <p:cNvSpPr txBox="1"/>
+          <p:nvPr/>
+        </p:nvSpPr>
+        <p:spPr>
+          <a:xfrm>
+            <a:off x="502920" y="320040"/>
+            <a:ext cx="4114800" cy="274320"/>
+          </a:xfrm>
+          <a:prstGeom prst="rect">
+            <a:avLst/>
+          </a:prstGeom>
+          <a:noFill/>
+        </p:spPr>
+        <p:txBody>
+          <a:bodyPr wrap="square">
+            <a:spAutoFit/>
+          </a:bodyPr>
+          <a:lstStyle/>
+          <a:p>
+            <a:pPr algn="l">
+              <a:defRPr sz="1300" b="1">
+                <a:solidFill>
+                  <a:srgbClr val="10A37F"/>
+                </a:solidFill>
+                <a:latin typeface="Calibri"/>
+              </a:defRPr>
+            </a:pPr>
+            <a:r>
+              <a:t>TEMP WHEN</a:t>
+            </a:r>
+          </a:p>
+        </p:txBody>
+      </p:sp>
+      <p:sp>
+        <p:nvSpPr>
+          <p:cNvPr id="6" name="TextBox 5"/>
+          <p:cNvSpPr txBox="1"/>
+          <p:nvPr/>
+        </p:nvSpPr>
+        <p:spPr>
+          <a:xfrm>
+            <a:off x="502920" y="640080"/>
+            <a:ext cx="10515600" cy="1005840"/>
+          </a:xfrm>
+          <a:prstGeom prst="rect">
+            <a:avLst/>
+          </a:prstGeom>
+          <a:noFill/>
+        </p:spPr>
+        <p:txBody>
+          <a:bodyPr wrap="square">
+            <a:spAutoFit/>
+          </a:bodyPr>
+          <a:lstStyle/>
+          <a:p>
+            <a:pPr algn="l">
+              <a:defRPr sz="3000" b="1">
+                <a:solidFill>
+                  <a:srgbClr val="202123"/>
+                </a:solidFill>
+                <a:latin typeface="Calibri"/>
+              </a:defRPr>
+            </a:pPr>
+            <a:r>
+              <a:t>Когда TEMP хорошо / когда плохо</a:t>
+            </a:r>
+          </a:p>
+        </p:txBody>
+      </p:sp>
+      <p:sp>
+        <p:nvSpPr>
+          <p:cNvPr id="7" name="TextBox 6"/>
+          <p:cNvSpPr txBox="1"/>
+          <p:nvPr/>
+        </p:nvSpPr>
+        <p:spPr>
+          <a:xfrm>
+            <a:off x="502920" y="1691640"/>
+            <a:ext cx="10241280" cy="548640"/>
+          </a:xfrm>
+          <a:prstGeom prst="rect">
+            <a:avLst/>
+          </a:prstGeom>
+          <a:noFill/>
+        </p:spPr>
+        <p:txBody>
+          <a:bodyPr wrap="square">
+            <a:spAutoFit/>
+          </a:bodyPr>
+          <a:lstStyle/>
+          <a:p>
+            <a:pPr algn="l">
+              <a:defRPr sz="1600" b="0">
+                <a:solidFill>
+                  <a:srgbClr val="6E6E68"/>
+                </a:solidFill>
+                <a:latin typeface="Calibri"/>
+              </a:defRPr>
+            </a:pPr>
+            <a:r>
+              <a:t>Критерий: stage уменьшает cardinality/Motion cost больше, чем стоит materialize.</a:t>
+            </a:r>
+          </a:p>
+        </p:txBody>
+      </p:sp>
+      <p:sp>
+        <p:nvSpPr>
+          <p:cNvPr id="8" name="TextBox 7"/>
+          <p:cNvSpPr txBox="1"/>
+          <p:nvPr/>
+        </p:nvSpPr>
+        <p:spPr>
+          <a:xfrm>
+            <a:off x="10058400" y="6446520"/>
+            <a:ext cx="1645920" cy="274320"/>
+          </a:xfrm>
+          <a:prstGeom prst="rect">
+            <a:avLst/>
+          </a:prstGeom>
+          <a:noFill/>
+        </p:spPr>
+        <p:txBody>
+          <a:bodyPr wrap="square">
+            <a:spAutoFit/>
+          </a:bodyPr>
+          <a:lstStyle/>
+          <a:p>
+            <a:pPr algn="r">
+              <a:defRPr sz="1100" b="0">
+                <a:solidFill>
+                  <a:srgbClr val="6E6E68"/>
+                </a:solidFill>
+                <a:latin typeface="Calibri"/>
+              </a:defRPr>
+            </a:pPr>
+            <a:r>
+              <a:t>Урок 03</a:t>
+            </a:r>
+          </a:p>
+        </p:txBody>
+      </p:sp>
+      <p:sp>
+        <p:nvSpPr>
+          <p:cNvPr id="9" name="Rounded Rectangle 8"/>
+          <p:cNvSpPr/>
+          <p:nvPr/>
+        </p:nvSpPr>
+        <p:spPr>
+          <a:xfrm>
+            <a:off x="548640" y="2468880"/>
+            <a:ext cx="5303520" cy="3200400"/>
+          </a:xfrm>
+          <a:prstGeom prst="roundRect">
+            <a:avLst>
+              <a:gd name="adj" fmla="val 8000"/>
+            </a:avLst>
+          </a:prstGeom>
+          <a:solidFill>
+            <a:srgbClr val="FFFFFF"/>
+          </a:solidFill>
+          <a:ln>
+            <a:solidFill>
+              <a:srgbClr val="D8D7D0"/>
+            </a:solidFill>
+          </a:ln>
+        </p:spPr>
+        <p:style>
+          <a:lnRef idx="1">
+            <a:schemeClr val="accent1"/>
+          </a:lnRef>
+          <a:fillRef idx="3">
+            <a:schemeClr val="accent1"/>
+          </a:fillRef>
+          <a:effectRef idx="2">
+            <a:schemeClr val="accent1"/>
+          </a:effectRef>
+          <a:fontRef idx="minor">
+            <a:schemeClr val="lt1"/>
+          </a:fontRef>
+        </p:style>
+        <p:txBody>
+          <a:bodyPr rtlCol="0" anchor="ctr"/>
+          <a:lstStyle/>
+          <a:p>
+            <a:pPr algn="ctr"/>
+          </a:p>
+        </p:txBody>
+      </p:sp>
+      <p:sp>
+        <p:nvSpPr>
+          <p:cNvPr id="10" name="Rectangle 9"/>
+          <p:cNvSpPr/>
+          <p:nvPr/>
+        </p:nvSpPr>
+        <p:spPr>
+          <a:xfrm>
+            <a:off x="731520" y="2651760"/>
+            <a:ext cx="411480" cy="45720"/>
+          </a:xfrm>
+          <a:prstGeom prst="rect">
+            <a:avLst/>
+          </a:prstGeom>
+          <a:solidFill>
+            <a:srgbClr val="10A37F"/>
+          </a:solidFill>
+          <a:ln>
+            <a:noFill/>
+          </a:ln>
+        </p:spPr>
+        <p:style>
+          <a:lnRef idx="1">
+            <a:schemeClr val="accent1"/>
+          </a:lnRef>
+          <a:fillRef idx="3">
+            <a:schemeClr val="accent1"/>
+          </a:fillRef>
+          <a:effectRef idx="2">
+            <a:schemeClr val="accent1"/>
+          </a:effectRef>
+          <a:fontRef idx="minor">
+            <a:schemeClr val="lt1"/>
+          </a:fontRef>
+        </p:style>
+        <p:txBody>
+          <a:bodyPr rtlCol="0" anchor="ctr"/>
+          <a:lstStyle/>
+          <a:p>
+            <a:pPr algn="ctr"/>
+          </a:p>
+        </p:txBody>
+      </p:sp>
+      <p:sp>
+        <p:nvSpPr>
+          <p:cNvPr id="11" name="TextBox 10"/>
+          <p:cNvSpPr txBox="1"/>
+          <p:nvPr/>
+        </p:nvSpPr>
+        <p:spPr>
+          <a:xfrm>
+            <a:off x="749808" y="2788920"/>
+            <a:ext cx="4937760" cy="411480"/>
+          </a:xfrm>
+          <a:prstGeom prst="rect">
+            <a:avLst/>
+          </a:prstGeom>
+          <a:noFill/>
+        </p:spPr>
+        <p:txBody>
+          <a:bodyPr wrap="square">
+            <a:spAutoFit/>
+          </a:bodyPr>
+          <a:lstStyle/>
+          <a:p>
+            <a:pPr algn="l">
+              <a:defRPr sz="1800" b="1">
+                <a:solidFill>
+                  <a:srgbClr val="202123"/>
+                </a:solidFill>
+                <a:latin typeface="Calibri"/>
+              </a:defRPr>
+            </a:pPr>
+            <a:r>
+              <a:t>Хорошо</a:t>
+            </a:r>
+          </a:p>
+        </p:txBody>
+      </p:sp>
+      <p:sp>
+        <p:nvSpPr>
+          <p:cNvPr id="12" name="TextBox 11"/>
+          <p:cNvSpPr txBox="1"/>
+          <p:nvPr/>
+        </p:nvSpPr>
+        <p:spPr>
+          <a:xfrm>
+            <a:off x="749808" y="3246120"/>
+            <a:ext cx="4937760" cy="2240280"/>
+          </a:xfrm>
+          <a:prstGeom prst="rect">
+            <a:avLst/>
+          </a:prstGeom>
+          <a:noFill/>
+        </p:spPr>
+        <p:txBody>
+          <a:bodyPr wrap="square">
+            <a:spAutoFit/>
+          </a:bodyPr>
+          <a:lstStyle/>
+          <a:p>
+            <a:pPr algn="l">
+              <a:defRPr sz="1200" b="0">
+                <a:solidFill>
+                  <a:srgbClr val="6E6E68"/>
+                </a:solidFill>
+                <a:latin typeface="Calibri"/>
+              </a:defRPr>
+            </a:pPr>
+            <a:r>
+              <a:t>Узкое окно дат + anti-test; grain под следующий join key; повторное использование stage в сессии; стабилизация плана после ANALYZE; разрез монолита на доказуемые шаги.</a:t>
+            </a:r>
+          </a:p>
+        </p:txBody>
+      </p:sp>
+      <p:sp>
+        <p:nvSpPr>
+          <p:cNvPr id="13" name="Rounded Rectangle 12"/>
+          <p:cNvSpPr/>
+          <p:nvPr/>
+        </p:nvSpPr>
+        <p:spPr>
+          <a:xfrm>
+            <a:off x="6217920" y="2468880"/>
+            <a:ext cx="5303520" cy="3200400"/>
+          </a:xfrm>
+          <a:prstGeom prst="roundRect">
+            <a:avLst>
+              <a:gd name="adj" fmla="val 8000"/>
+            </a:avLst>
+          </a:prstGeom>
+          <a:solidFill>
+            <a:srgbClr val="FFFFFF"/>
+          </a:solidFill>
+          <a:ln>
+            <a:solidFill>
+              <a:srgbClr val="D8D7D0"/>
+            </a:solidFill>
+          </a:ln>
+        </p:spPr>
+        <p:style>
+          <a:lnRef idx="1">
+            <a:schemeClr val="accent1"/>
+          </a:lnRef>
+          <a:fillRef idx="3">
+            <a:schemeClr val="accent1"/>
+          </a:fillRef>
+          <a:effectRef idx="2">
+            <a:schemeClr val="accent1"/>
+          </a:effectRef>
+          <a:fontRef idx="minor">
+            <a:schemeClr val="lt1"/>
+          </a:fontRef>
+        </p:style>
+        <p:txBody>
+          <a:bodyPr rtlCol="0" anchor="ctr"/>
+          <a:lstStyle/>
+          <a:p>
+            <a:pPr algn="ctr"/>
+          </a:p>
+        </p:txBody>
+      </p:sp>
+      <p:sp>
+        <p:nvSpPr>
+          <p:cNvPr id="14" name="Rectangle 13"/>
+          <p:cNvSpPr/>
+          <p:nvPr/>
+        </p:nvSpPr>
+        <p:spPr>
+          <a:xfrm>
+            <a:off x="6400800" y="2651760"/>
+            <a:ext cx="411480" cy="45720"/>
+          </a:xfrm>
+          <a:prstGeom prst="rect">
+            <a:avLst/>
+          </a:prstGeom>
+          <a:solidFill>
+            <a:srgbClr val="B42318"/>
+          </a:solidFill>
+          <a:ln>
+            <a:noFill/>
+          </a:ln>
+        </p:spPr>
+        <p:style>
+          <a:lnRef idx="1">
+            <a:schemeClr val="accent1"/>
+          </a:lnRef>
+          <a:fillRef idx="3">
+            <a:schemeClr val="accent1"/>
+          </a:fillRef>
+          <a:effectRef idx="2">
+            <a:schemeClr val="accent1"/>
+          </a:effectRef>
+          <a:fontRef idx="minor">
+            <a:schemeClr val="lt1"/>
+          </a:fontRef>
+        </p:style>
+        <p:txBody>
+          <a:bodyPr rtlCol="0" anchor="ctr"/>
+          <a:lstStyle/>
+          <a:p>
+            <a:pPr algn="ctr"/>
+          </a:p>
+        </p:txBody>
+      </p:sp>
+      <p:sp>
+        <p:nvSpPr>
+          <p:cNvPr id="15" name="TextBox 14"/>
+          <p:cNvSpPr txBox="1"/>
+          <p:nvPr/>
+        </p:nvSpPr>
+        <p:spPr>
+          <a:xfrm>
+            <a:off x="6419088" y="2788920"/>
+            <a:ext cx="4937760" cy="411480"/>
+          </a:xfrm>
+          <a:prstGeom prst="rect">
+            <a:avLst/>
+          </a:prstGeom>
+          <a:noFill/>
+        </p:spPr>
+        <p:txBody>
+          <a:bodyPr wrap="square">
+            <a:spAutoFit/>
+          </a:bodyPr>
+          <a:lstStyle/>
+          <a:p>
+            <a:pPr algn="l">
+              <a:defRPr sz="1800" b="1">
+                <a:solidFill>
+                  <a:srgbClr val="202123"/>
+                </a:solidFill>
+                <a:latin typeface="Calibri"/>
+              </a:defRPr>
+            </a:pPr>
+            <a:r>
+              <a:t>Плохо</a:t>
+            </a:r>
+          </a:p>
+        </p:txBody>
+      </p:sp>
+      <p:sp>
+        <p:nvSpPr>
+          <p:cNvPr id="16" name="TextBox 15"/>
+          <p:cNvSpPr txBox="1"/>
+          <p:nvPr/>
+        </p:nvSpPr>
+        <p:spPr>
+          <a:xfrm>
+            <a:off x="6419088" y="3246120"/>
+            <a:ext cx="4937760" cy="2240280"/>
+          </a:xfrm>
+          <a:prstGeom prst="rect">
+            <a:avLst/>
+          </a:prstGeom>
+          <a:noFill/>
+        </p:spPr>
+        <p:txBody>
+          <a:bodyPr wrap="square">
+            <a:spAutoFit/>
+          </a:bodyPr>
+          <a:lstStyle/>
+          <a:p>
+            <a:pPr algn="l">
+              <a:defRPr sz="1200" b="0">
+                <a:solidFill>
+                  <a:srgbClr val="6E6E68"/>
+                </a:solidFill>
+                <a:latin typeface="Calibri"/>
+              </a:defRPr>
+            </a:pPr>
+            <a:r>
+              <a:t>TEMP = весь fact без фильтра; забыли ANALYZE; DISTRIBUTED BY не под join; десятки мелких TEMP; вместо фикса stats/skew; CTE «для красоты» без physical need; игнор spill (диск растёт без CREATE TEMP).</a:t>
+            </a:r>
+          </a:p>
+        </p:txBody>
+      </p:sp>
+    </p:spTree>
+  </p:cSld>
+  <p:clrMapOvr>
+    <a:masterClrMapping/>
+  </p:clrMapOvr>
+</p:sld>
+</file>
+
+<file path=ppt/slides/slide49.xml><?xml version="1.0" encoding="utf-8"?>
+<p:sld xmlns:a="http://schemas.openxmlformats.org/drawingml/2006/main" xmlns:p="http://schemas.openxmlformats.org/presentationml/2006/main" xmlns:r="http://schemas.openxmlformats.org/officeDocument/2006/relationships">
+  <p:cSld>
+    <p:spTree>
+      <p:nvGrpSpPr>
+        <p:cNvPr id="1" name=""/>
+        <p:cNvGrpSpPr/>
+        <p:nvPr/>
+      </p:nvGrpSpPr>
+      <p:grpSpPr/>
+      <p:sp>
+        <p:nvSpPr>
+          <p:cNvPr id="2" name="Rectangle 1"/>
+          <p:cNvSpPr/>
+          <p:nvPr/>
+        </p:nvSpPr>
+        <p:spPr>
+          <a:xfrm>
+            <a:off x="0" y="0"/>
+            <a:ext cx="12192000" cy="6858000"/>
+          </a:xfrm>
+          <a:prstGeom prst="rect">
+            <a:avLst/>
+          </a:prstGeom>
+          <a:solidFill>
+            <a:srgbClr val="F7F7F4"/>
+          </a:solidFill>
+          <a:ln>
+            <a:noFill/>
+          </a:ln>
+        </p:spPr>
+        <p:style>
+          <a:lnRef idx="1">
+            <a:schemeClr val="accent1"/>
+          </a:lnRef>
+          <a:fillRef idx="3">
+            <a:schemeClr val="accent1"/>
+          </a:fillRef>
+          <a:effectRef idx="2">
+            <a:schemeClr val="accent1"/>
+          </a:effectRef>
+          <a:fontRef idx="minor">
+            <a:schemeClr val="lt1"/>
+          </a:fontRef>
+        </p:style>
+        <p:txBody>
+          <a:bodyPr rtlCol="0" anchor="ctr"/>
+          <a:lstStyle/>
+          <a:p>
+            <a:pPr algn="ctr"/>
+          </a:p>
+        </p:txBody>
+      </p:sp>
+      <p:sp>
+        <p:nvSpPr>
+          <p:cNvPr id="3" name="Rectangle 2"/>
+          <p:cNvSpPr/>
+          <p:nvPr/>
+        </p:nvSpPr>
+        <p:spPr>
+          <a:xfrm>
+            <a:off x="0" y="0"/>
+            <a:ext cx="12192000" cy="18288"/>
+          </a:xfrm>
+          <a:prstGeom prst="rect">
+            <a:avLst/>
+          </a:prstGeom>
+          <a:solidFill>
+            <a:srgbClr val="D8D7D0"/>
+          </a:solidFill>
+          <a:ln>
+            <a:noFill/>
+          </a:ln>
+        </p:spPr>
+        <p:style>
+          <a:lnRef idx="1">
+            <a:schemeClr val="accent1"/>
+          </a:lnRef>
+          <a:fillRef idx="3">
+            <a:schemeClr val="accent1"/>
+          </a:fillRef>
+          <a:effectRef idx="2">
+            <a:schemeClr val="accent1"/>
+          </a:effectRef>
+          <a:fontRef idx="minor">
+            <a:schemeClr val="lt1"/>
+          </a:fontRef>
+        </p:style>
+        <p:txBody>
+          <a:bodyPr rtlCol="0" anchor="ctr"/>
+          <a:lstStyle/>
+          <a:p>
+            <a:pPr algn="ctr"/>
+          </a:p>
+        </p:txBody>
+      </p:sp>
+      <p:sp>
+        <p:nvSpPr>
+          <p:cNvPr id="4" name="Rectangle 3"/>
+          <p:cNvSpPr/>
+          <p:nvPr/>
+        </p:nvSpPr>
+        <p:spPr>
+          <a:xfrm>
+            <a:off x="0" y="6839712"/>
+            <a:ext cx="12192000" cy="18288"/>
+          </a:xfrm>
+          <a:prstGeom prst="rect">
+            <a:avLst/>
+          </a:prstGeom>
+          <a:solidFill>
+            <a:srgbClr val="D8D7D0"/>
+          </a:solidFill>
+          <a:ln>
+            <a:noFill/>
+          </a:ln>
+        </p:spPr>
+        <p:style>
+          <a:lnRef idx="1">
+            <a:schemeClr val="accent1"/>
+          </a:lnRef>
+          <a:fillRef idx="3">
+            <a:schemeClr val="accent1"/>
+          </a:fillRef>
+          <a:effectRef idx="2">
+            <a:schemeClr val="accent1"/>
+          </a:effectRef>
+          <a:fontRef idx="minor">
+            <a:schemeClr val="lt1"/>
+          </a:fontRef>
+        </p:style>
+        <p:txBody>
+          <a:bodyPr rtlCol="0" anchor="ctr"/>
+          <a:lstStyle/>
+          <a:p>
+            <a:pPr algn="ctr"/>
+          </a:p>
+        </p:txBody>
+      </p:sp>
+      <p:sp>
+        <p:nvSpPr>
+          <p:cNvPr id="5" name="TextBox 4"/>
+          <p:cNvSpPr txBox="1"/>
+          <p:nvPr/>
+        </p:nvSpPr>
+        <p:spPr>
+          <a:xfrm>
+            <a:off x="502920" y="320040"/>
+            <a:ext cx="4114800" cy="274320"/>
+          </a:xfrm>
+          <a:prstGeom prst="rect">
+            <a:avLst/>
+          </a:prstGeom>
+          <a:noFill/>
+        </p:spPr>
+        <p:txBody>
+          <a:bodyPr wrap="square">
+            <a:spAutoFit/>
+          </a:bodyPr>
+          <a:lstStyle/>
+          <a:p>
+            <a:pPr algn="l">
+              <a:defRPr sz="1300" b="1">
+                <a:solidFill>
+                  <a:srgbClr val="10A37F"/>
+                </a:solidFill>
+                <a:latin typeface="Calibri"/>
+              </a:defRPr>
+            </a:pPr>
+            <a:r>
+              <a:t>REWRITE</a:t>
+            </a:r>
+          </a:p>
+        </p:txBody>
+      </p:sp>
+      <p:sp>
+        <p:nvSpPr>
+          <p:cNvPr id="6" name="TextBox 5"/>
+          <p:cNvSpPr txBox="1"/>
+          <p:nvPr/>
+        </p:nvSpPr>
+        <p:spPr>
+          <a:xfrm>
+            <a:off x="502920" y="640080"/>
+            <a:ext cx="10515600" cy="1005840"/>
+          </a:xfrm>
+          <a:prstGeom prst="rect">
+            <a:avLst/>
+          </a:prstGeom>
+          <a:noFill/>
+        </p:spPr>
+        <p:txBody>
+          <a:bodyPr wrap="square">
+            <a:spAutoFit/>
+          </a:bodyPr>
+          <a:lstStyle/>
+          <a:p>
+            <a:pPr algn="l">
+              <a:defRPr sz="3000" b="1">
+                <a:solidFill>
+                  <a:srgbClr val="202123"/>
+                </a:solidFill>
+                <a:latin typeface="Calibri"/>
+              </a:defRPr>
+            </a:pPr>
+            <a:r>
+              <a:t>Паттерн rewrite + проверка optimizer</a:t>
+            </a:r>
+          </a:p>
+        </p:txBody>
+      </p:sp>
+      <p:sp>
+        <p:nvSpPr>
+          <p:cNvPr id="7" name="TextBox 6"/>
+          <p:cNvSpPr txBox="1"/>
+          <p:nvPr/>
+        </p:nvSpPr>
+        <p:spPr>
+          <a:xfrm>
+            <a:off x="502920" y="1691640"/>
+            <a:ext cx="10241280" cy="548640"/>
+          </a:xfrm>
+          <a:prstGeom prst="rect">
+            <a:avLst/>
+          </a:prstGeom>
+          <a:noFill/>
+        </p:spPr>
+        <p:txBody>
+          <a:bodyPr wrap="square">
+            <a:spAutoFit/>
+          </a:bodyPr>
+          <a:lstStyle/>
+          <a:p>
+            <a:pPr algn="l">
+              <a:defRPr sz="1600" b="0">
+                <a:solidFill>
+                  <a:srgbClr val="6E6E68"/>
+                </a:solidFill>
+                <a:latin typeface="Calibri"/>
+              </a:defRPr>
+            </a:pPr>
+            <a:r>
+              <a:t>Before/after при фиксированном SET optimizer (GUC сессии) + FS sanity.</a:t>
+            </a:r>
+          </a:p>
+        </p:txBody>
+      </p:sp>
+      <p:sp>
+        <p:nvSpPr>
+          <p:cNvPr id="8" name="TextBox 7"/>
+          <p:cNvSpPr txBox="1"/>
+          <p:nvPr/>
+        </p:nvSpPr>
+        <p:spPr>
+          <a:xfrm>
+            <a:off x="10058400" y="6446520"/>
+            <a:ext cx="1645920" cy="274320"/>
+          </a:xfrm>
+          <a:prstGeom prst="rect">
+            <a:avLst/>
+          </a:prstGeom>
+          <a:noFill/>
+        </p:spPr>
+        <p:txBody>
+          <a:bodyPr wrap="square">
+            <a:spAutoFit/>
+          </a:bodyPr>
+          <a:lstStyle/>
+          <a:p>
+            <a:pPr algn="r">
+              <a:defRPr sz="1100" b="0">
+                <a:solidFill>
+                  <a:srgbClr val="6E6E68"/>
+                </a:solidFill>
+                <a:latin typeface="Calibri"/>
+              </a:defRPr>
+            </a:pPr>
+            <a:r>
+              <a:t>Урок 03</a:t>
+            </a:r>
+          </a:p>
+        </p:txBody>
+      </p:sp>
+      <p:sp>
+        <p:nvSpPr>
+          <p:cNvPr id="9" name="Rounded Rectangle 8"/>
+          <p:cNvSpPr/>
+          <p:nvPr/>
+        </p:nvSpPr>
+        <p:spPr>
+          <a:xfrm>
+            <a:off x="640080" y="2331720"/>
+            <a:ext cx="10881360" cy="3657600"/>
+          </a:xfrm>
+          <a:prstGeom prst="roundRect">
+            <a:avLst>
+              <a:gd name="adj" fmla="val 8000"/>
+            </a:avLst>
+          </a:prstGeom>
+          <a:solidFill>
+            <a:srgbClr val="FFFFFF"/>
+          </a:solidFill>
+          <a:ln>
+            <a:solidFill>
+              <a:srgbClr val="D8D7D0"/>
+            </a:solidFill>
+          </a:ln>
+        </p:spPr>
+        <p:style>
+          <a:lnRef idx="1">
+            <a:schemeClr val="accent1"/>
+          </a:lnRef>
+          <a:fillRef idx="3">
+            <a:schemeClr val="accent1"/>
+          </a:fillRef>
+          <a:effectRef idx="2">
+            <a:schemeClr val="accent1"/>
+          </a:effectRef>
+          <a:fontRef idx="minor">
+            <a:schemeClr val="lt1"/>
+          </a:fontRef>
+        </p:style>
+        <p:txBody>
+          <a:bodyPr rtlCol="0" anchor="ctr"/>
+          <a:lstStyle/>
+          <a:p>
+            <a:pPr algn="ctr"/>
+          </a:p>
+        </p:txBody>
+      </p:sp>
+      <p:sp>
+        <p:nvSpPr>
+          <p:cNvPr id="10" name="TextBox 9"/>
+          <p:cNvSpPr txBox="1"/>
+          <p:nvPr/>
+        </p:nvSpPr>
+        <p:spPr>
+          <a:xfrm>
+            <a:off x="868680" y="2468880"/>
+            <a:ext cx="1828800" cy="274320"/>
+          </a:xfrm>
+          <a:prstGeom prst="rect">
+            <a:avLst/>
+          </a:prstGeom>
+          <a:noFill/>
+        </p:spPr>
+        <p:txBody>
+          <a:bodyPr wrap="square">
+            <a:spAutoFit/>
+          </a:bodyPr>
+          <a:lstStyle/>
+          <a:p>
+            <a:pPr algn="l">
+              <a:defRPr sz="1200" b="1">
+                <a:solidFill>
+                  <a:srgbClr val="10A37F"/>
+                </a:solidFill>
+                <a:latin typeface="Calibri"/>
+              </a:defRPr>
+            </a:pPr>
+            <a:r>
+              <a:t>SQL</a:t>
+            </a:r>
+          </a:p>
+        </p:txBody>
+      </p:sp>
+      <p:sp>
+        <p:nvSpPr>
+          <p:cNvPr id="11" name="TextBox 10"/>
+          <p:cNvSpPr txBox="1"/>
+          <p:nvPr/>
+        </p:nvSpPr>
+        <p:spPr>
+          <a:xfrm>
+            <a:off x="868680" y="2788920"/>
+            <a:ext cx="10424160" cy="2926080"/>
+          </a:xfrm>
+          <a:prstGeom prst="rect">
+            <a:avLst/>
+          </a:prstGeom>
+          <a:noFill/>
+        </p:spPr>
+        <p:txBody>
+          <a:bodyPr wrap="square">
+            <a:spAutoFit/>
+          </a:bodyPr>
+          <a:lstStyle/>
+          <a:p>
+            <a:pPr algn="l">
+              <a:defRPr sz="1100" b="0">
+                <a:solidFill>
+                  <a:srgbClr val="202123"/>
+                </a:solidFill>
+                <a:latin typeface="Consolas"/>
+              </a:defRPr>
+            </a:pPr>
+            <a:r>
+              <a:t>SET optimizer = on;  -- зафиксировали GUC</a:t>
+            </a:r>
+            <a:br/>
+            <a:r>
+              <a:t>CREATE TEMP TABLE tmp_sales_feb AS</a:t>
+            </a:r>
+            <a:br/>
+            <a:r>
+              <a:t>SELECT customer_id, product_id, amount</a:t>
+            </a:r>
+            <a:br/>
+            <a:r>
+              <a:t>FROM lesson03.fact_sales</a:t>
+            </a:r>
+            <a:br/>
+            <a:r>
+              <a:t>WHERE sale_date &gt;= DATE '2026-02-01'</a:t>
+            </a:r>
+            <a:br/>
+            <a:r>
+              <a:t>  AND sale_date &lt;  DATE '2026-03-01'</a:t>
+            </a:r>
+            <a:br/>
+            <a:r>
+              <a:t>DISTRIBUTED BY (customer_id);</a:t>
+            </a:r>
+            <a:br/>
+            <a:r>
+              <a:t>ANALYZE tmp_sales_feb;</a:t>
+            </a:r>
+            <a:br/>
+            <a:r>
+              <a:t>EXPLAIN ...</a:t>
+            </a:r>
+            <a:br/>
+            <a:br/>
+            <a:r>
+              <a:t>-- Evidence pack:</a:t>
+            </a:r>
+            <a:br/>
+            <a:r>
+              <a:t>-- 1) before/after EXPLAIN (тот же optimizer)</a:t>
+            </a:r>
+            <a:br/>
+            <a:r>
+              <a:t>-- 2) pg_relation_filepath / размер TEMP</a:t>
+            </a:r>
+            <a:br/>
+            <a:r>
+              <a:t>-- 3) при spill: Sort Method external merge + pgsql_tmp_Sort_*</a:t>
             </a:r>
           </a:p>
         </p:txBody>
@@ -30005,6 +31522,2995 @@
             </a:pPr>
             <a:r>
               <a:t>GUC optimizer on/off, ANALYZE, TEMP stages, DISTRIBUTED BY, Heap/AO/AOCO.</a:t>
+            </a:r>
+          </a:p>
+        </p:txBody>
+      </p:sp>
+    </p:spTree>
+  </p:cSld>
+  <p:clrMapOvr>
+    <a:masterClrMapping/>
+  </p:clrMapOvr>
+</p:sld>
+</file>
+
+<file path=ppt/slides/slide50.xml><?xml version="1.0" encoding="utf-8"?>
+<p:sld xmlns:a="http://schemas.openxmlformats.org/drawingml/2006/main" xmlns:p="http://schemas.openxmlformats.org/presentationml/2006/main" xmlns:r="http://schemas.openxmlformats.org/officeDocument/2006/relationships">
+  <p:cSld>
+    <p:spTree>
+      <p:nvGrpSpPr>
+        <p:cNvPr id="1" name=""/>
+        <p:cNvGrpSpPr/>
+        <p:nvPr/>
+      </p:nvGrpSpPr>
+      <p:grpSpPr/>
+      <p:sp>
+        <p:nvSpPr>
+          <p:cNvPr id="2" name="Rectangle 1"/>
+          <p:cNvSpPr/>
+          <p:nvPr/>
+        </p:nvSpPr>
+        <p:spPr>
+          <a:xfrm>
+            <a:off x="0" y="0"/>
+            <a:ext cx="12192000" cy="6858000"/>
+          </a:xfrm>
+          <a:prstGeom prst="rect">
+            <a:avLst/>
+          </a:prstGeom>
+          <a:solidFill>
+            <a:srgbClr val="F7F7F4"/>
+          </a:solidFill>
+          <a:ln>
+            <a:noFill/>
+          </a:ln>
+        </p:spPr>
+        <p:style>
+          <a:lnRef idx="1">
+            <a:schemeClr val="accent1"/>
+          </a:lnRef>
+          <a:fillRef idx="3">
+            <a:schemeClr val="accent1"/>
+          </a:fillRef>
+          <a:effectRef idx="2">
+            <a:schemeClr val="accent1"/>
+          </a:effectRef>
+          <a:fontRef idx="minor">
+            <a:schemeClr val="lt1"/>
+          </a:fontRef>
+        </p:style>
+        <p:txBody>
+          <a:bodyPr rtlCol="0" anchor="ctr"/>
+          <a:lstStyle/>
+          <a:p>
+            <a:pPr algn="ctr"/>
+          </a:p>
+        </p:txBody>
+      </p:sp>
+      <p:sp>
+        <p:nvSpPr>
+          <p:cNvPr id="3" name="Rectangle 2"/>
+          <p:cNvSpPr/>
+          <p:nvPr/>
+        </p:nvSpPr>
+        <p:spPr>
+          <a:xfrm>
+            <a:off x="0" y="0"/>
+            <a:ext cx="12192000" cy="18288"/>
+          </a:xfrm>
+          <a:prstGeom prst="rect">
+            <a:avLst/>
+          </a:prstGeom>
+          <a:solidFill>
+            <a:srgbClr val="D8D7D0"/>
+          </a:solidFill>
+          <a:ln>
+            <a:noFill/>
+          </a:ln>
+        </p:spPr>
+        <p:style>
+          <a:lnRef idx="1">
+            <a:schemeClr val="accent1"/>
+          </a:lnRef>
+          <a:fillRef idx="3">
+            <a:schemeClr val="accent1"/>
+          </a:fillRef>
+          <a:effectRef idx="2">
+            <a:schemeClr val="accent1"/>
+          </a:effectRef>
+          <a:fontRef idx="minor">
+            <a:schemeClr val="lt1"/>
+          </a:fontRef>
+        </p:style>
+        <p:txBody>
+          <a:bodyPr rtlCol="0" anchor="ctr"/>
+          <a:lstStyle/>
+          <a:p>
+            <a:pPr algn="ctr"/>
+          </a:p>
+        </p:txBody>
+      </p:sp>
+      <p:sp>
+        <p:nvSpPr>
+          <p:cNvPr id="4" name="Rectangle 3"/>
+          <p:cNvSpPr/>
+          <p:nvPr/>
+        </p:nvSpPr>
+        <p:spPr>
+          <a:xfrm>
+            <a:off x="0" y="6839712"/>
+            <a:ext cx="12192000" cy="18288"/>
+          </a:xfrm>
+          <a:prstGeom prst="rect">
+            <a:avLst/>
+          </a:prstGeom>
+          <a:solidFill>
+            <a:srgbClr val="D8D7D0"/>
+          </a:solidFill>
+          <a:ln>
+            <a:noFill/>
+          </a:ln>
+        </p:spPr>
+        <p:style>
+          <a:lnRef idx="1">
+            <a:schemeClr val="accent1"/>
+          </a:lnRef>
+          <a:fillRef idx="3">
+            <a:schemeClr val="accent1"/>
+          </a:fillRef>
+          <a:effectRef idx="2">
+            <a:schemeClr val="accent1"/>
+          </a:effectRef>
+          <a:fontRef idx="minor">
+            <a:schemeClr val="lt1"/>
+          </a:fontRef>
+        </p:style>
+        <p:txBody>
+          <a:bodyPr rtlCol="0" anchor="ctr"/>
+          <a:lstStyle/>
+          <a:p>
+            <a:pPr algn="ctr"/>
+          </a:p>
+        </p:txBody>
+      </p:sp>
+      <p:sp>
+        <p:nvSpPr>
+          <p:cNvPr id="5" name="TextBox 4"/>
+          <p:cNvSpPr txBox="1"/>
+          <p:nvPr/>
+        </p:nvSpPr>
+        <p:spPr>
+          <a:xfrm>
+            <a:off x="502920" y="320040"/>
+            <a:ext cx="4114800" cy="274320"/>
+          </a:xfrm>
+          <a:prstGeom prst="rect">
+            <a:avLst/>
+          </a:prstGeom>
+          <a:noFill/>
+        </p:spPr>
+        <p:txBody>
+          <a:bodyPr wrap="square">
+            <a:spAutoFit/>
+          </a:bodyPr>
+          <a:lstStyle/>
+          <a:p>
+            <a:pPr algn="l">
+              <a:defRPr sz="1300" b="1">
+                <a:solidFill>
+                  <a:srgbClr val="10A37F"/>
+                </a:solidFill>
+                <a:latin typeface="Calibri"/>
+              </a:defRPr>
+            </a:pPr>
+            <a:r>
+              <a:t>SIMPLE PATH</a:t>
+            </a:r>
+          </a:p>
+        </p:txBody>
+      </p:sp>
+      <p:sp>
+        <p:nvSpPr>
+          <p:cNvPr id="6" name="TextBox 5"/>
+          <p:cNvSpPr txBox="1"/>
+          <p:nvPr/>
+        </p:nvSpPr>
+        <p:spPr>
+          <a:xfrm>
+            <a:off x="502920" y="640080"/>
+            <a:ext cx="10515600" cy="1005840"/>
+          </a:xfrm>
+          <a:prstGeom prst="rect">
+            <a:avLst/>
+          </a:prstGeom>
+          <a:noFill/>
+        </p:spPr>
+        <p:txBody>
+          <a:bodyPr wrap="square">
+            <a:spAutoFit/>
+          </a:bodyPr>
+          <a:lstStyle/>
+          <a:p>
+            <a:pPr algn="l">
+              <a:defRPr sz="3000" b="1">
+                <a:solidFill>
+                  <a:srgbClr val="202123"/>
+                </a:solidFill>
+                <a:latin typeface="Calibri"/>
+              </a:defRPr>
+            </a:pPr>
+            <a:r>
+              <a:t>60 минут на GP 6.25</a:t>
+            </a:r>
+          </a:p>
+        </p:txBody>
+      </p:sp>
+      <p:sp>
+        <p:nvSpPr>
+          <p:cNvPr id="7" name="TextBox 6"/>
+          <p:cNvSpPr txBox="1"/>
+          <p:nvPr/>
+        </p:nvSpPr>
+        <p:spPr>
+          <a:xfrm>
+            <a:off x="502920" y="1691640"/>
+            <a:ext cx="10241280" cy="548640"/>
+          </a:xfrm>
+          <a:prstGeom prst="rect">
+            <a:avLst/>
+          </a:prstGeom>
+          <a:noFill/>
+        </p:spPr>
+        <p:txBody>
+          <a:bodyPr wrap="square">
+            <a:spAutoFit/>
+          </a:bodyPr>
+          <a:lstStyle/>
+          <a:p>
+            <a:pPr algn="l">
+              <a:defRPr sz="1600" b="0">
+                <a:solidFill>
+                  <a:srgbClr val="6E6E68"/>
+                </a:solidFill>
+                <a:latin typeface="Calibri"/>
+              </a:defRPr>
+            </a:pPr>
+            <a:r>
+              <a:t>Glossary → case → optimizer → EXPLAIN trees → stats → TEMP → proof.</a:t>
+            </a:r>
+          </a:p>
+        </p:txBody>
+      </p:sp>
+      <p:sp>
+        <p:nvSpPr>
+          <p:cNvPr id="8" name="TextBox 7"/>
+          <p:cNvSpPr txBox="1"/>
+          <p:nvPr/>
+        </p:nvSpPr>
+        <p:spPr>
+          <a:xfrm>
+            <a:off x="10058400" y="6446520"/>
+            <a:ext cx="1645920" cy="274320"/>
+          </a:xfrm>
+          <a:prstGeom prst="rect">
+            <a:avLst/>
+          </a:prstGeom>
+          <a:noFill/>
+        </p:spPr>
+        <p:txBody>
+          <a:bodyPr wrap="square">
+            <a:spAutoFit/>
+          </a:bodyPr>
+          <a:lstStyle/>
+          <a:p>
+            <a:pPr algn="r">
+              <a:defRPr sz="1100" b="0">
+                <a:solidFill>
+                  <a:srgbClr val="6E6E68"/>
+                </a:solidFill>
+                <a:latin typeface="Calibri"/>
+              </a:defRPr>
+            </a:pPr>
+            <a:r>
+              <a:t>Урок 03</a:t>
+            </a:r>
+          </a:p>
+        </p:txBody>
+      </p:sp>
+      <p:sp>
+        <p:nvSpPr>
+          <p:cNvPr id="9" name="Rounded Rectangle 8"/>
+          <p:cNvSpPr/>
+          <p:nvPr/>
+        </p:nvSpPr>
+        <p:spPr>
+          <a:xfrm>
+            <a:off x="502920" y="2606040"/>
+            <a:ext cx="1874519" cy="3017520"/>
+          </a:xfrm>
+          <a:prstGeom prst="roundRect">
+            <a:avLst>
+              <a:gd name="adj" fmla="val 8000"/>
+            </a:avLst>
+          </a:prstGeom>
+          <a:solidFill>
+            <a:srgbClr val="FFFFFF"/>
+          </a:solidFill>
+          <a:ln>
+            <a:solidFill>
+              <a:srgbClr val="D8D7D0"/>
+            </a:solidFill>
+          </a:ln>
+        </p:spPr>
+        <p:style>
+          <a:lnRef idx="1">
+            <a:schemeClr val="accent1"/>
+          </a:lnRef>
+          <a:fillRef idx="3">
+            <a:schemeClr val="accent1"/>
+          </a:fillRef>
+          <a:effectRef idx="2">
+            <a:schemeClr val="accent1"/>
+          </a:effectRef>
+          <a:fontRef idx="minor">
+            <a:schemeClr val="lt1"/>
+          </a:fontRef>
+        </p:style>
+        <p:txBody>
+          <a:bodyPr rtlCol="0" anchor="ctr"/>
+          <a:lstStyle/>
+          <a:p>
+            <a:pPr algn="ctr"/>
+          </a:p>
+        </p:txBody>
+      </p:sp>
+      <p:sp>
+        <p:nvSpPr>
+          <p:cNvPr id="10" name="Rectangle 9"/>
+          <p:cNvSpPr/>
+          <p:nvPr/>
+        </p:nvSpPr>
+        <p:spPr>
+          <a:xfrm>
+            <a:off x="685800" y="2788920"/>
+            <a:ext cx="411480" cy="45720"/>
+          </a:xfrm>
+          <a:prstGeom prst="rect">
+            <a:avLst/>
+          </a:prstGeom>
+          <a:solidFill>
+            <a:srgbClr val="10A37F"/>
+          </a:solidFill>
+          <a:ln>
+            <a:noFill/>
+          </a:ln>
+        </p:spPr>
+        <p:style>
+          <a:lnRef idx="1">
+            <a:schemeClr val="accent1"/>
+          </a:lnRef>
+          <a:fillRef idx="3">
+            <a:schemeClr val="accent1"/>
+          </a:fillRef>
+          <a:effectRef idx="2">
+            <a:schemeClr val="accent1"/>
+          </a:effectRef>
+          <a:fontRef idx="minor">
+            <a:schemeClr val="lt1"/>
+          </a:fontRef>
+        </p:style>
+        <p:txBody>
+          <a:bodyPr rtlCol="0" anchor="ctr"/>
+          <a:lstStyle/>
+          <a:p>
+            <a:pPr algn="ctr"/>
+          </a:p>
+        </p:txBody>
+      </p:sp>
+      <p:sp>
+        <p:nvSpPr>
+          <p:cNvPr id="11" name="TextBox 10"/>
+          <p:cNvSpPr txBox="1"/>
+          <p:nvPr/>
+        </p:nvSpPr>
+        <p:spPr>
+          <a:xfrm>
+            <a:off x="704088" y="2926080"/>
+            <a:ext cx="1508759" cy="411480"/>
+          </a:xfrm>
+          <a:prstGeom prst="rect">
+            <a:avLst/>
+          </a:prstGeom>
+          <a:noFill/>
+        </p:spPr>
+        <p:txBody>
+          <a:bodyPr wrap="square">
+            <a:spAutoFit/>
+          </a:bodyPr>
+          <a:lstStyle/>
+          <a:p>
+            <a:pPr algn="l">
+              <a:defRPr sz="1800" b="1">
+                <a:solidFill>
+                  <a:srgbClr val="202123"/>
+                </a:solidFill>
+                <a:latin typeface="Calibri"/>
+              </a:defRPr>
+            </a:pPr>
+            <a:r>
+              <a:t>Glossary</a:t>
+            </a:r>
+          </a:p>
+        </p:txBody>
+      </p:sp>
+      <p:sp>
+        <p:nvSpPr>
+          <p:cNvPr id="12" name="TextBox 11"/>
+          <p:cNvSpPr txBox="1"/>
+          <p:nvPr/>
+        </p:nvSpPr>
+        <p:spPr>
+          <a:xfrm>
+            <a:off x="704088" y="3383280"/>
+            <a:ext cx="1508759" cy="2057400"/>
+          </a:xfrm>
+          <a:prstGeom prst="rect">
+            <a:avLst/>
+          </a:prstGeom>
+          <a:noFill/>
+        </p:spPr>
+        <p:txBody>
+          <a:bodyPr wrap="square">
+            <a:spAutoFit/>
+          </a:bodyPr>
+          <a:lstStyle/>
+          <a:p>
+            <a:pPr algn="l">
+              <a:defRPr sz="1300" b="0">
+                <a:solidFill>
+                  <a:srgbClr val="6E6E68"/>
+                </a:solidFill>
+                <a:latin typeface="Calibri"/>
+              </a:defRPr>
+            </a:pPr>
+            <a:r>
+              <a:t>GUC/QD/QE</a:t>
+            </a:r>
+          </a:p>
+        </p:txBody>
+      </p:sp>
+      <p:sp>
+        <p:nvSpPr>
+          <p:cNvPr id="13" name="Rectangle 12"/>
+          <p:cNvSpPr/>
+          <p:nvPr/>
+        </p:nvSpPr>
+        <p:spPr>
+          <a:xfrm>
+            <a:off x="2423159" y="3977640"/>
+            <a:ext cx="137160" cy="36576"/>
+          </a:xfrm>
+          <a:prstGeom prst="rect">
+            <a:avLst/>
+          </a:prstGeom>
+          <a:solidFill>
+            <a:srgbClr val="D8D7D0"/>
+          </a:solidFill>
+          <a:ln>
+            <a:noFill/>
+          </a:ln>
+        </p:spPr>
+        <p:style>
+          <a:lnRef idx="1">
+            <a:schemeClr val="accent1"/>
+          </a:lnRef>
+          <a:fillRef idx="3">
+            <a:schemeClr val="accent1"/>
+          </a:fillRef>
+          <a:effectRef idx="2">
+            <a:schemeClr val="accent1"/>
+          </a:effectRef>
+          <a:fontRef idx="minor">
+            <a:schemeClr val="lt1"/>
+          </a:fontRef>
+        </p:style>
+        <p:txBody>
+          <a:bodyPr rtlCol="0" anchor="ctr"/>
+          <a:lstStyle/>
+          <a:p>
+            <a:pPr algn="ctr"/>
+          </a:p>
+        </p:txBody>
+      </p:sp>
+      <p:sp>
+        <p:nvSpPr>
+          <p:cNvPr id="14" name="Rounded Rectangle 13"/>
+          <p:cNvSpPr/>
+          <p:nvPr/>
+        </p:nvSpPr>
+        <p:spPr>
+          <a:xfrm>
+            <a:off x="2606039" y="2606040"/>
+            <a:ext cx="1874519" cy="3017520"/>
+          </a:xfrm>
+          <a:prstGeom prst="roundRect">
+            <a:avLst>
+              <a:gd name="adj" fmla="val 8000"/>
+            </a:avLst>
+          </a:prstGeom>
+          <a:solidFill>
+            <a:srgbClr val="FFFFFF"/>
+          </a:solidFill>
+          <a:ln>
+            <a:solidFill>
+              <a:srgbClr val="D8D7D0"/>
+            </a:solidFill>
+          </a:ln>
+        </p:spPr>
+        <p:style>
+          <a:lnRef idx="1">
+            <a:schemeClr val="accent1"/>
+          </a:lnRef>
+          <a:fillRef idx="3">
+            <a:schemeClr val="accent1"/>
+          </a:fillRef>
+          <a:effectRef idx="2">
+            <a:schemeClr val="accent1"/>
+          </a:effectRef>
+          <a:fontRef idx="minor">
+            <a:schemeClr val="lt1"/>
+          </a:fontRef>
+        </p:style>
+        <p:txBody>
+          <a:bodyPr rtlCol="0" anchor="ctr"/>
+          <a:lstStyle/>
+          <a:p>
+            <a:pPr algn="ctr"/>
+          </a:p>
+        </p:txBody>
+      </p:sp>
+      <p:sp>
+        <p:nvSpPr>
+          <p:cNvPr id="15" name="Rectangle 14"/>
+          <p:cNvSpPr/>
+          <p:nvPr/>
+        </p:nvSpPr>
+        <p:spPr>
+          <a:xfrm>
+            <a:off x="2788919" y="2788920"/>
+            <a:ext cx="411480" cy="45720"/>
+          </a:xfrm>
+          <a:prstGeom prst="rect">
+            <a:avLst/>
+          </a:prstGeom>
+          <a:solidFill>
+            <a:srgbClr val="2F6FED"/>
+          </a:solidFill>
+          <a:ln>
+            <a:noFill/>
+          </a:ln>
+        </p:spPr>
+        <p:style>
+          <a:lnRef idx="1">
+            <a:schemeClr val="accent1"/>
+          </a:lnRef>
+          <a:fillRef idx="3">
+            <a:schemeClr val="accent1"/>
+          </a:fillRef>
+          <a:effectRef idx="2">
+            <a:schemeClr val="accent1"/>
+          </a:effectRef>
+          <a:fontRef idx="minor">
+            <a:schemeClr val="lt1"/>
+          </a:fontRef>
+        </p:style>
+        <p:txBody>
+          <a:bodyPr rtlCol="0" anchor="ctr"/>
+          <a:lstStyle/>
+          <a:p>
+            <a:pPr algn="ctr"/>
+          </a:p>
+        </p:txBody>
+      </p:sp>
+      <p:sp>
+        <p:nvSpPr>
+          <p:cNvPr id="16" name="TextBox 15"/>
+          <p:cNvSpPr txBox="1"/>
+          <p:nvPr/>
+        </p:nvSpPr>
+        <p:spPr>
+          <a:xfrm>
+            <a:off x="2807207" y="2926080"/>
+            <a:ext cx="1508759" cy="411480"/>
+          </a:xfrm>
+          <a:prstGeom prst="rect">
+            <a:avLst/>
+          </a:prstGeom>
+          <a:noFill/>
+        </p:spPr>
+        <p:txBody>
+          <a:bodyPr wrap="square">
+            <a:spAutoFit/>
+          </a:bodyPr>
+          <a:lstStyle/>
+          <a:p>
+            <a:pPr algn="l">
+              <a:defRPr sz="1800" b="1">
+                <a:solidFill>
+                  <a:srgbClr val="202123"/>
+                </a:solidFill>
+                <a:latin typeface="Calibri"/>
+              </a:defRPr>
+            </a:pPr>
+            <a:r>
+              <a:t>ORCA</a:t>
+            </a:r>
+          </a:p>
+        </p:txBody>
+      </p:sp>
+      <p:sp>
+        <p:nvSpPr>
+          <p:cNvPr id="17" name="TextBox 16"/>
+          <p:cNvSpPr txBox="1"/>
+          <p:nvPr/>
+        </p:nvSpPr>
+        <p:spPr>
+          <a:xfrm>
+            <a:off x="2807207" y="3383280"/>
+            <a:ext cx="1508759" cy="2057400"/>
+          </a:xfrm>
+          <a:prstGeom prst="rect">
+            <a:avLst/>
+          </a:prstGeom>
+          <a:noFill/>
+        </p:spPr>
+        <p:txBody>
+          <a:bodyPr wrap="square">
+            <a:spAutoFit/>
+          </a:bodyPr>
+          <a:lstStyle/>
+          <a:p>
+            <a:pPr algn="l">
+              <a:defRPr sz="1300" b="0">
+                <a:solidFill>
+                  <a:srgbClr val="6E6E68"/>
+                </a:solidFill>
+                <a:latin typeface="Calibri"/>
+              </a:defRPr>
+            </a:pPr>
+            <a:r>
+              <a:t>on vs off</a:t>
+            </a:r>
+          </a:p>
+        </p:txBody>
+      </p:sp>
+      <p:sp>
+        <p:nvSpPr>
+          <p:cNvPr id="18" name="Rectangle 17"/>
+          <p:cNvSpPr/>
+          <p:nvPr/>
+        </p:nvSpPr>
+        <p:spPr>
+          <a:xfrm>
+            <a:off x="4526278" y="3977640"/>
+            <a:ext cx="137160" cy="36576"/>
+          </a:xfrm>
+          <a:prstGeom prst="rect">
+            <a:avLst/>
+          </a:prstGeom>
+          <a:solidFill>
+            <a:srgbClr val="D8D7D0"/>
+          </a:solidFill>
+          <a:ln>
+            <a:noFill/>
+          </a:ln>
+        </p:spPr>
+        <p:style>
+          <a:lnRef idx="1">
+            <a:schemeClr val="accent1"/>
+          </a:lnRef>
+          <a:fillRef idx="3">
+            <a:schemeClr val="accent1"/>
+          </a:fillRef>
+          <a:effectRef idx="2">
+            <a:schemeClr val="accent1"/>
+          </a:effectRef>
+          <a:fontRef idx="minor">
+            <a:schemeClr val="lt1"/>
+          </a:fontRef>
+        </p:style>
+        <p:txBody>
+          <a:bodyPr rtlCol="0" anchor="ctr"/>
+          <a:lstStyle/>
+          <a:p>
+            <a:pPr algn="ctr"/>
+          </a:p>
+        </p:txBody>
+      </p:sp>
+      <p:sp>
+        <p:nvSpPr>
+          <p:cNvPr id="19" name="Rounded Rectangle 18"/>
+          <p:cNvSpPr/>
+          <p:nvPr/>
+        </p:nvSpPr>
+        <p:spPr>
+          <a:xfrm>
+            <a:off x="4709158" y="2606040"/>
+            <a:ext cx="1874519" cy="3017520"/>
+          </a:xfrm>
+          <a:prstGeom prst="roundRect">
+            <a:avLst>
+              <a:gd name="adj" fmla="val 8000"/>
+            </a:avLst>
+          </a:prstGeom>
+          <a:solidFill>
+            <a:srgbClr val="FFFFFF"/>
+          </a:solidFill>
+          <a:ln>
+            <a:solidFill>
+              <a:srgbClr val="D8D7D0"/>
+            </a:solidFill>
+          </a:ln>
+        </p:spPr>
+        <p:style>
+          <a:lnRef idx="1">
+            <a:schemeClr val="accent1"/>
+          </a:lnRef>
+          <a:fillRef idx="3">
+            <a:schemeClr val="accent1"/>
+          </a:fillRef>
+          <a:effectRef idx="2">
+            <a:schemeClr val="accent1"/>
+          </a:effectRef>
+          <a:fontRef idx="minor">
+            <a:schemeClr val="lt1"/>
+          </a:fontRef>
+        </p:style>
+        <p:txBody>
+          <a:bodyPr rtlCol="0" anchor="ctr"/>
+          <a:lstStyle/>
+          <a:p>
+            <a:pPr algn="ctr"/>
+          </a:p>
+        </p:txBody>
+      </p:sp>
+      <p:sp>
+        <p:nvSpPr>
+          <p:cNvPr id="20" name="Rectangle 19"/>
+          <p:cNvSpPr/>
+          <p:nvPr/>
+        </p:nvSpPr>
+        <p:spPr>
+          <a:xfrm>
+            <a:off x="4892038" y="2788920"/>
+            <a:ext cx="411480" cy="45720"/>
+          </a:xfrm>
+          <a:prstGeom prst="rect">
+            <a:avLst/>
+          </a:prstGeom>
+          <a:solidFill>
+            <a:srgbClr val="B7791F"/>
+          </a:solidFill>
+          <a:ln>
+            <a:noFill/>
+          </a:ln>
+        </p:spPr>
+        <p:style>
+          <a:lnRef idx="1">
+            <a:schemeClr val="accent1"/>
+          </a:lnRef>
+          <a:fillRef idx="3">
+            <a:schemeClr val="accent1"/>
+          </a:fillRef>
+          <a:effectRef idx="2">
+            <a:schemeClr val="accent1"/>
+          </a:effectRef>
+          <a:fontRef idx="minor">
+            <a:schemeClr val="lt1"/>
+          </a:fontRef>
+        </p:style>
+        <p:txBody>
+          <a:bodyPr rtlCol="0" anchor="ctr"/>
+          <a:lstStyle/>
+          <a:p>
+            <a:pPr algn="ctr"/>
+          </a:p>
+        </p:txBody>
+      </p:sp>
+      <p:sp>
+        <p:nvSpPr>
+          <p:cNvPr id="21" name="TextBox 20"/>
+          <p:cNvSpPr txBox="1"/>
+          <p:nvPr/>
+        </p:nvSpPr>
+        <p:spPr>
+          <a:xfrm>
+            <a:off x="4910326" y="2926080"/>
+            <a:ext cx="1508759" cy="411480"/>
+          </a:xfrm>
+          <a:prstGeom prst="rect">
+            <a:avLst/>
+          </a:prstGeom>
+          <a:noFill/>
+        </p:spPr>
+        <p:txBody>
+          <a:bodyPr wrap="square">
+            <a:spAutoFit/>
+          </a:bodyPr>
+          <a:lstStyle/>
+          <a:p>
+            <a:pPr algn="l">
+              <a:defRPr sz="1800" b="1">
+                <a:solidFill>
+                  <a:srgbClr val="202123"/>
+                </a:solidFill>
+                <a:latin typeface="Calibri"/>
+              </a:defRPr>
+            </a:pPr>
+            <a:r>
+              <a:t>Trees</a:t>
+            </a:r>
+          </a:p>
+        </p:txBody>
+      </p:sp>
+      <p:sp>
+        <p:nvSpPr>
+          <p:cNvPr id="22" name="TextBox 21"/>
+          <p:cNvSpPr txBox="1"/>
+          <p:nvPr/>
+        </p:nvSpPr>
+        <p:spPr>
+          <a:xfrm>
+            <a:off x="4910326" y="3383280"/>
+            <a:ext cx="1508759" cy="2057400"/>
+          </a:xfrm>
+          <a:prstGeom prst="rect">
+            <a:avLst/>
+          </a:prstGeom>
+          <a:noFill/>
+        </p:spPr>
+        <p:txBody>
+          <a:bodyPr wrap="square">
+            <a:spAutoFit/>
+          </a:bodyPr>
+          <a:lstStyle/>
+          <a:p>
+            <a:pPr algn="l">
+              <a:defRPr sz="1300" b="0">
+                <a:solidFill>
+                  <a:srgbClr val="6E6E68"/>
+                </a:solidFill>
+                <a:latin typeface="Calibri"/>
+              </a:defRPr>
+            </a:pPr>
+            <a:r>
+              <a:t>скрины</a:t>
+            </a:r>
+          </a:p>
+        </p:txBody>
+      </p:sp>
+      <p:sp>
+        <p:nvSpPr>
+          <p:cNvPr id="23" name="Rectangle 22"/>
+          <p:cNvSpPr/>
+          <p:nvPr/>
+        </p:nvSpPr>
+        <p:spPr>
+          <a:xfrm>
+            <a:off x="6629397" y="3977640"/>
+            <a:ext cx="137160" cy="36576"/>
+          </a:xfrm>
+          <a:prstGeom prst="rect">
+            <a:avLst/>
+          </a:prstGeom>
+          <a:solidFill>
+            <a:srgbClr val="D8D7D0"/>
+          </a:solidFill>
+          <a:ln>
+            <a:noFill/>
+          </a:ln>
+        </p:spPr>
+        <p:style>
+          <a:lnRef idx="1">
+            <a:schemeClr val="accent1"/>
+          </a:lnRef>
+          <a:fillRef idx="3">
+            <a:schemeClr val="accent1"/>
+          </a:fillRef>
+          <a:effectRef idx="2">
+            <a:schemeClr val="accent1"/>
+          </a:effectRef>
+          <a:fontRef idx="minor">
+            <a:schemeClr val="lt1"/>
+          </a:fontRef>
+        </p:style>
+        <p:txBody>
+          <a:bodyPr rtlCol="0" anchor="ctr"/>
+          <a:lstStyle/>
+          <a:p>
+            <a:pPr algn="ctr"/>
+          </a:p>
+        </p:txBody>
+      </p:sp>
+      <p:sp>
+        <p:nvSpPr>
+          <p:cNvPr id="24" name="Rounded Rectangle 23"/>
+          <p:cNvSpPr/>
+          <p:nvPr/>
+        </p:nvSpPr>
+        <p:spPr>
+          <a:xfrm>
+            <a:off x="6812277" y="2606040"/>
+            <a:ext cx="1874519" cy="3017520"/>
+          </a:xfrm>
+          <a:prstGeom prst="roundRect">
+            <a:avLst>
+              <a:gd name="adj" fmla="val 8000"/>
+            </a:avLst>
+          </a:prstGeom>
+          <a:solidFill>
+            <a:srgbClr val="FFFFFF"/>
+          </a:solidFill>
+          <a:ln>
+            <a:solidFill>
+              <a:srgbClr val="D8D7D0"/>
+            </a:solidFill>
+          </a:ln>
+        </p:spPr>
+        <p:style>
+          <a:lnRef idx="1">
+            <a:schemeClr val="accent1"/>
+          </a:lnRef>
+          <a:fillRef idx="3">
+            <a:schemeClr val="accent1"/>
+          </a:fillRef>
+          <a:effectRef idx="2">
+            <a:schemeClr val="accent1"/>
+          </a:effectRef>
+          <a:fontRef idx="minor">
+            <a:schemeClr val="lt1"/>
+          </a:fontRef>
+        </p:style>
+        <p:txBody>
+          <a:bodyPr rtlCol="0" anchor="ctr"/>
+          <a:lstStyle/>
+          <a:p>
+            <a:pPr algn="ctr"/>
+          </a:p>
+        </p:txBody>
+      </p:sp>
+      <p:sp>
+        <p:nvSpPr>
+          <p:cNvPr id="25" name="Rectangle 24"/>
+          <p:cNvSpPr/>
+          <p:nvPr/>
+        </p:nvSpPr>
+        <p:spPr>
+          <a:xfrm>
+            <a:off x="6995157" y="2788920"/>
+            <a:ext cx="411480" cy="45720"/>
+          </a:xfrm>
+          <a:prstGeom prst="rect">
+            <a:avLst/>
+          </a:prstGeom>
+          <a:solidFill>
+            <a:srgbClr val="10A37F"/>
+          </a:solidFill>
+          <a:ln>
+            <a:noFill/>
+          </a:ln>
+        </p:spPr>
+        <p:style>
+          <a:lnRef idx="1">
+            <a:schemeClr val="accent1"/>
+          </a:lnRef>
+          <a:fillRef idx="3">
+            <a:schemeClr val="accent1"/>
+          </a:fillRef>
+          <a:effectRef idx="2">
+            <a:schemeClr val="accent1"/>
+          </a:effectRef>
+          <a:fontRef idx="minor">
+            <a:schemeClr val="lt1"/>
+          </a:fontRef>
+        </p:style>
+        <p:txBody>
+          <a:bodyPr rtlCol="0" anchor="ctr"/>
+          <a:lstStyle/>
+          <a:p>
+            <a:pPr algn="ctr"/>
+          </a:p>
+        </p:txBody>
+      </p:sp>
+      <p:sp>
+        <p:nvSpPr>
+          <p:cNvPr id="26" name="TextBox 25"/>
+          <p:cNvSpPr txBox="1"/>
+          <p:nvPr/>
+        </p:nvSpPr>
+        <p:spPr>
+          <a:xfrm>
+            <a:off x="7013445" y="2926080"/>
+            <a:ext cx="1508759" cy="411480"/>
+          </a:xfrm>
+          <a:prstGeom prst="rect">
+            <a:avLst/>
+          </a:prstGeom>
+          <a:noFill/>
+        </p:spPr>
+        <p:txBody>
+          <a:bodyPr wrap="square">
+            <a:spAutoFit/>
+          </a:bodyPr>
+          <a:lstStyle/>
+          <a:p>
+            <a:pPr algn="l">
+              <a:defRPr sz="1800" b="1">
+                <a:solidFill>
+                  <a:srgbClr val="202123"/>
+                </a:solidFill>
+                <a:latin typeface="Calibri"/>
+              </a:defRPr>
+            </a:pPr>
+            <a:r>
+              <a:t>TEMP</a:t>
+            </a:r>
+          </a:p>
+        </p:txBody>
+      </p:sp>
+      <p:sp>
+        <p:nvSpPr>
+          <p:cNvPr id="27" name="TextBox 26"/>
+          <p:cNvSpPr txBox="1"/>
+          <p:nvPr/>
+        </p:nvSpPr>
+        <p:spPr>
+          <a:xfrm>
+            <a:off x="7013445" y="3383280"/>
+            <a:ext cx="1508759" cy="2057400"/>
+          </a:xfrm>
+          <a:prstGeom prst="rect">
+            <a:avLst/>
+          </a:prstGeom>
+          <a:noFill/>
+        </p:spPr>
+        <p:txBody>
+          <a:bodyPr wrap="square">
+            <a:spAutoFit/>
+          </a:bodyPr>
+          <a:lstStyle/>
+          <a:p>
+            <a:pPr algn="l">
+              <a:defRPr sz="1300" b="0">
+                <a:solidFill>
+                  <a:srgbClr val="6E6E68"/>
+                </a:solidFill>
+                <a:latin typeface="Calibri"/>
+              </a:defRPr>
+            </a:pPr>
+            <a:r>
+              <a:t>rewrite</a:t>
+            </a:r>
+          </a:p>
+        </p:txBody>
+      </p:sp>
+      <p:sp>
+        <p:nvSpPr>
+          <p:cNvPr id="28" name="Rectangle 27"/>
+          <p:cNvSpPr/>
+          <p:nvPr/>
+        </p:nvSpPr>
+        <p:spPr>
+          <a:xfrm>
+            <a:off x="8732516" y="3977640"/>
+            <a:ext cx="137160" cy="36576"/>
+          </a:xfrm>
+          <a:prstGeom prst="rect">
+            <a:avLst/>
+          </a:prstGeom>
+          <a:solidFill>
+            <a:srgbClr val="D8D7D0"/>
+          </a:solidFill>
+          <a:ln>
+            <a:noFill/>
+          </a:ln>
+        </p:spPr>
+        <p:style>
+          <a:lnRef idx="1">
+            <a:schemeClr val="accent1"/>
+          </a:lnRef>
+          <a:fillRef idx="3">
+            <a:schemeClr val="accent1"/>
+          </a:fillRef>
+          <a:effectRef idx="2">
+            <a:schemeClr val="accent1"/>
+          </a:effectRef>
+          <a:fontRef idx="minor">
+            <a:schemeClr val="lt1"/>
+          </a:fontRef>
+        </p:style>
+        <p:txBody>
+          <a:bodyPr rtlCol="0" anchor="ctr"/>
+          <a:lstStyle/>
+          <a:p>
+            <a:pPr algn="ctr"/>
+          </a:p>
+        </p:txBody>
+      </p:sp>
+      <p:sp>
+        <p:nvSpPr>
+          <p:cNvPr id="29" name="Rounded Rectangle 28"/>
+          <p:cNvSpPr/>
+          <p:nvPr/>
+        </p:nvSpPr>
+        <p:spPr>
+          <a:xfrm>
+            <a:off x="8915396" y="2606040"/>
+            <a:ext cx="1874519" cy="3017520"/>
+          </a:xfrm>
+          <a:prstGeom prst="roundRect">
+            <a:avLst>
+              <a:gd name="adj" fmla="val 8000"/>
+            </a:avLst>
+          </a:prstGeom>
+          <a:solidFill>
+            <a:srgbClr val="FFFFFF"/>
+          </a:solidFill>
+          <a:ln>
+            <a:solidFill>
+              <a:srgbClr val="D8D7D0"/>
+            </a:solidFill>
+          </a:ln>
+        </p:spPr>
+        <p:style>
+          <a:lnRef idx="1">
+            <a:schemeClr val="accent1"/>
+          </a:lnRef>
+          <a:fillRef idx="3">
+            <a:schemeClr val="accent1"/>
+          </a:fillRef>
+          <a:effectRef idx="2">
+            <a:schemeClr val="accent1"/>
+          </a:effectRef>
+          <a:fontRef idx="minor">
+            <a:schemeClr val="lt1"/>
+          </a:fontRef>
+        </p:style>
+        <p:txBody>
+          <a:bodyPr rtlCol="0" anchor="ctr"/>
+          <a:lstStyle/>
+          <a:p>
+            <a:pPr algn="ctr"/>
+          </a:p>
+        </p:txBody>
+      </p:sp>
+      <p:sp>
+        <p:nvSpPr>
+          <p:cNvPr id="30" name="Rectangle 29"/>
+          <p:cNvSpPr/>
+          <p:nvPr/>
+        </p:nvSpPr>
+        <p:spPr>
+          <a:xfrm>
+            <a:off x="9098276" y="2788920"/>
+            <a:ext cx="411480" cy="45720"/>
+          </a:xfrm>
+          <a:prstGeom prst="rect">
+            <a:avLst/>
+          </a:prstGeom>
+          <a:solidFill>
+            <a:srgbClr val="2F6FED"/>
+          </a:solidFill>
+          <a:ln>
+            <a:noFill/>
+          </a:ln>
+        </p:spPr>
+        <p:style>
+          <a:lnRef idx="1">
+            <a:schemeClr val="accent1"/>
+          </a:lnRef>
+          <a:fillRef idx="3">
+            <a:schemeClr val="accent1"/>
+          </a:fillRef>
+          <a:effectRef idx="2">
+            <a:schemeClr val="accent1"/>
+          </a:effectRef>
+          <a:fontRef idx="minor">
+            <a:schemeClr val="lt1"/>
+          </a:fontRef>
+        </p:style>
+        <p:txBody>
+          <a:bodyPr rtlCol="0" anchor="ctr"/>
+          <a:lstStyle/>
+          <a:p>
+            <a:pPr algn="ctr"/>
+          </a:p>
+        </p:txBody>
+      </p:sp>
+      <p:sp>
+        <p:nvSpPr>
+          <p:cNvPr id="31" name="TextBox 30"/>
+          <p:cNvSpPr txBox="1"/>
+          <p:nvPr/>
+        </p:nvSpPr>
+        <p:spPr>
+          <a:xfrm>
+            <a:off x="9116564" y="2926080"/>
+            <a:ext cx="1508759" cy="411480"/>
+          </a:xfrm>
+          <a:prstGeom prst="rect">
+            <a:avLst/>
+          </a:prstGeom>
+          <a:noFill/>
+        </p:spPr>
+        <p:txBody>
+          <a:bodyPr wrap="square">
+            <a:spAutoFit/>
+          </a:bodyPr>
+          <a:lstStyle/>
+          <a:p>
+            <a:pPr algn="l">
+              <a:defRPr sz="1800" b="1">
+                <a:solidFill>
+                  <a:srgbClr val="202123"/>
+                </a:solidFill>
+                <a:latin typeface="Calibri"/>
+              </a:defRPr>
+            </a:pPr>
+            <a:r>
+              <a:t>Proof</a:t>
+            </a:r>
+          </a:p>
+        </p:txBody>
+      </p:sp>
+      <p:sp>
+        <p:nvSpPr>
+          <p:cNvPr id="32" name="TextBox 31"/>
+          <p:cNvSpPr txBox="1"/>
+          <p:nvPr/>
+        </p:nvSpPr>
+        <p:spPr>
+          <a:xfrm>
+            <a:off x="9116564" y="3383280"/>
+            <a:ext cx="1508759" cy="2057400"/>
+          </a:xfrm>
+          <a:prstGeom prst="rect">
+            <a:avLst/>
+          </a:prstGeom>
+          <a:noFill/>
+        </p:spPr>
+        <p:txBody>
+          <a:bodyPr wrap="square">
+            <a:spAutoFit/>
+          </a:bodyPr>
+          <a:lstStyle/>
+          <a:p>
+            <a:pPr algn="l">
+              <a:defRPr sz="1300" b="0">
+                <a:solidFill>
+                  <a:srgbClr val="6E6E68"/>
+                </a:solidFill>
+                <a:latin typeface="Calibri"/>
+              </a:defRPr>
+            </a:pPr>
+            <a:r>
+              <a:t>evidence</a:t>
+            </a:r>
+          </a:p>
+        </p:txBody>
+      </p:sp>
+    </p:spTree>
+  </p:cSld>
+  <p:clrMapOvr>
+    <a:masterClrMapping/>
+  </p:clrMapOvr>
+</p:sld>
+</file>
+
+<file path=ppt/slides/slide51.xml><?xml version="1.0" encoding="utf-8"?>
+<p:sld xmlns:a="http://schemas.openxmlformats.org/drawingml/2006/main" xmlns:p="http://schemas.openxmlformats.org/presentationml/2006/main" xmlns:r="http://schemas.openxmlformats.org/officeDocument/2006/relationships">
+  <p:cSld>
+    <p:spTree>
+      <p:nvGrpSpPr>
+        <p:cNvPr id="1" name=""/>
+        <p:cNvGrpSpPr/>
+        <p:nvPr/>
+      </p:nvGrpSpPr>
+      <p:grpSpPr/>
+      <p:sp>
+        <p:nvSpPr>
+          <p:cNvPr id="2" name="Rectangle 1"/>
+          <p:cNvSpPr/>
+          <p:nvPr/>
+        </p:nvSpPr>
+        <p:spPr>
+          <a:xfrm>
+            <a:off x="0" y="0"/>
+            <a:ext cx="12192000" cy="6858000"/>
+          </a:xfrm>
+          <a:prstGeom prst="rect">
+            <a:avLst/>
+          </a:prstGeom>
+          <a:solidFill>
+            <a:srgbClr val="F7F7F4"/>
+          </a:solidFill>
+          <a:ln>
+            <a:noFill/>
+          </a:ln>
+        </p:spPr>
+        <p:style>
+          <a:lnRef idx="1">
+            <a:schemeClr val="accent1"/>
+          </a:lnRef>
+          <a:fillRef idx="3">
+            <a:schemeClr val="accent1"/>
+          </a:fillRef>
+          <a:effectRef idx="2">
+            <a:schemeClr val="accent1"/>
+          </a:effectRef>
+          <a:fontRef idx="minor">
+            <a:schemeClr val="lt1"/>
+          </a:fontRef>
+        </p:style>
+        <p:txBody>
+          <a:bodyPr rtlCol="0" anchor="ctr"/>
+          <a:lstStyle/>
+          <a:p>
+            <a:pPr algn="ctr"/>
+          </a:p>
+        </p:txBody>
+      </p:sp>
+      <p:sp>
+        <p:nvSpPr>
+          <p:cNvPr id="3" name="Rectangle 2"/>
+          <p:cNvSpPr/>
+          <p:nvPr/>
+        </p:nvSpPr>
+        <p:spPr>
+          <a:xfrm>
+            <a:off x="0" y="0"/>
+            <a:ext cx="12192000" cy="18288"/>
+          </a:xfrm>
+          <a:prstGeom prst="rect">
+            <a:avLst/>
+          </a:prstGeom>
+          <a:solidFill>
+            <a:srgbClr val="D8D7D0"/>
+          </a:solidFill>
+          <a:ln>
+            <a:noFill/>
+          </a:ln>
+        </p:spPr>
+        <p:style>
+          <a:lnRef idx="1">
+            <a:schemeClr val="accent1"/>
+          </a:lnRef>
+          <a:fillRef idx="3">
+            <a:schemeClr val="accent1"/>
+          </a:fillRef>
+          <a:effectRef idx="2">
+            <a:schemeClr val="accent1"/>
+          </a:effectRef>
+          <a:fontRef idx="minor">
+            <a:schemeClr val="lt1"/>
+          </a:fontRef>
+        </p:style>
+        <p:txBody>
+          <a:bodyPr rtlCol="0" anchor="ctr"/>
+          <a:lstStyle/>
+          <a:p>
+            <a:pPr algn="ctr"/>
+          </a:p>
+        </p:txBody>
+      </p:sp>
+      <p:sp>
+        <p:nvSpPr>
+          <p:cNvPr id="4" name="Rectangle 3"/>
+          <p:cNvSpPr/>
+          <p:nvPr/>
+        </p:nvSpPr>
+        <p:spPr>
+          <a:xfrm>
+            <a:off x="0" y="6839712"/>
+            <a:ext cx="12192000" cy="18288"/>
+          </a:xfrm>
+          <a:prstGeom prst="rect">
+            <a:avLst/>
+          </a:prstGeom>
+          <a:solidFill>
+            <a:srgbClr val="D8D7D0"/>
+          </a:solidFill>
+          <a:ln>
+            <a:noFill/>
+          </a:ln>
+        </p:spPr>
+        <p:style>
+          <a:lnRef idx="1">
+            <a:schemeClr val="accent1"/>
+          </a:lnRef>
+          <a:fillRef idx="3">
+            <a:schemeClr val="accent1"/>
+          </a:fillRef>
+          <a:effectRef idx="2">
+            <a:schemeClr val="accent1"/>
+          </a:effectRef>
+          <a:fontRef idx="minor">
+            <a:schemeClr val="lt1"/>
+          </a:fontRef>
+        </p:style>
+        <p:txBody>
+          <a:bodyPr rtlCol="0" anchor="ctr"/>
+          <a:lstStyle/>
+          <a:p>
+            <a:pPr algn="ctr"/>
+          </a:p>
+        </p:txBody>
+      </p:sp>
+      <p:sp>
+        <p:nvSpPr>
+          <p:cNvPr id="5" name="TextBox 4"/>
+          <p:cNvSpPr txBox="1"/>
+          <p:nvPr/>
+        </p:nvSpPr>
+        <p:spPr>
+          <a:xfrm>
+            <a:off x="502920" y="320040"/>
+            <a:ext cx="4114800" cy="274320"/>
+          </a:xfrm>
+          <a:prstGeom prst="rect">
+            <a:avLst/>
+          </a:prstGeom>
+          <a:noFill/>
+        </p:spPr>
+        <p:txBody>
+          <a:bodyPr wrap="square">
+            <a:spAutoFit/>
+          </a:bodyPr>
+          <a:lstStyle/>
+          <a:p>
+            <a:pPr algn="l">
+              <a:defRPr sz="1300" b="1">
+                <a:solidFill>
+                  <a:srgbClr val="10A37F"/>
+                </a:solidFill>
+                <a:latin typeface="Calibri"/>
+              </a:defRPr>
+            </a:pPr>
+            <a:r>
+              <a:t>DEEP ROUTE</a:t>
+            </a:r>
+          </a:p>
+        </p:txBody>
+      </p:sp>
+      <p:sp>
+        <p:nvSpPr>
+          <p:cNvPr id="6" name="TextBox 5"/>
+          <p:cNvSpPr txBox="1"/>
+          <p:nvPr/>
+        </p:nvSpPr>
+        <p:spPr>
+          <a:xfrm>
+            <a:off x="502920" y="640080"/>
+            <a:ext cx="10515600" cy="1005840"/>
+          </a:xfrm>
+          <a:prstGeom prst="rect">
+            <a:avLst/>
+          </a:prstGeom>
+          <a:noFill/>
+        </p:spPr>
+        <p:txBody>
+          <a:bodyPr wrap="square">
+            <a:spAutoFit/>
+          </a:bodyPr>
+          <a:lstStyle/>
+          <a:p>
+            <a:pPr algn="l">
+              <a:defRPr sz="3000" b="1">
+                <a:solidFill>
+                  <a:srgbClr val="202123"/>
+                </a:solidFill>
+                <a:latin typeface="Calibri"/>
+              </a:defRPr>
+            </a:pPr>
+            <a:r>
+              <a:t>Deep-dive Principal: internals end-to-end</a:t>
+            </a:r>
+          </a:p>
+        </p:txBody>
+      </p:sp>
+      <p:sp>
+        <p:nvSpPr>
+          <p:cNvPr id="7" name="TextBox 6"/>
+          <p:cNvSpPr txBox="1"/>
+          <p:nvPr/>
+        </p:nvSpPr>
+        <p:spPr>
+          <a:xfrm>
+            <a:off x="502920" y="1691640"/>
+            <a:ext cx="10241280" cy="548640"/>
+          </a:xfrm>
+          <a:prstGeom prst="rect">
+            <a:avLst/>
+          </a:prstGeom>
+          <a:noFill/>
+        </p:spPr>
+        <p:txBody>
+          <a:bodyPr wrap="square">
+            <a:spAutoFit/>
+          </a:bodyPr>
+          <a:lstStyle/>
+          <a:p>
+            <a:pPr algn="l">
+              <a:defRPr sz="1600" b="0">
+                <a:solidFill>
+                  <a:srgbClr val="6E6E68"/>
+                </a:solidFill>
+                <a:latin typeface="Calibri"/>
+              </a:defRPr>
+            </a:pPr>
+            <a:r>
+              <a:t>ORCA memo/xforms, pg_statistic slots, AOCO files, TEMP spill, design review.</a:t>
+            </a:r>
+          </a:p>
+        </p:txBody>
+      </p:sp>
+      <p:sp>
+        <p:nvSpPr>
+          <p:cNvPr id="8" name="TextBox 7"/>
+          <p:cNvSpPr txBox="1"/>
+          <p:nvPr/>
+        </p:nvSpPr>
+        <p:spPr>
+          <a:xfrm>
+            <a:off x="10058400" y="6446520"/>
+            <a:ext cx="1645920" cy="274320"/>
+          </a:xfrm>
+          <a:prstGeom prst="rect">
+            <a:avLst/>
+          </a:prstGeom>
+          <a:noFill/>
+        </p:spPr>
+        <p:txBody>
+          <a:bodyPr wrap="square">
+            <a:spAutoFit/>
+          </a:bodyPr>
+          <a:lstStyle/>
+          <a:p>
+            <a:pPr algn="r">
+              <a:defRPr sz="1100" b="0">
+                <a:solidFill>
+                  <a:srgbClr val="6E6E68"/>
+                </a:solidFill>
+                <a:latin typeface="Calibri"/>
+              </a:defRPr>
+            </a:pPr>
+            <a:r>
+              <a:t>Урок 03</a:t>
+            </a:r>
+          </a:p>
+        </p:txBody>
+      </p:sp>
+      <p:sp>
+        <p:nvSpPr>
+          <p:cNvPr id="9" name="Rounded Rectangle 8"/>
+          <p:cNvSpPr/>
+          <p:nvPr/>
+        </p:nvSpPr>
+        <p:spPr>
+          <a:xfrm>
+            <a:off x="548640" y="2331720"/>
+            <a:ext cx="5303520" cy="1508760"/>
+          </a:xfrm>
+          <a:prstGeom prst="roundRect">
+            <a:avLst>
+              <a:gd name="adj" fmla="val 8000"/>
+            </a:avLst>
+          </a:prstGeom>
+          <a:solidFill>
+            <a:srgbClr val="FFFFFF"/>
+          </a:solidFill>
+          <a:ln>
+            <a:solidFill>
+              <a:srgbClr val="D8D7D0"/>
+            </a:solidFill>
+          </a:ln>
+        </p:spPr>
+        <p:style>
+          <a:lnRef idx="1">
+            <a:schemeClr val="accent1"/>
+          </a:lnRef>
+          <a:fillRef idx="3">
+            <a:schemeClr val="accent1"/>
+          </a:fillRef>
+          <a:effectRef idx="2">
+            <a:schemeClr val="accent1"/>
+          </a:effectRef>
+          <a:fontRef idx="minor">
+            <a:schemeClr val="lt1"/>
+          </a:fontRef>
+        </p:style>
+        <p:txBody>
+          <a:bodyPr rtlCol="0" anchor="ctr"/>
+          <a:lstStyle/>
+          <a:p>
+            <a:pPr algn="ctr"/>
+          </a:p>
+        </p:txBody>
+      </p:sp>
+      <p:sp>
+        <p:nvSpPr>
+          <p:cNvPr id="10" name="Rectangle 9"/>
+          <p:cNvSpPr/>
+          <p:nvPr/>
+        </p:nvSpPr>
+        <p:spPr>
+          <a:xfrm>
+            <a:off x="731520" y="2514600"/>
+            <a:ext cx="411480" cy="45720"/>
+          </a:xfrm>
+          <a:prstGeom prst="rect">
+            <a:avLst/>
+          </a:prstGeom>
+          <a:solidFill>
+            <a:srgbClr val="10A37F"/>
+          </a:solidFill>
+          <a:ln>
+            <a:noFill/>
+          </a:ln>
+        </p:spPr>
+        <p:style>
+          <a:lnRef idx="1">
+            <a:schemeClr val="accent1"/>
+          </a:lnRef>
+          <a:fillRef idx="3">
+            <a:schemeClr val="accent1"/>
+          </a:fillRef>
+          <a:effectRef idx="2">
+            <a:schemeClr val="accent1"/>
+          </a:effectRef>
+          <a:fontRef idx="minor">
+            <a:schemeClr val="lt1"/>
+          </a:fontRef>
+        </p:style>
+        <p:txBody>
+          <a:bodyPr rtlCol="0" anchor="ctr"/>
+          <a:lstStyle/>
+          <a:p>
+            <a:pPr algn="ctr"/>
+          </a:p>
+        </p:txBody>
+      </p:sp>
+      <p:sp>
+        <p:nvSpPr>
+          <p:cNvPr id="11" name="TextBox 10"/>
+          <p:cNvSpPr txBox="1"/>
+          <p:nvPr/>
+        </p:nvSpPr>
+        <p:spPr>
+          <a:xfrm>
+            <a:off x="749808" y="2651760"/>
+            <a:ext cx="4937760" cy="411480"/>
+          </a:xfrm>
+          <a:prstGeom prst="rect">
+            <a:avLst/>
+          </a:prstGeom>
+          <a:noFill/>
+        </p:spPr>
+        <p:txBody>
+          <a:bodyPr wrap="square">
+            <a:spAutoFit/>
+          </a:bodyPr>
+          <a:lstStyle/>
+          <a:p>
+            <a:pPr algn="l">
+              <a:defRPr sz="1800" b="1">
+                <a:solidFill>
+                  <a:srgbClr val="202123"/>
+                </a:solidFill>
+                <a:latin typeface="Calibri"/>
+              </a:defRPr>
+            </a:pPr>
+            <a:r>
+              <a:t>ORCA</a:t>
+            </a:r>
+          </a:p>
+        </p:txBody>
+      </p:sp>
+      <p:sp>
+        <p:nvSpPr>
+          <p:cNvPr id="12" name="TextBox 11"/>
+          <p:cNvSpPr txBox="1"/>
+          <p:nvPr/>
+        </p:nvSpPr>
+        <p:spPr>
+          <a:xfrm>
+            <a:off x="749808" y="3108960"/>
+            <a:ext cx="4937760" cy="548640"/>
+          </a:xfrm>
+          <a:prstGeom prst="rect">
+            <a:avLst/>
+          </a:prstGeom>
+          <a:noFill/>
+        </p:spPr>
+        <p:txBody>
+          <a:bodyPr wrap="square">
+            <a:spAutoFit/>
+          </a:bodyPr>
+          <a:lstStyle/>
+          <a:p>
+            <a:pPr algn="l">
+              <a:defRPr sz="1300" b="0">
+                <a:solidFill>
+                  <a:srgbClr val="6E6E68"/>
+                </a:solidFill>
+                <a:latin typeface="Calibri"/>
+              </a:defRPr>
+            </a:pPr>
+            <a:r>
+              <a:t>fallback, minidump, join_order GUCs.</a:t>
+            </a:r>
+          </a:p>
+        </p:txBody>
+      </p:sp>
+      <p:sp>
+        <p:nvSpPr>
+          <p:cNvPr id="13" name="Rounded Rectangle 12"/>
+          <p:cNvSpPr/>
+          <p:nvPr/>
+        </p:nvSpPr>
+        <p:spPr>
+          <a:xfrm>
+            <a:off x="6217920" y="2331720"/>
+            <a:ext cx="5303520" cy="1508760"/>
+          </a:xfrm>
+          <a:prstGeom prst="roundRect">
+            <a:avLst>
+              <a:gd name="adj" fmla="val 8000"/>
+            </a:avLst>
+          </a:prstGeom>
+          <a:solidFill>
+            <a:srgbClr val="FFFFFF"/>
+          </a:solidFill>
+          <a:ln>
+            <a:solidFill>
+              <a:srgbClr val="D8D7D0"/>
+            </a:solidFill>
+          </a:ln>
+        </p:spPr>
+        <p:style>
+          <a:lnRef idx="1">
+            <a:schemeClr val="accent1"/>
+          </a:lnRef>
+          <a:fillRef idx="3">
+            <a:schemeClr val="accent1"/>
+          </a:fillRef>
+          <a:effectRef idx="2">
+            <a:schemeClr val="accent1"/>
+          </a:effectRef>
+          <a:fontRef idx="minor">
+            <a:schemeClr val="lt1"/>
+          </a:fontRef>
+        </p:style>
+        <p:txBody>
+          <a:bodyPr rtlCol="0" anchor="ctr"/>
+          <a:lstStyle/>
+          <a:p>
+            <a:pPr algn="ctr"/>
+          </a:p>
+        </p:txBody>
+      </p:sp>
+      <p:sp>
+        <p:nvSpPr>
+          <p:cNvPr id="14" name="Rectangle 13"/>
+          <p:cNvSpPr/>
+          <p:nvPr/>
+        </p:nvSpPr>
+        <p:spPr>
+          <a:xfrm>
+            <a:off x="6400800" y="2514600"/>
+            <a:ext cx="411480" cy="45720"/>
+          </a:xfrm>
+          <a:prstGeom prst="rect">
+            <a:avLst/>
+          </a:prstGeom>
+          <a:solidFill>
+            <a:srgbClr val="2F6FED"/>
+          </a:solidFill>
+          <a:ln>
+            <a:noFill/>
+          </a:ln>
+        </p:spPr>
+        <p:style>
+          <a:lnRef idx="1">
+            <a:schemeClr val="accent1"/>
+          </a:lnRef>
+          <a:fillRef idx="3">
+            <a:schemeClr val="accent1"/>
+          </a:fillRef>
+          <a:effectRef idx="2">
+            <a:schemeClr val="accent1"/>
+          </a:effectRef>
+          <a:fontRef idx="minor">
+            <a:schemeClr val="lt1"/>
+          </a:fontRef>
+        </p:style>
+        <p:txBody>
+          <a:bodyPr rtlCol="0" anchor="ctr"/>
+          <a:lstStyle/>
+          <a:p>
+            <a:pPr algn="ctr"/>
+          </a:p>
+        </p:txBody>
+      </p:sp>
+      <p:sp>
+        <p:nvSpPr>
+          <p:cNvPr id="15" name="TextBox 14"/>
+          <p:cNvSpPr txBox="1"/>
+          <p:nvPr/>
+        </p:nvSpPr>
+        <p:spPr>
+          <a:xfrm>
+            <a:off x="6419088" y="2651760"/>
+            <a:ext cx="4937760" cy="411480"/>
+          </a:xfrm>
+          <a:prstGeom prst="rect">
+            <a:avLst/>
+          </a:prstGeom>
+          <a:noFill/>
+        </p:spPr>
+        <p:txBody>
+          <a:bodyPr wrap="square">
+            <a:spAutoFit/>
+          </a:bodyPr>
+          <a:lstStyle/>
+          <a:p>
+            <a:pPr algn="l">
+              <a:defRPr sz="1800" b="1">
+                <a:solidFill>
+                  <a:srgbClr val="202123"/>
+                </a:solidFill>
+                <a:latin typeface="Calibri"/>
+              </a:defRPr>
+            </a:pPr>
+            <a:r>
+              <a:t>Stats files</a:t>
+            </a:r>
+          </a:p>
+        </p:txBody>
+      </p:sp>
+      <p:sp>
+        <p:nvSpPr>
+          <p:cNvPr id="16" name="TextBox 15"/>
+          <p:cNvSpPr txBox="1"/>
+          <p:nvPr/>
+        </p:nvSpPr>
+        <p:spPr>
+          <a:xfrm>
+            <a:off x="6419088" y="3108960"/>
+            <a:ext cx="4937760" cy="548640"/>
+          </a:xfrm>
+          <a:prstGeom prst="rect">
+            <a:avLst/>
+          </a:prstGeom>
+          <a:noFill/>
+        </p:spPr>
+        <p:txBody>
+          <a:bodyPr wrap="square">
+            <a:spAutoFit/>
+          </a:bodyPr>
+          <a:lstStyle/>
+          <a:p>
+            <a:pPr algn="l">
+              <a:defRPr sz="1300" b="0">
+                <a:solidFill>
+                  <a:srgbClr val="6E6E68"/>
+                </a:solidFill>
+                <a:latin typeface="Calibri"/>
+              </a:defRPr>
+            </a:pPr>
+            <a:r>
+              <a:t>stakind/stavalues/TOAST.</a:t>
+            </a:r>
+          </a:p>
+        </p:txBody>
+      </p:sp>
+      <p:sp>
+        <p:nvSpPr>
+          <p:cNvPr id="17" name="Rounded Rectangle 16"/>
+          <p:cNvSpPr/>
+          <p:nvPr/>
+        </p:nvSpPr>
+        <p:spPr>
+          <a:xfrm>
+            <a:off x="548640" y="4160520"/>
+            <a:ext cx="5303520" cy="1508760"/>
+          </a:xfrm>
+          <a:prstGeom prst="roundRect">
+            <a:avLst>
+              <a:gd name="adj" fmla="val 8000"/>
+            </a:avLst>
+          </a:prstGeom>
+          <a:solidFill>
+            <a:srgbClr val="FFFFFF"/>
+          </a:solidFill>
+          <a:ln>
+            <a:solidFill>
+              <a:srgbClr val="D8D7D0"/>
+            </a:solidFill>
+          </a:ln>
+        </p:spPr>
+        <p:style>
+          <a:lnRef idx="1">
+            <a:schemeClr val="accent1"/>
+          </a:lnRef>
+          <a:fillRef idx="3">
+            <a:schemeClr val="accent1"/>
+          </a:fillRef>
+          <a:effectRef idx="2">
+            <a:schemeClr val="accent1"/>
+          </a:effectRef>
+          <a:fontRef idx="minor">
+            <a:schemeClr val="lt1"/>
+          </a:fontRef>
+        </p:style>
+        <p:txBody>
+          <a:bodyPr rtlCol="0" anchor="ctr"/>
+          <a:lstStyle/>
+          <a:p>
+            <a:pPr algn="ctr"/>
+          </a:p>
+        </p:txBody>
+      </p:sp>
+      <p:sp>
+        <p:nvSpPr>
+          <p:cNvPr id="18" name="Rectangle 17"/>
+          <p:cNvSpPr/>
+          <p:nvPr/>
+        </p:nvSpPr>
+        <p:spPr>
+          <a:xfrm>
+            <a:off x="731520" y="4343400"/>
+            <a:ext cx="411480" cy="45720"/>
+          </a:xfrm>
+          <a:prstGeom prst="rect">
+            <a:avLst/>
+          </a:prstGeom>
+          <a:solidFill>
+            <a:srgbClr val="B7791F"/>
+          </a:solidFill>
+          <a:ln>
+            <a:noFill/>
+          </a:ln>
+        </p:spPr>
+        <p:style>
+          <a:lnRef idx="1">
+            <a:schemeClr val="accent1"/>
+          </a:lnRef>
+          <a:fillRef idx="3">
+            <a:schemeClr val="accent1"/>
+          </a:fillRef>
+          <a:effectRef idx="2">
+            <a:schemeClr val="accent1"/>
+          </a:effectRef>
+          <a:fontRef idx="minor">
+            <a:schemeClr val="lt1"/>
+          </a:fontRef>
+        </p:style>
+        <p:txBody>
+          <a:bodyPr rtlCol="0" anchor="ctr"/>
+          <a:lstStyle/>
+          <a:p>
+            <a:pPr algn="ctr"/>
+          </a:p>
+        </p:txBody>
+      </p:sp>
+      <p:sp>
+        <p:nvSpPr>
+          <p:cNvPr id="19" name="TextBox 18"/>
+          <p:cNvSpPr txBox="1"/>
+          <p:nvPr/>
+        </p:nvSpPr>
+        <p:spPr>
+          <a:xfrm>
+            <a:off x="749808" y="4480560"/>
+            <a:ext cx="4937760" cy="411480"/>
+          </a:xfrm>
+          <a:prstGeom prst="rect">
+            <a:avLst/>
+          </a:prstGeom>
+          <a:noFill/>
+        </p:spPr>
+        <p:txBody>
+          <a:bodyPr wrap="square">
+            <a:spAutoFit/>
+          </a:bodyPr>
+          <a:lstStyle/>
+          <a:p>
+            <a:pPr algn="l">
+              <a:defRPr sz="1800" b="1">
+                <a:solidFill>
+                  <a:srgbClr val="202123"/>
+                </a:solidFill>
+                <a:latin typeface="Calibri"/>
+              </a:defRPr>
+            </a:pPr>
+            <a:r>
+              <a:t>Storage</a:t>
+            </a:r>
+          </a:p>
+        </p:txBody>
+      </p:sp>
+      <p:sp>
+        <p:nvSpPr>
+          <p:cNvPr id="20" name="TextBox 19"/>
+          <p:cNvSpPr txBox="1"/>
+          <p:nvPr/>
+        </p:nvSpPr>
+        <p:spPr>
+          <a:xfrm>
+            <a:off x="749808" y="4937760"/>
+            <a:ext cx="4937760" cy="548640"/>
+          </a:xfrm>
+          <a:prstGeom prst="rect">
+            <a:avLst/>
+          </a:prstGeom>
+          <a:noFill/>
+        </p:spPr>
+        <p:txBody>
+          <a:bodyPr wrap="square">
+            <a:spAutoFit/>
+          </a:bodyPr>
+          <a:lstStyle/>
+          <a:p>
+            <a:pPr algn="l">
+              <a:defRPr sz="1300" b="0">
+                <a:solidFill>
+                  <a:srgbClr val="6E6E68"/>
+                </a:solidFill>
+                <a:latin typeface="Calibri"/>
+              </a:defRPr>
+            </a:pPr>
+            <a:r>
+              <a:t>appendonly column layout.</a:t>
+            </a:r>
+          </a:p>
+        </p:txBody>
+      </p:sp>
+      <p:sp>
+        <p:nvSpPr>
+          <p:cNvPr id="21" name="Rounded Rectangle 20"/>
+          <p:cNvSpPr/>
+          <p:nvPr/>
+        </p:nvSpPr>
+        <p:spPr>
+          <a:xfrm>
+            <a:off x="6217920" y="4160520"/>
+            <a:ext cx="5303520" cy="1508760"/>
+          </a:xfrm>
+          <a:prstGeom prst="roundRect">
+            <a:avLst>
+              <a:gd name="adj" fmla="val 8000"/>
+            </a:avLst>
+          </a:prstGeom>
+          <a:solidFill>
+            <a:srgbClr val="FFFFFF"/>
+          </a:solidFill>
+          <a:ln>
+            <a:solidFill>
+              <a:srgbClr val="D8D7D0"/>
+            </a:solidFill>
+          </a:ln>
+        </p:spPr>
+        <p:style>
+          <a:lnRef idx="1">
+            <a:schemeClr val="accent1"/>
+          </a:lnRef>
+          <a:fillRef idx="3">
+            <a:schemeClr val="accent1"/>
+          </a:fillRef>
+          <a:effectRef idx="2">
+            <a:schemeClr val="accent1"/>
+          </a:effectRef>
+          <a:fontRef idx="minor">
+            <a:schemeClr val="lt1"/>
+          </a:fontRef>
+        </p:style>
+        <p:txBody>
+          <a:bodyPr rtlCol="0" anchor="ctr"/>
+          <a:lstStyle/>
+          <a:p>
+            <a:pPr algn="ctr"/>
+          </a:p>
+        </p:txBody>
+      </p:sp>
+      <p:sp>
+        <p:nvSpPr>
+          <p:cNvPr id="22" name="Rectangle 21"/>
+          <p:cNvSpPr/>
+          <p:nvPr/>
+        </p:nvSpPr>
+        <p:spPr>
+          <a:xfrm>
+            <a:off x="6400800" y="4343400"/>
+            <a:ext cx="411480" cy="45720"/>
+          </a:xfrm>
+          <a:prstGeom prst="rect">
+            <a:avLst/>
+          </a:prstGeom>
+          <a:solidFill>
+            <a:srgbClr val="10A37F"/>
+          </a:solidFill>
+          <a:ln>
+            <a:noFill/>
+          </a:ln>
+        </p:spPr>
+        <p:style>
+          <a:lnRef idx="1">
+            <a:schemeClr val="accent1"/>
+          </a:lnRef>
+          <a:fillRef idx="3">
+            <a:schemeClr val="accent1"/>
+          </a:fillRef>
+          <a:effectRef idx="2">
+            <a:schemeClr val="accent1"/>
+          </a:effectRef>
+          <a:fontRef idx="minor">
+            <a:schemeClr val="lt1"/>
+          </a:fontRef>
+        </p:style>
+        <p:txBody>
+          <a:bodyPr rtlCol="0" anchor="ctr"/>
+          <a:lstStyle/>
+          <a:p>
+            <a:pPr algn="ctr"/>
+          </a:p>
+        </p:txBody>
+      </p:sp>
+      <p:sp>
+        <p:nvSpPr>
+          <p:cNvPr id="23" name="TextBox 22"/>
+          <p:cNvSpPr txBox="1"/>
+          <p:nvPr/>
+        </p:nvSpPr>
+        <p:spPr>
+          <a:xfrm>
+            <a:off x="6419088" y="4480560"/>
+            <a:ext cx="4937760" cy="411480"/>
+          </a:xfrm>
+          <a:prstGeom prst="rect">
+            <a:avLst/>
+          </a:prstGeom>
+          <a:noFill/>
+        </p:spPr>
+        <p:txBody>
+          <a:bodyPr wrap="square">
+            <a:spAutoFit/>
+          </a:bodyPr>
+          <a:lstStyle/>
+          <a:p>
+            <a:pPr algn="l">
+              <a:defRPr sz="1800" b="1">
+                <a:solidFill>
+                  <a:srgbClr val="202123"/>
+                </a:solidFill>
+                <a:latin typeface="Calibri"/>
+              </a:defRPr>
+            </a:pPr>
+            <a:r>
+              <a:t>RFC</a:t>
+            </a:r>
+          </a:p>
+        </p:txBody>
+      </p:sp>
+      <p:sp>
+        <p:nvSpPr>
+          <p:cNvPr id="24" name="TextBox 23"/>
+          <p:cNvSpPr txBox="1"/>
+          <p:nvPr/>
+        </p:nvSpPr>
+        <p:spPr>
+          <a:xfrm>
+            <a:off x="6419088" y="4937760"/>
+            <a:ext cx="4937760" cy="548640"/>
+          </a:xfrm>
+          <a:prstGeom prst="rect">
+            <a:avLst/>
+          </a:prstGeom>
+          <a:noFill/>
+        </p:spPr>
+        <p:txBody>
+          <a:bodyPr wrap="square">
+            <a:spAutoFit/>
+          </a:bodyPr>
+          <a:lstStyle/>
+          <a:p>
+            <a:pPr algn="l">
+              <a:defRPr sz="1300" b="0">
+                <a:solidFill>
+                  <a:srgbClr val="6E6E68"/>
+                </a:solidFill>
+                <a:latin typeface="Calibri"/>
+              </a:defRPr>
+            </a:pPr>
+            <a:r>
+              <a:t>rewrite + optimizer policy.</a:t>
+            </a:r>
+          </a:p>
+        </p:txBody>
+      </p:sp>
+    </p:spTree>
+  </p:cSld>
+  <p:clrMapOvr>
+    <a:masterClrMapping/>
+  </p:clrMapOvr>
+</p:sld>
+</file>
+
+<file path=ppt/slides/slide52.xml><?xml version="1.0" encoding="utf-8"?>
+<p:sld xmlns:a="http://schemas.openxmlformats.org/drawingml/2006/main" xmlns:p="http://schemas.openxmlformats.org/presentationml/2006/main" xmlns:r="http://schemas.openxmlformats.org/officeDocument/2006/relationships">
+  <p:cSld>
+    <p:spTree>
+      <p:nvGrpSpPr>
+        <p:cNvPr id="1" name=""/>
+        <p:cNvGrpSpPr/>
+        <p:nvPr/>
+      </p:nvGrpSpPr>
+      <p:grpSpPr/>
+      <p:sp>
+        <p:nvSpPr>
+          <p:cNvPr id="2" name="Rectangle 1"/>
+          <p:cNvSpPr/>
+          <p:nvPr/>
+        </p:nvSpPr>
+        <p:spPr>
+          <a:xfrm>
+            <a:off x="0" y="0"/>
+            <a:ext cx="12192000" cy="6858000"/>
+          </a:xfrm>
+          <a:prstGeom prst="rect">
+            <a:avLst/>
+          </a:prstGeom>
+          <a:solidFill>
+            <a:srgbClr val="F7F7F4"/>
+          </a:solidFill>
+          <a:ln>
+            <a:noFill/>
+          </a:ln>
+        </p:spPr>
+        <p:style>
+          <a:lnRef idx="1">
+            <a:schemeClr val="accent1"/>
+          </a:lnRef>
+          <a:fillRef idx="3">
+            <a:schemeClr val="accent1"/>
+          </a:fillRef>
+          <a:effectRef idx="2">
+            <a:schemeClr val="accent1"/>
+          </a:effectRef>
+          <a:fontRef idx="minor">
+            <a:schemeClr val="lt1"/>
+          </a:fontRef>
+        </p:style>
+        <p:txBody>
+          <a:bodyPr rtlCol="0" anchor="ctr"/>
+          <a:lstStyle/>
+          <a:p>
+            <a:pPr algn="ctr"/>
+          </a:p>
+        </p:txBody>
+      </p:sp>
+      <p:sp>
+        <p:nvSpPr>
+          <p:cNvPr id="3" name="Rectangle 2"/>
+          <p:cNvSpPr/>
+          <p:nvPr/>
+        </p:nvSpPr>
+        <p:spPr>
+          <a:xfrm>
+            <a:off x="0" y="0"/>
+            <a:ext cx="12192000" cy="18288"/>
+          </a:xfrm>
+          <a:prstGeom prst="rect">
+            <a:avLst/>
+          </a:prstGeom>
+          <a:solidFill>
+            <a:srgbClr val="D8D7D0"/>
+          </a:solidFill>
+          <a:ln>
+            <a:noFill/>
+          </a:ln>
+        </p:spPr>
+        <p:style>
+          <a:lnRef idx="1">
+            <a:schemeClr val="accent1"/>
+          </a:lnRef>
+          <a:fillRef idx="3">
+            <a:schemeClr val="accent1"/>
+          </a:fillRef>
+          <a:effectRef idx="2">
+            <a:schemeClr val="accent1"/>
+          </a:effectRef>
+          <a:fontRef idx="minor">
+            <a:schemeClr val="lt1"/>
+          </a:fontRef>
+        </p:style>
+        <p:txBody>
+          <a:bodyPr rtlCol="0" anchor="ctr"/>
+          <a:lstStyle/>
+          <a:p>
+            <a:pPr algn="ctr"/>
+          </a:p>
+        </p:txBody>
+      </p:sp>
+      <p:sp>
+        <p:nvSpPr>
+          <p:cNvPr id="4" name="Rectangle 3"/>
+          <p:cNvSpPr/>
+          <p:nvPr/>
+        </p:nvSpPr>
+        <p:spPr>
+          <a:xfrm>
+            <a:off x="0" y="6839712"/>
+            <a:ext cx="12192000" cy="18288"/>
+          </a:xfrm>
+          <a:prstGeom prst="rect">
+            <a:avLst/>
+          </a:prstGeom>
+          <a:solidFill>
+            <a:srgbClr val="D8D7D0"/>
+          </a:solidFill>
+          <a:ln>
+            <a:noFill/>
+          </a:ln>
+        </p:spPr>
+        <p:style>
+          <a:lnRef idx="1">
+            <a:schemeClr val="accent1"/>
+          </a:lnRef>
+          <a:fillRef idx="3">
+            <a:schemeClr val="accent1"/>
+          </a:fillRef>
+          <a:effectRef idx="2">
+            <a:schemeClr val="accent1"/>
+          </a:effectRef>
+          <a:fontRef idx="minor">
+            <a:schemeClr val="lt1"/>
+          </a:fontRef>
+        </p:style>
+        <p:txBody>
+          <a:bodyPr rtlCol="0" anchor="ctr"/>
+          <a:lstStyle/>
+          <a:p>
+            <a:pPr algn="ctr"/>
+          </a:p>
+        </p:txBody>
+      </p:sp>
+      <p:sp>
+        <p:nvSpPr>
+          <p:cNvPr id="5" name="TextBox 4"/>
+          <p:cNvSpPr txBox="1"/>
+          <p:nvPr/>
+        </p:nvSpPr>
+        <p:spPr>
+          <a:xfrm>
+            <a:off x="502920" y="320040"/>
+            <a:ext cx="4114800" cy="274320"/>
+          </a:xfrm>
+          <a:prstGeom prst="rect">
+            <a:avLst/>
+          </a:prstGeom>
+          <a:noFill/>
+        </p:spPr>
+        <p:txBody>
+          <a:bodyPr wrap="square">
+            <a:spAutoFit/>
+          </a:bodyPr>
+          <a:lstStyle/>
+          <a:p>
+            <a:pPr algn="l">
+              <a:defRPr sz="1300" b="1">
+                <a:solidFill>
+                  <a:srgbClr val="10A37F"/>
+                </a:solidFill>
+                <a:latin typeface="Calibri"/>
+              </a:defRPr>
+            </a:pPr>
+            <a:r>
+              <a:t>SUMMARY</a:t>
+            </a:r>
+          </a:p>
+        </p:txBody>
+      </p:sp>
+      <p:sp>
+        <p:nvSpPr>
+          <p:cNvPr id="6" name="TextBox 5"/>
+          <p:cNvSpPr txBox="1"/>
+          <p:nvPr/>
+        </p:nvSpPr>
+        <p:spPr>
+          <a:xfrm>
+            <a:off x="502920" y="640080"/>
+            <a:ext cx="10515600" cy="1005840"/>
+          </a:xfrm>
+          <a:prstGeom prst="rect">
+            <a:avLst/>
+          </a:prstGeom>
+          <a:noFill/>
+        </p:spPr>
+        <p:txBody>
+          <a:bodyPr wrap="square">
+            <a:spAutoFit/>
+          </a:bodyPr>
+          <a:lstStyle/>
+          <a:p>
+            <a:pPr algn="l">
+              <a:defRPr sz="3000" b="1">
+                <a:solidFill>
+                  <a:srgbClr val="202123"/>
+                </a:solidFill>
+                <a:latin typeface="Calibri"/>
+              </a:defRPr>
+            </a:pPr>
+            <a:r>
+              <a:t>Что унести с Урока 03</a:t>
+            </a:r>
+          </a:p>
+        </p:txBody>
+      </p:sp>
+      <p:sp>
+        <p:nvSpPr>
+          <p:cNvPr id="7" name="TextBox 6"/>
+          <p:cNvSpPr txBox="1"/>
+          <p:nvPr/>
+        </p:nvSpPr>
+        <p:spPr>
+          <a:xfrm>
+            <a:off x="502920" y="1691640"/>
+            <a:ext cx="10241280" cy="548640"/>
+          </a:xfrm>
+          <a:prstGeom prst="rect">
+            <a:avLst/>
+          </a:prstGeom>
+          <a:noFill/>
+        </p:spPr>
+        <p:txBody>
+          <a:bodyPr wrap="square">
+            <a:spAutoFit/>
+          </a:bodyPr>
+          <a:lstStyle/>
+          <a:p>
+            <a:pPr algn="l">
+              <a:defRPr sz="1600" b="0">
+                <a:solidFill>
+                  <a:srgbClr val="6E6E68"/>
+                </a:solidFill>
+                <a:latin typeface="Calibri"/>
+              </a:defRPr>
+            </a:pPr>
+            <a:r>
+              <a:t>Оптимизация Greenplum — это pipeline + два optimizer + физика данных.</a:t>
+            </a:r>
+          </a:p>
+        </p:txBody>
+      </p:sp>
+      <p:sp>
+        <p:nvSpPr>
+          <p:cNvPr id="8" name="TextBox 7"/>
+          <p:cNvSpPr txBox="1"/>
+          <p:nvPr/>
+        </p:nvSpPr>
+        <p:spPr>
+          <a:xfrm>
+            <a:off x="10058400" y="6446520"/>
+            <a:ext cx="1645920" cy="274320"/>
+          </a:xfrm>
+          <a:prstGeom prst="rect">
+            <a:avLst/>
+          </a:prstGeom>
+          <a:noFill/>
+        </p:spPr>
+        <p:txBody>
+          <a:bodyPr wrap="square">
+            <a:spAutoFit/>
+          </a:bodyPr>
+          <a:lstStyle/>
+          <a:p>
+            <a:pPr algn="r">
+              <a:defRPr sz="1100" b="0">
+                <a:solidFill>
+                  <a:srgbClr val="6E6E68"/>
+                </a:solidFill>
+                <a:latin typeface="Calibri"/>
+              </a:defRPr>
+            </a:pPr>
+            <a:r>
+              <a:t>Урок 03</a:t>
+            </a:r>
+          </a:p>
+        </p:txBody>
+      </p:sp>
+      <p:sp>
+        <p:nvSpPr>
+          <p:cNvPr id="9" name="Rounded Rectangle 8"/>
+          <p:cNvSpPr/>
+          <p:nvPr/>
+        </p:nvSpPr>
+        <p:spPr>
+          <a:xfrm>
+            <a:off x="548640" y="2331720"/>
+            <a:ext cx="5303520" cy="1508760"/>
+          </a:xfrm>
+          <a:prstGeom prst="roundRect">
+            <a:avLst>
+              <a:gd name="adj" fmla="val 8000"/>
+            </a:avLst>
+          </a:prstGeom>
+          <a:solidFill>
+            <a:srgbClr val="FFFFFF"/>
+          </a:solidFill>
+          <a:ln>
+            <a:solidFill>
+              <a:srgbClr val="D8D7D0"/>
+            </a:solidFill>
+          </a:ln>
+        </p:spPr>
+        <p:style>
+          <a:lnRef idx="1">
+            <a:schemeClr val="accent1"/>
+          </a:lnRef>
+          <a:fillRef idx="3">
+            <a:schemeClr val="accent1"/>
+          </a:fillRef>
+          <a:effectRef idx="2">
+            <a:schemeClr val="accent1"/>
+          </a:effectRef>
+          <a:fontRef idx="minor">
+            <a:schemeClr val="lt1"/>
+          </a:fontRef>
+        </p:style>
+        <p:txBody>
+          <a:bodyPr rtlCol="0" anchor="ctr"/>
+          <a:lstStyle/>
+          <a:p>
+            <a:pPr algn="ctr"/>
+          </a:p>
+        </p:txBody>
+      </p:sp>
+      <p:sp>
+        <p:nvSpPr>
+          <p:cNvPr id="10" name="Rectangle 9"/>
+          <p:cNvSpPr/>
+          <p:nvPr/>
+        </p:nvSpPr>
+        <p:spPr>
+          <a:xfrm>
+            <a:off x="731520" y="2514600"/>
+            <a:ext cx="411480" cy="45720"/>
+          </a:xfrm>
+          <a:prstGeom prst="rect">
+            <a:avLst/>
+          </a:prstGeom>
+          <a:solidFill>
+            <a:srgbClr val="10A37F"/>
+          </a:solidFill>
+          <a:ln>
+            <a:noFill/>
+          </a:ln>
+        </p:spPr>
+        <p:style>
+          <a:lnRef idx="1">
+            <a:schemeClr val="accent1"/>
+          </a:lnRef>
+          <a:fillRef idx="3">
+            <a:schemeClr val="accent1"/>
+          </a:fillRef>
+          <a:effectRef idx="2">
+            <a:schemeClr val="accent1"/>
+          </a:effectRef>
+          <a:fontRef idx="minor">
+            <a:schemeClr val="lt1"/>
+          </a:fontRef>
+        </p:style>
+        <p:txBody>
+          <a:bodyPr rtlCol="0" anchor="ctr"/>
+          <a:lstStyle/>
+          <a:p>
+            <a:pPr algn="ctr"/>
+          </a:p>
+        </p:txBody>
+      </p:sp>
+      <p:sp>
+        <p:nvSpPr>
+          <p:cNvPr id="11" name="TextBox 10"/>
+          <p:cNvSpPr txBox="1"/>
+          <p:nvPr/>
+        </p:nvSpPr>
+        <p:spPr>
+          <a:xfrm>
+            <a:off x="749808" y="2651760"/>
+            <a:ext cx="4937760" cy="411480"/>
+          </a:xfrm>
+          <a:prstGeom prst="rect">
+            <a:avLst/>
+          </a:prstGeom>
+          <a:noFill/>
+        </p:spPr>
+        <p:txBody>
+          <a:bodyPr wrap="square">
+            <a:spAutoFit/>
+          </a:bodyPr>
+          <a:lstStyle/>
+          <a:p>
+            <a:pPr algn="l">
+              <a:defRPr sz="1800" b="1">
+                <a:solidFill>
+                  <a:srgbClr val="202123"/>
+                </a:solidFill>
+                <a:latin typeface="Calibri"/>
+              </a:defRPr>
+            </a:pPr>
+            <a:r>
+              <a:t>GUC</a:t>
+            </a:r>
+          </a:p>
+        </p:txBody>
+      </p:sp>
+      <p:sp>
+        <p:nvSpPr>
+          <p:cNvPr id="12" name="TextBox 11"/>
+          <p:cNvSpPr txBox="1"/>
+          <p:nvPr/>
+        </p:nvSpPr>
+        <p:spPr>
+          <a:xfrm>
+            <a:off x="749808" y="3108960"/>
+            <a:ext cx="4937760" cy="548640"/>
+          </a:xfrm>
+          <a:prstGeom prst="rect">
+            <a:avLst/>
+          </a:prstGeom>
+          <a:noFill/>
+        </p:spPr>
+        <p:txBody>
+          <a:bodyPr wrap="square">
+            <a:spAutoFit/>
+          </a:bodyPr>
+          <a:lstStyle/>
+          <a:p>
+            <a:pPr algn="l">
+              <a:defRPr sz="1300" b="0">
+                <a:solidFill>
+                  <a:srgbClr val="6E6E68"/>
+                </a:solidFill>
+                <a:latin typeface="Calibri"/>
+              </a:defRPr>
+            </a:pPr>
+            <a:r>
+              <a:t>optimizer on/off — явный выбор движка плана.</a:t>
+            </a:r>
+          </a:p>
+        </p:txBody>
+      </p:sp>
+      <p:sp>
+        <p:nvSpPr>
+          <p:cNvPr id="13" name="Rounded Rectangle 12"/>
+          <p:cNvSpPr/>
+          <p:nvPr/>
+        </p:nvSpPr>
+        <p:spPr>
+          <a:xfrm>
+            <a:off x="6217920" y="2331720"/>
+            <a:ext cx="5303520" cy="1508760"/>
+          </a:xfrm>
+          <a:prstGeom prst="roundRect">
+            <a:avLst>
+              <a:gd name="adj" fmla="val 8000"/>
+            </a:avLst>
+          </a:prstGeom>
+          <a:solidFill>
+            <a:srgbClr val="FFFFFF"/>
+          </a:solidFill>
+          <a:ln>
+            <a:solidFill>
+              <a:srgbClr val="D8D7D0"/>
+            </a:solidFill>
+          </a:ln>
+        </p:spPr>
+        <p:style>
+          <a:lnRef idx="1">
+            <a:schemeClr val="accent1"/>
+          </a:lnRef>
+          <a:fillRef idx="3">
+            <a:schemeClr val="accent1"/>
+          </a:fillRef>
+          <a:effectRef idx="2">
+            <a:schemeClr val="accent1"/>
+          </a:effectRef>
+          <a:fontRef idx="minor">
+            <a:schemeClr val="lt1"/>
+          </a:fontRef>
+        </p:style>
+        <p:txBody>
+          <a:bodyPr rtlCol="0" anchor="ctr"/>
+          <a:lstStyle/>
+          <a:p>
+            <a:pPr algn="ctr"/>
+          </a:p>
+        </p:txBody>
+      </p:sp>
+      <p:sp>
+        <p:nvSpPr>
+          <p:cNvPr id="14" name="Rectangle 13"/>
+          <p:cNvSpPr/>
+          <p:nvPr/>
+        </p:nvSpPr>
+        <p:spPr>
+          <a:xfrm>
+            <a:off x="6400800" y="2514600"/>
+            <a:ext cx="411480" cy="45720"/>
+          </a:xfrm>
+          <a:prstGeom prst="rect">
+            <a:avLst/>
+          </a:prstGeom>
+          <a:solidFill>
+            <a:srgbClr val="2F6FED"/>
+          </a:solidFill>
+          <a:ln>
+            <a:noFill/>
+          </a:ln>
+        </p:spPr>
+        <p:style>
+          <a:lnRef idx="1">
+            <a:schemeClr val="accent1"/>
+          </a:lnRef>
+          <a:fillRef idx="3">
+            <a:schemeClr val="accent1"/>
+          </a:fillRef>
+          <a:effectRef idx="2">
+            <a:schemeClr val="accent1"/>
+          </a:effectRef>
+          <a:fontRef idx="minor">
+            <a:schemeClr val="lt1"/>
+          </a:fontRef>
+        </p:style>
+        <p:txBody>
+          <a:bodyPr rtlCol="0" anchor="ctr"/>
+          <a:lstStyle/>
+          <a:p>
+            <a:pPr algn="ctr"/>
+          </a:p>
+        </p:txBody>
+      </p:sp>
+      <p:sp>
+        <p:nvSpPr>
+          <p:cNvPr id="15" name="TextBox 14"/>
+          <p:cNvSpPr txBox="1"/>
+          <p:nvPr/>
+        </p:nvSpPr>
+        <p:spPr>
+          <a:xfrm>
+            <a:off x="6419088" y="2651760"/>
+            <a:ext cx="4937760" cy="411480"/>
+          </a:xfrm>
+          <a:prstGeom prst="rect">
+            <a:avLst/>
+          </a:prstGeom>
+          <a:noFill/>
+        </p:spPr>
+        <p:txBody>
+          <a:bodyPr wrap="square">
+            <a:spAutoFit/>
+          </a:bodyPr>
+          <a:lstStyle/>
+          <a:p>
+            <a:pPr algn="l">
+              <a:defRPr sz="1800" b="1">
+                <a:solidFill>
+                  <a:srgbClr val="202123"/>
+                </a:solidFill>
+                <a:latin typeface="Calibri"/>
+              </a:defRPr>
+            </a:pPr>
+            <a:r>
+              <a:t>TEMP ≠ spill</a:t>
+            </a:r>
+          </a:p>
+        </p:txBody>
+      </p:sp>
+      <p:sp>
+        <p:nvSpPr>
+          <p:cNvPr id="16" name="TextBox 15"/>
+          <p:cNvSpPr txBox="1"/>
+          <p:nvPr/>
+        </p:nvSpPr>
+        <p:spPr>
+          <a:xfrm>
+            <a:off x="6419088" y="3108960"/>
+            <a:ext cx="4937760" cy="548640"/>
+          </a:xfrm>
+          <a:prstGeom prst="rect">
+            <a:avLst/>
+          </a:prstGeom>
+          <a:noFill/>
+        </p:spPr>
+        <p:txBody>
+          <a:bodyPr wrap="square">
+            <a:spAutoFit/>
+          </a:bodyPr>
+          <a:lstStyle/>
+          <a:p>
+            <a:pPr algn="l">
+              <a:defRPr sz="1300" b="0">
+                <a:solidFill>
+                  <a:srgbClr val="6E6E68"/>
+                </a:solidFill>
+                <a:latin typeface="Calibri"/>
+              </a:defRPr>
+            </a:pPr>
+            <a:r>
+              <a:t>t_* relation на QE vs pgsql_tmp_Sort_* workfiles.</a:t>
+            </a:r>
+          </a:p>
+        </p:txBody>
+      </p:sp>
+      <p:sp>
+        <p:nvSpPr>
+          <p:cNvPr id="17" name="Rounded Rectangle 16"/>
+          <p:cNvSpPr/>
+          <p:nvPr/>
+        </p:nvSpPr>
+        <p:spPr>
+          <a:xfrm>
+            <a:off x="548640" y="4160520"/>
+            <a:ext cx="5303520" cy="1508760"/>
+          </a:xfrm>
+          <a:prstGeom prst="roundRect">
+            <a:avLst>
+              <a:gd name="adj" fmla="val 8000"/>
+            </a:avLst>
+          </a:prstGeom>
+          <a:solidFill>
+            <a:srgbClr val="FFFFFF"/>
+          </a:solidFill>
+          <a:ln>
+            <a:solidFill>
+              <a:srgbClr val="D8D7D0"/>
+            </a:solidFill>
+          </a:ln>
+        </p:spPr>
+        <p:style>
+          <a:lnRef idx="1">
+            <a:schemeClr val="accent1"/>
+          </a:lnRef>
+          <a:fillRef idx="3">
+            <a:schemeClr val="accent1"/>
+          </a:fillRef>
+          <a:effectRef idx="2">
+            <a:schemeClr val="accent1"/>
+          </a:effectRef>
+          <a:fontRef idx="minor">
+            <a:schemeClr val="lt1"/>
+          </a:fontRef>
+        </p:style>
+        <p:txBody>
+          <a:bodyPr rtlCol="0" anchor="ctr"/>
+          <a:lstStyle/>
+          <a:p>
+            <a:pPr algn="ctr"/>
+          </a:p>
+        </p:txBody>
+      </p:sp>
+      <p:sp>
+        <p:nvSpPr>
+          <p:cNvPr id="18" name="Rectangle 17"/>
+          <p:cNvSpPr/>
+          <p:nvPr/>
+        </p:nvSpPr>
+        <p:spPr>
+          <a:xfrm>
+            <a:off x="731520" y="4343400"/>
+            <a:ext cx="411480" cy="45720"/>
+          </a:xfrm>
+          <a:prstGeom prst="rect">
+            <a:avLst/>
+          </a:prstGeom>
+          <a:solidFill>
+            <a:srgbClr val="B7791F"/>
+          </a:solidFill>
+          <a:ln>
+            <a:noFill/>
+          </a:ln>
+        </p:spPr>
+        <p:style>
+          <a:lnRef idx="1">
+            <a:schemeClr val="accent1"/>
+          </a:lnRef>
+          <a:fillRef idx="3">
+            <a:schemeClr val="accent1"/>
+          </a:fillRef>
+          <a:effectRef idx="2">
+            <a:schemeClr val="accent1"/>
+          </a:effectRef>
+          <a:fontRef idx="minor">
+            <a:schemeClr val="lt1"/>
+          </a:fontRef>
+        </p:style>
+        <p:txBody>
+          <a:bodyPr rtlCol="0" anchor="ctr"/>
+          <a:lstStyle/>
+          <a:p>
+            <a:pPr algn="ctr"/>
+          </a:p>
+        </p:txBody>
+      </p:sp>
+      <p:sp>
+        <p:nvSpPr>
+          <p:cNvPr id="19" name="TextBox 18"/>
+          <p:cNvSpPr txBox="1"/>
+          <p:nvPr/>
+        </p:nvSpPr>
+        <p:spPr>
+          <a:xfrm>
+            <a:off x="749808" y="4480560"/>
+            <a:ext cx="4937760" cy="411480"/>
+          </a:xfrm>
+          <a:prstGeom prst="rect">
+            <a:avLst/>
+          </a:prstGeom>
+          <a:noFill/>
+        </p:spPr>
+        <p:txBody>
+          <a:bodyPr wrap="square">
+            <a:spAutoFit/>
+          </a:bodyPr>
+          <a:lstStyle/>
+          <a:p>
+            <a:pPr algn="l">
+              <a:defRPr sz="1800" b="1">
+                <a:solidFill>
+                  <a:srgbClr val="202123"/>
+                </a:solidFill>
+                <a:latin typeface="Calibri"/>
+              </a:defRPr>
+            </a:pPr>
+            <a:r>
+              <a:t>Доказательство</a:t>
+            </a:r>
+          </a:p>
+        </p:txBody>
+      </p:sp>
+      <p:sp>
+        <p:nvSpPr>
+          <p:cNvPr id="20" name="TextBox 19"/>
+          <p:cNvSpPr txBox="1"/>
+          <p:nvPr/>
+        </p:nvSpPr>
+        <p:spPr>
+          <a:xfrm>
+            <a:off x="749808" y="4937760"/>
+            <a:ext cx="4937760" cy="548640"/>
+          </a:xfrm>
+          <a:prstGeom prst="rect">
+            <a:avLst/>
+          </a:prstGeom>
+          <a:noFill/>
+        </p:spPr>
+        <p:txBody>
+          <a:bodyPr wrap="square">
+            <a:spAutoFit/>
+          </a:bodyPr>
+          <a:lstStyle/>
+          <a:p>
+            <a:pPr algn="l">
+              <a:defRPr sz="1300" b="0">
+                <a:solidFill>
+                  <a:srgbClr val="6E6E68"/>
+                </a:solidFill>
+                <a:latin typeface="Calibri"/>
+              </a:defRPr>
+            </a:pPr>
+            <a:r>
+              <a:t>before/after EXPLAIN + ANALYZE/distribution + FS sanity.</a:t>
             </a:r>
           </a:p>
         </p:txBody>
